--- a/output/wordlabs-fair-3day.pptx
+++ b/output/wordlabs-fair-3day.pptx
@@ -4279,7 +4279,7 @@
                 <a:ea typeface="Calibri" pitchFamily="34" charset="-122"/>
                 <a:cs typeface="Calibri" pitchFamily="34" charset="-120"/>
               </a:rPr>
-              <a:t>Origin: Latin: fair (Old English: fæger)</a:t>
+              <a:t>Origin: Latin: fair</a:t>
             </a:r>
             <a:endParaRPr lang="en-US" sz="1300" dirty="0"/>
           </a:p>
@@ -6040,7 +6040,7 @@
                 <a:ea typeface="Calibri" pitchFamily="34" charset="-122"/>
                 <a:cs typeface="Calibri" pitchFamily="34" charset="-120"/>
               </a:rPr>
-              <a:t>It was completely </a:t>
+              <a:t>The teacher explained that acting </a:t>
             </a:r>
             <a:pPr algn="l" indent="0" marL="0">
               <a:buNone/>
@@ -6057,7 +6057,7 @@
                 <a:ea typeface="Calibri" pitchFamily="34" charset="-122"/>
                 <a:cs typeface="Calibri" pitchFamily="34" charset="-120"/>
               </a:rPr>
-              <a:t>unfair</a:t>
+              <a:t>unfairly</a:t>
             </a:r>
             <a:pPr algn="l" indent="0" marL="0">
               <a:buNone/>
@@ -6071,7 +6071,7 @@
                 <a:ea typeface="Calibri" pitchFamily="34" charset="-122"/>
                 <a:cs typeface="Calibri" pitchFamily="34" charset="-120"/>
               </a:rPr>
-              <a:t> that the </a:t>
+              <a:t> would not be tolerated, because </a:t>
             </a:r>
             <a:pPr algn="l" indent="0" marL="0">
               <a:buNone/>
@@ -6088,7 +6088,7 @@
                 <a:ea typeface="Calibri" pitchFamily="34" charset="-122"/>
                 <a:cs typeface="Calibri" pitchFamily="34" charset="-120"/>
               </a:rPr>
-              <a:t>fairground</a:t>
+              <a:t>fairness</a:t>
             </a:r>
             <a:pPr algn="l" indent="0" marL="0">
               <a:buNone/>
@@ -6102,7 +6102,7 @@
                 <a:ea typeface="Calibri" pitchFamily="34" charset="-122"/>
                 <a:cs typeface="Calibri" pitchFamily="34" charset="-120"/>
               </a:rPr>
-              <a:t> closed before we had a chance to go on the rides!</a:t>
+              <a:t> matters to everyone in our class.</a:t>
             </a:r>
             <a:endParaRPr lang="en-US" sz="1800" dirty="0"/>
           </a:p>
@@ -6257,7 +6257,7 @@
                 <a:ea typeface="Trebuchet MS" pitchFamily="34" charset="-122"/>
                 <a:cs typeface="Trebuchet MS" pitchFamily="34" charset="-120"/>
               </a:rPr>
-              <a:t>unfair</a:t>
+              <a:t>unfairly</a:t>
             </a:r>
             <a:endParaRPr lang="en-US" sz="1400" dirty="0"/>
           </a:p>
@@ -6385,7 +6385,7 @@
                 <a:ea typeface="Trebuchet MS" pitchFamily="34" charset="-122"/>
                 <a:cs typeface="Trebuchet MS" pitchFamily="34" charset="-120"/>
               </a:rPr>
-              <a:t>fairground</a:t>
+              <a:t>fairness</a:t>
             </a:r>
             <a:endParaRPr lang="en-US" sz="1400" dirty="0"/>
           </a:p>
@@ -6855,7 +6855,7 @@
                 <a:ea typeface="Trebuchet MS" pitchFamily="34" charset="-122"/>
                 <a:cs typeface="Trebuchet MS" pitchFamily="34" charset="-120"/>
               </a:rPr>
-              <a:t>unfair</a:t>
+              <a:t>unfairly</a:t>
             </a:r>
             <a:endParaRPr lang="en-US" sz="2800" dirty="0"/>
           </a:p>
@@ -7682,7 +7682,7 @@
                 <a:ea typeface="Trebuchet MS" pitchFamily="34" charset="-122"/>
                 <a:cs typeface="Trebuchet MS" pitchFamily="34" charset="-120"/>
               </a:rPr>
-              <a:t>unfair</a:t>
+              <a:t>unfairly</a:t>
             </a:r>
             <a:endParaRPr lang="en-US" sz="2800" dirty="0"/>
           </a:p>
@@ -7762,7 +7762,7 @@
         </p:nvSpPr>
         <p:spPr>
           <a:xfrm>
-            <a:off x="2938272" y="2258568"/>
+            <a:off x="2221992" y="2258568"/>
             <a:ext cx="1828800" cy="292608"/>
           </a:xfrm>
           <a:prstGeom prst="rect">
@@ -7796,7 +7796,7 @@
         </p:nvSpPr>
         <p:spPr>
           <a:xfrm>
-            <a:off x="2938272" y="2258568"/>
+            <a:off x="2221992" y="2258568"/>
             <a:ext cx="1828800" cy="292608"/>
           </a:xfrm>
           <a:prstGeom prst="rect">
@@ -7835,7 +7835,7 @@
         </p:nvSpPr>
         <p:spPr>
           <a:xfrm>
-            <a:off x="2938272" y="2569464"/>
+            <a:off x="2221992" y="2569464"/>
             <a:ext cx="1828800" cy="201168"/>
           </a:xfrm>
           <a:prstGeom prst="rect">
@@ -7874,7 +7874,7 @@
         </p:nvSpPr>
         <p:spPr>
           <a:xfrm>
-            <a:off x="5803392" y="2258568"/>
+            <a:off x="4370832" y="2258568"/>
             <a:ext cx="1828800" cy="292608"/>
           </a:xfrm>
           <a:prstGeom prst="rect">
@@ -7908,7 +7908,7 @@
         </p:nvSpPr>
         <p:spPr>
           <a:xfrm>
-            <a:off x="5803392" y="2258568"/>
+            <a:off x="4370832" y="2258568"/>
             <a:ext cx="1828800" cy="292608"/>
           </a:xfrm>
           <a:prstGeom prst="rect">
@@ -7947,7 +7947,7 @@
         </p:nvSpPr>
         <p:spPr>
           <a:xfrm>
-            <a:off x="5803392" y="2569464"/>
+            <a:off x="4370832" y="2569464"/>
             <a:ext cx="1828800" cy="201168"/>
           </a:xfrm>
           <a:prstGeom prst="rect">
@@ -7986,6 +7986,118 @@
         </p:nvSpPr>
         <p:spPr>
           <a:xfrm>
+            <a:off x="6519672" y="2258568"/>
+            <a:ext cx="1828800" cy="292608"/>
+          </a:xfrm>
+          <a:prstGeom prst="rect">
+            <a:avLst>
+              <a:gd name="adj" fmla="val 25000"/>
+            </a:avLst>
+          </a:prstGeom>
+          <a:solidFill>
+            <a:srgbClr val="FCE7F3"/>
+          </a:solidFill>
+          <a:ln w="19050">
+            <a:solidFill>
+              <a:srgbClr val="DB2777"/>
+            </a:solidFill>
+            <a:prstDash val="solid"/>
+          </a:ln>
+          <a:effectLst>
+            <a:outerShdw sx="100000" sy="100000" kx="0" ky="0" algn="bl" rotWithShape="0" blurRad="101600" dist="38100" dir="8100000">
+              <a:srgbClr val="000000">
+                <a:alpha val="12000"/>
+              </a:srgbClr>
+            </a:outerShdw>
+          </a:effectLst>
+        </p:spPr>
+      </p:sp>
+      <p:sp>
+        <p:nvSpPr>
+          <p:cNvPr id="23" name="Text 21"/>
+          <p:cNvSpPr/>
+          <p:nvPr/>
+        </p:nvSpPr>
+        <p:spPr>
+          <a:xfrm>
+            <a:off x="6519672" y="2258568"/>
+            <a:ext cx="1828800" cy="292608"/>
+          </a:xfrm>
+          <a:prstGeom prst="rect">
+            <a:avLst/>
+          </a:prstGeom>
+          <a:noFill/>
+          <a:ln/>
+        </p:spPr>
+        <p:txBody>
+          <a:bodyPr wrap="square" lIns="0" tIns="0" rIns="0" bIns="0" rtlCol="0" anchor="ctr"/>
+          <a:lstStyle/>
+          <a:p>
+            <a:pPr algn="ctr" indent="0" marL="0">
+              <a:buNone/>
+            </a:pPr>
+            <a:r>
+              <a:rPr lang="en-US" sz="1300" b="1" dirty="0">
+                <a:solidFill>
+                  <a:srgbClr val="9D174D"/>
+                </a:solidFill>
+                <a:latin typeface="Trebuchet MS" pitchFamily="34" charset="0"/>
+                <a:ea typeface="Trebuchet MS" pitchFamily="34" charset="-122"/>
+                <a:cs typeface="Trebuchet MS" pitchFamily="34" charset="-120"/>
+              </a:rPr>
+              <a:t>ly</a:t>
+            </a:r>
+            <a:endParaRPr lang="en-US" sz="1300" dirty="0"/>
+          </a:p>
+        </p:txBody>
+      </p:sp>
+      <p:sp>
+        <p:nvSpPr>
+          <p:cNvPr id="24" name="Text 22"/>
+          <p:cNvSpPr/>
+          <p:nvPr/>
+        </p:nvSpPr>
+        <p:spPr>
+          <a:xfrm>
+            <a:off x="6519672" y="2569464"/>
+            <a:ext cx="1828800" cy="201168"/>
+          </a:xfrm>
+          <a:prstGeom prst="rect">
+            <a:avLst/>
+          </a:prstGeom>
+          <a:noFill/>
+          <a:ln/>
+        </p:spPr>
+        <p:txBody>
+          <a:bodyPr wrap="square" lIns="0" tIns="0" rIns="0" bIns="0" rtlCol="0" anchor="t"/>
+          <a:lstStyle/>
+          <a:p>
+            <a:pPr algn="ctr" indent="0" marL="0">
+              <a:buNone/>
+            </a:pPr>
+            <a:r>
+              <a:rPr lang="en-US" sz="850" dirty="0">
+                <a:solidFill>
+                  <a:srgbClr val="475569"/>
+                </a:solidFill>
+                <a:latin typeface="Calibri" pitchFamily="34" charset="0"/>
+                <a:ea typeface="Calibri" pitchFamily="34" charset="-122"/>
+                <a:cs typeface="Calibri" pitchFamily="34" charset="-120"/>
+              </a:rPr>
+              <a:t>in a way that is</a:t>
+            </a:r>
+            <a:endParaRPr lang="en-US" sz="850" dirty="0"/>
+          </a:p>
+        </p:txBody>
+      </p:sp>
+      <p:sp>
+        <p:nvSpPr>
+          <p:cNvPr id="25" name="Shape 23"/>
+          <p:cNvSpPr/>
+          <p:nvPr/>
+        </p:nvSpPr>
+        <p:spPr>
+          <a:xfrm>
             <a:off x="365760" y="3273552"/>
             <a:ext cx="1371600" cy="658368"/>
           </a:xfrm>
@@ -8007,7 +8119,7 @@
       </p:sp>
       <p:sp>
         <p:nvSpPr>
-          <p:cNvPr id="23" name="Text 21"/>
+          <p:cNvPr id="26" name="Text 24"/>
           <p:cNvSpPr/>
           <p:nvPr/>
         </p:nvSpPr>
@@ -8046,7 +8158,7 @@
       </p:sp>
       <p:sp>
         <p:nvSpPr>
-          <p:cNvPr id="24" name="Shape 22"/>
+          <p:cNvPr id="27" name="Shape 25"/>
           <p:cNvSpPr/>
           <p:nvPr/>
         </p:nvSpPr>
@@ -8073,7 +8185,7 @@
       </p:sp>
       <p:sp>
         <p:nvSpPr>
-          <p:cNvPr id="25" name="Text 23"/>
+          <p:cNvPr id="28" name="Text 26"/>
           <p:cNvSpPr/>
           <p:nvPr/>
         </p:nvSpPr>
@@ -8112,7 +8224,7 @@
       </p:sp>
       <p:sp>
         <p:nvSpPr>
-          <p:cNvPr id="26" name="Shape 24"/>
+          <p:cNvPr id="29" name="Shape 27"/>
           <p:cNvSpPr/>
           <p:nvPr/>
         </p:nvSpPr>
@@ -8139,7 +8251,7 @@
       </p:sp>
       <p:sp>
         <p:nvSpPr>
-          <p:cNvPr id="27" name="Text 25"/>
+          <p:cNvPr id="30" name="Text 28"/>
           <p:cNvSpPr/>
           <p:nvPr/>
         </p:nvSpPr>
@@ -8178,7 +8290,7 @@
       </p:sp>
       <p:sp>
         <p:nvSpPr>
-          <p:cNvPr id="28" name="Shape 26"/>
+          <p:cNvPr id="31" name="Shape 29"/>
           <p:cNvSpPr/>
           <p:nvPr/>
         </p:nvSpPr>
@@ -8205,7 +8317,7 @@
       </p:sp>
       <p:sp>
         <p:nvSpPr>
-          <p:cNvPr id="29" name="Text 27"/>
+          <p:cNvPr id="32" name="Text 30"/>
           <p:cNvSpPr/>
           <p:nvPr/>
         </p:nvSpPr>
@@ -8667,7 +8779,7 @@
                 <a:ea typeface="Trebuchet MS" pitchFamily="34" charset="-122"/>
                 <a:cs typeface="Trebuchet MS" pitchFamily="34" charset="-120"/>
               </a:rPr>
-              <a:t>unfair</a:t>
+              <a:t>unfairly</a:t>
             </a:r>
             <a:endParaRPr lang="en-US" sz="2800" dirty="0"/>
           </a:p>
@@ -8747,7 +8859,7 @@
         </p:nvSpPr>
         <p:spPr>
           <a:xfrm>
-            <a:off x="2938272" y="2258568"/>
+            <a:off x="2221992" y="2258568"/>
             <a:ext cx="1828800" cy="292608"/>
           </a:xfrm>
           <a:prstGeom prst="rect">
@@ -8781,7 +8893,7 @@
         </p:nvSpPr>
         <p:spPr>
           <a:xfrm>
-            <a:off x="2938272" y="2258568"/>
+            <a:off x="2221992" y="2258568"/>
             <a:ext cx="1828800" cy="292608"/>
           </a:xfrm>
           <a:prstGeom prst="rect">
@@ -8820,7 +8932,7 @@
         </p:nvSpPr>
         <p:spPr>
           <a:xfrm>
-            <a:off x="2938272" y="2569464"/>
+            <a:off x="2221992" y="2569464"/>
             <a:ext cx="1828800" cy="201168"/>
           </a:xfrm>
           <a:prstGeom prst="rect">
@@ -8859,7 +8971,7 @@
         </p:nvSpPr>
         <p:spPr>
           <a:xfrm>
-            <a:off x="5803392" y="2258568"/>
+            <a:off x="4370832" y="2258568"/>
             <a:ext cx="1828800" cy="292608"/>
           </a:xfrm>
           <a:prstGeom prst="rect">
@@ -8893,7 +9005,7 @@
         </p:nvSpPr>
         <p:spPr>
           <a:xfrm>
-            <a:off x="5803392" y="2258568"/>
+            <a:off x="4370832" y="2258568"/>
             <a:ext cx="1828800" cy="292608"/>
           </a:xfrm>
           <a:prstGeom prst="rect">
@@ -8932,7 +9044,7 @@
         </p:nvSpPr>
         <p:spPr>
           <a:xfrm>
-            <a:off x="5803392" y="2569464"/>
+            <a:off x="4370832" y="2569464"/>
             <a:ext cx="1828800" cy="201168"/>
           </a:xfrm>
           <a:prstGeom prst="rect">
@@ -8971,6 +9083,118 @@
         </p:nvSpPr>
         <p:spPr>
           <a:xfrm>
+            <a:off x="6519672" y="2258568"/>
+            <a:ext cx="1828800" cy="292608"/>
+          </a:xfrm>
+          <a:prstGeom prst="rect">
+            <a:avLst>
+              <a:gd name="adj" fmla="val 25000"/>
+            </a:avLst>
+          </a:prstGeom>
+          <a:solidFill>
+            <a:srgbClr val="FCE7F3"/>
+          </a:solidFill>
+          <a:ln w="19050">
+            <a:solidFill>
+              <a:srgbClr val="DB2777"/>
+            </a:solidFill>
+            <a:prstDash val="solid"/>
+          </a:ln>
+          <a:effectLst>
+            <a:outerShdw sx="100000" sy="100000" kx="0" ky="0" algn="bl" rotWithShape="0" blurRad="101600" dist="38100" dir="8100000">
+              <a:srgbClr val="000000">
+                <a:alpha val="12000"/>
+              </a:srgbClr>
+            </a:outerShdw>
+          </a:effectLst>
+        </p:spPr>
+      </p:sp>
+      <p:sp>
+        <p:nvSpPr>
+          <p:cNvPr id="23" name="Text 21"/>
+          <p:cNvSpPr/>
+          <p:nvPr/>
+        </p:nvSpPr>
+        <p:spPr>
+          <a:xfrm>
+            <a:off x="6519672" y="2258568"/>
+            <a:ext cx="1828800" cy="292608"/>
+          </a:xfrm>
+          <a:prstGeom prst="rect">
+            <a:avLst/>
+          </a:prstGeom>
+          <a:noFill/>
+          <a:ln/>
+        </p:spPr>
+        <p:txBody>
+          <a:bodyPr wrap="square" lIns="0" tIns="0" rIns="0" bIns="0" rtlCol="0" anchor="ctr"/>
+          <a:lstStyle/>
+          <a:p>
+            <a:pPr algn="ctr" indent="0" marL="0">
+              <a:buNone/>
+            </a:pPr>
+            <a:r>
+              <a:rPr lang="en-US" sz="1300" b="1" dirty="0">
+                <a:solidFill>
+                  <a:srgbClr val="9D174D"/>
+                </a:solidFill>
+                <a:latin typeface="Trebuchet MS" pitchFamily="34" charset="0"/>
+                <a:ea typeface="Trebuchet MS" pitchFamily="34" charset="-122"/>
+                <a:cs typeface="Trebuchet MS" pitchFamily="34" charset="-120"/>
+              </a:rPr>
+              <a:t>ly</a:t>
+            </a:r>
+            <a:endParaRPr lang="en-US" sz="1300" dirty="0"/>
+          </a:p>
+        </p:txBody>
+      </p:sp>
+      <p:sp>
+        <p:nvSpPr>
+          <p:cNvPr id="24" name="Text 22"/>
+          <p:cNvSpPr/>
+          <p:nvPr/>
+        </p:nvSpPr>
+        <p:spPr>
+          <a:xfrm>
+            <a:off x="6519672" y="2569464"/>
+            <a:ext cx="1828800" cy="201168"/>
+          </a:xfrm>
+          <a:prstGeom prst="rect">
+            <a:avLst/>
+          </a:prstGeom>
+          <a:noFill/>
+          <a:ln/>
+        </p:spPr>
+        <p:txBody>
+          <a:bodyPr wrap="square" lIns="0" tIns="0" rIns="0" bIns="0" rtlCol="0" anchor="t"/>
+          <a:lstStyle/>
+          <a:p>
+            <a:pPr algn="ctr" indent="0" marL="0">
+              <a:buNone/>
+            </a:pPr>
+            <a:r>
+              <a:rPr lang="en-US" sz="850" dirty="0">
+                <a:solidFill>
+                  <a:srgbClr val="475569"/>
+                </a:solidFill>
+                <a:latin typeface="Calibri" pitchFamily="34" charset="0"/>
+                <a:ea typeface="Calibri" pitchFamily="34" charset="-122"/>
+                <a:cs typeface="Calibri" pitchFamily="34" charset="-120"/>
+              </a:rPr>
+              <a:t>in a way that is</a:t>
+            </a:r>
+            <a:endParaRPr lang="en-US" sz="850" dirty="0"/>
+          </a:p>
+        </p:txBody>
+      </p:sp>
+      <p:sp>
+        <p:nvSpPr>
+          <p:cNvPr id="25" name="Shape 23"/>
+          <p:cNvSpPr/>
+          <p:nvPr/>
+        </p:nvSpPr>
+        <p:spPr>
+          <a:xfrm>
             <a:off x="365760" y="3273552"/>
             <a:ext cx="1371600" cy="658368"/>
           </a:xfrm>
@@ -8992,7 +9216,7 @@
       </p:sp>
       <p:sp>
         <p:nvSpPr>
-          <p:cNvPr id="23" name="Text 21"/>
+          <p:cNvPr id="26" name="Text 24"/>
           <p:cNvSpPr/>
           <p:nvPr/>
         </p:nvSpPr>
@@ -9031,7 +9255,7 @@
       </p:sp>
       <p:sp>
         <p:nvSpPr>
-          <p:cNvPr id="24" name="Shape 22"/>
+          <p:cNvPr id="27" name="Shape 25"/>
           <p:cNvSpPr/>
           <p:nvPr/>
         </p:nvSpPr>
@@ -9058,13 +9282,13 @@
       </p:sp>
       <p:sp>
         <p:nvSpPr>
-          <p:cNvPr id="25" name="Shape 23"/>
-          <p:cNvSpPr/>
-          <p:nvPr/>
-        </p:nvSpPr>
-        <p:spPr>
-          <a:xfrm>
-            <a:off x="2999232" y="3364992"/>
+          <p:cNvPr id="28" name="Shape 26"/>
+          <p:cNvSpPr/>
+          <p:nvPr/>
+        </p:nvSpPr>
+        <p:spPr>
+          <a:xfrm>
+            <a:off x="2313432" y="3364992"/>
             <a:ext cx="1645920" cy="475488"/>
           </a:xfrm>
           <a:prstGeom prst="rect">
@@ -9085,13 +9309,13 @@
       </p:sp>
       <p:sp>
         <p:nvSpPr>
-          <p:cNvPr id="26" name="Text 24"/>
-          <p:cNvSpPr/>
-          <p:nvPr/>
-        </p:nvSpPr>
-        <p:spPr>
-          <a:xfrm>
-            <a:off x="2999232" y="3364992"/>
+          <p:cNvPr id="29" name="Text 27"/>
+          <p:cNvSpPr/>
+          <p:nvPr/>
+        </p:nvSpPr>
+        <p:spPr>
+          <a:xfrm>
+            <a:off x="2313432" y="3364992"/>
             <a:ext cx="1645920" cy="475488"/>
           </a:xfrm>
           <a:prstGeom prst="rect">
@@ -9124,14 +9348,14 @@
       </p:sp>
       <p:sp>
         <p:nvSpPr>
-          <p:cNvPr id="27" name="Text 25"/>
-          <p:cNvSpPr/>
-          <p:nvPr/>
-        </p:nvSpPr>
-        <p:spPr>
-          <a:xfrm>
-            <a:off x="4645152" y="3364992"/>
-            <a:ext cx="1097280" cy="475488"/>
+          <p:cNvPr id="30" name="Text 28"/>
+          <p:cNvSpPr/>
+          <p:nvPr/>
+        </p:nvSpPr>
+        <p:spPr>
+          <a:xfrm>
+            <a:off x="3959352" y="3364992"/>
+            <a:ext cx="411480" cy="475488"/>
           </a:xfrm>
           <a:prstGeom prst="rect">
             <a:avLst/>
@@ -9163,13 +9387,13 @@
       </p:sp>
       <p:sp>
         <p:nvSpPr>
-          <p:cNvPr id="28" name="Shape 26"/>
-          <p:cNvSpPr/>
-          <p:nvPr/>
-        </p:nvSpPr>
-        <p:spPr>
-          <a:xfrm>
-            <a:off x="5742432" y="3364992"/>
+          <p:cNvPr id="31" name="Shape 29"/>
+          <p:cNvSpPr/>
+          <p:nvPr/>
+        </p:nvSpPr>
+        <p:spPr>
+          <a:xfrm>
+            <a:off x="4370832" y="3364992"/>
             <a:ext cx="1645920" cy="475488"/>
           </a:xfrm>
           <a:prstGeom prst="rect">
@@ -9190,13 +9414,13 @@
       </p:sp>
       <p:sp>
         <p:nvSpPr>
-          <p:cNvPr id="29" name="Text 27"/>
-          <p:cNvSpPr/>
-          <p:nvPr/>
-        </p:nvSpPr>
-        <p:spPr>
-          <a:xfrm>
-            <a:off x="5742432" y="3364992"/>
+          <p:cNvPr id="32" name="Text 30"/>
+          <p:cNvSpPr/>
+          <p:nvPr/>
+        </p:nvSpPr>
+        <p:spPr>
+          <a:xfrm>
+            <a:off x="4370832" y="3364992"/>
             <a:ext cx="1645920" cy="475488"/>
           </a:xfrm>
           <a:prstGeom prst="rect">
@@ -9229,7 +9453,112 @@
       </p:sp>
       <p:sp>
         <p:nvSpPr>
-          <p:cNvPr id="30" name="Shape 28"/>
+          <p:cNvPr id="33" name="Text 31"/>
+          <p:cNvSpPr/>
+          <p:nvPr/>
+        </p:nvSpPr>
+        <p:spPr>
+          <a:xfrm>
+            <a:off x="6016752" y="3364992"/>
+            <a:ext cx="411480" cy="475488"/>
+          </a:xfrm>
+          <a:prstGeom prst="rect">
+            <a:avLst/>
+          </a:prstGeom>
+          <a:noFill/>
+          <a:ln/>
+        </p:spPr>
+        <p:txBody>
+          <a:bodyPr wrap="square" lIns="0" tIns="0" rIns="0" bIns="0" rtlCol="0" anchor="ctr"/>
+          <a:lstStyle/>
+          <a:p>
+            <a:pPr algn="ctr" indent="0" marL="0">
+              <a:buNone/>
+            </a:pPr>
+            <a:r>
+              <a:rPr lang="en-US" sz="1600" b="1" dirty="0">
+                <a:solidFill>
+                  <a:srgbClr val="0D9488"/>
+                </a:solidFill>
+                <a:latin typeface="Trebuchet MS" pitchFamily="34" charset="0"/>
+                <a:ea typeface="Trebuchet MS" pitchFamily="34" charset="-122"/>
+                <a:cs typeface="Trebuchet MS" pitchFamily="34" charset="-120"/>
+              </a:rPr>
+              <a:t>·</a:t>
+            </a:r>
+            <a:endParaRPr lang="en-US" sz="1600" dirty="0"/>
+          </a:p>
+        </p:txBody>
+      </p:sp>
+      <p:sp>
+        <p:nvSpPr>
+          <p:cNvPr id="34" name="Shape 32"/>
+          <p:cNvSpPr/>
+          <p:nvPr/>
+        </p:nvSpPr>
+        <p:spPr>
+          <a:xfrm>
+            <a:off x="6428232" y="3364992"/>
+            <a:ext cx="1645920" cy="475488"/>
+          </a:xfrm>
+          <a:prstGeom prst="rect">
+            <a:avLst>
+              <a:gd name="adj" fmla="val 9615"/>
+            </a:avLst>
+          </a:prstGeom>
+          <a:solidFill>
+            <a:srgbClr val="FFFFFF"/>
+          </a:solidFill>
+          <a:ln w="12700">
+            <a:solidFill>
+              <a:srgbClr val="0D9488"/>
+            </a:solidFill>
+            <a:prstDash val="solid"/>
+          </a:ln>
+        </p:spPr>
+      </p:sp>
+      <p:sp>
+        <p:nvSpPr>
+          <p:cNvPr id="35" name="Text 33"/>
+          <p:cNvSpPr/>
+          <p:nvPr/>
+        </p:nvSpPr>
+        <p:spPr>
+          <a:xfrm>
+            <a:off x="6428232" y="3364992"/>
+            <a:ext cx="1645920" cy="475488"/>
+          </a:xfrm>
+          <a:prstGeom prst="rect">
+            <a:avLst/>
+          </a:prstGeom>
+          <a:noFill/>
+          <a:ln/>
+        </p:spPr>
+        <p:txBody>
+          <a:bodyPr wrap="square" lIns="0" tIns="0" rIns="0" bIns="0" rtlCol="0" anchor="ctr"/>
+          <a:lstStyle/>
+          <a:p>
+            <a:pPr algn="ctr" indent="0" marL="0">
+              <a:buNone/>
+            </a:pPr>
+            <a:r>
+              <a:rPr lang="en-US" sz="1400" b="1" dirty="0">
+                <a:solidFill>
+                  <a:srgbClr val="0D9488"/>
+                </a:solidFill>
+                <a:latin typeface="Trebuchet MS" pitchFamily="34" charset="0"/>
+                <a:ea typeface="Trebuchet MS" pitchFamily="34" charset="-122"/>
+                <a:cs typeface="Trebuchet MS" pitchFamily="34" charset="-120"/>
+              </a:rPr>
+              <a:t>ly</a:t>
+            </a:r>
+            <a:endParaRPr lang="en-US" sz="1400" dirty="0"/>
+          </a:p>
+        </p:txBody>
+      </p:sp>
+      <p:sp>
+        <p:nvSpPr>
+          <p:cNvPr id="36" name="Shape 34"/>
           <p:cNvSpPr/>
           <p:nvPr/>
         </p:nvSpPr>
@@ -9256,7 +9585,7 @@
       </p:sp>
       <p:sp>
         <p:nvSpPr>
-          <p:cNvPr id="31" name="Text 29"/>
+          <p:cNvPr id="37" name="Text 35"/>
           <p:cNvSpPr/>
           <p:nvPr/>
         </p:nvSpPr>
@@ -9295,7 +9624,7 @@
       </p:sp>
       <p:sp>
         <p:nvSpPr>
-          <p:cNvPr id="32" name="Shape 30"/>
+          <p:cNvPr id="38" name="Shape 36"/>
           <p:cNvSpPr/>
           <p:nvPr/>
         </p:nvSpPr>
@@ -9322,7 +9651,7 @@
       </p:sp>
       <p:sp>
         <p:nvSpPr>
-          <p:cNvPr id="33" name="Text 31"/>
+          <p:cNvPr id="39" name="Text 37"/>
           <p:cNvSpPr/>
           <p:nvPr/>
         </p:nvSpPr>
@@ -9784,7 +10113,7 @@
                 <a:ea typeface="Trebuchet MS" pitchFamily="34" charset="-122"/>
                 <a:cs typeface="Trebuchet MS" pitchFamily="34" charset="-120"/>
               </a:rPr>
-              <a:t>unfair</a:t>
+              <a:t>unfairly</a:t>
             </a:r>
             <a:endParaRPr lang="en-US" sz="2800" dirty="0"/>
           </a:p>
@@ -9864,7 +10193,7 @@
         </p:nvSpPr>
         <p:spPr>
           <a:xfrm>
-            <a:off x="2938272" y="2258568"/>
+            <a:off x="2221992" y="2258568"/>
             <a:ext cx="1828800" cy="292608"/>
           </a:xfrm>
           <a:prstGeom prst="rect">
@@ -9898,7 +10227,7 @@
         </p:nvSpPr>
         <p:spPr>
           <a:xfrm>
-            <a:off x="2938272" y="2258568"/>
+            <a:off x="2221992" y="2258568"/>
             <a:ext cx="1828800" cy="292608"/>
           </a:xfrm>
           <a:prstGeom prst="rect">
@@ -9937,7 +10266,7 @@
         </p:nvSpPr>
         <p:spPr>
           <a:xfrm>
-            <a:off x="2938272" y="2569464"/>
+            <a:off x="2221992" y="2569464"/>
             <a:ext cx="1828800" cy="201168"/>
           </a:xfrm>
           <a:prstGeom prst="rect">
@@ -9976,7 +10305,7 @@
         </p:nvSpPr>
         <p:spPr>
           <a:xfrm>
-            <a:off x="5803392" y="2258568"/>
+            <a:off x="4370832" y="2258568"/>
             <a:ext cx="1828800" cy="292608"/>
           </a:xfrm>
           <a:prstGeom prst="rect">
@@ -10010,7 +10339,7 @@
         </p:nvSpPr>
         <p:spPr>
           <a:xfrm>
-            <a:off x="5803392" y="2258568"/>
+            <a:off x="4370832" y="2258568"/>
             <a:ext cx="1828800" cy="292608"/>
           </a:xfrm>
           <a:prstGeom prst="rect">
@@ -10049,7 +10378,7 @@
         </p:nvSpPr>
         <p:spPr>
           <a:xfrm>
-            <a:off x="5803392" y="2569464"/>
+            <a:off x="4370832" y="2569464"/>
             <a:ext cx="1828800" cy="201168"/>
           </a:xfrm>
           <a:prstGeom prst="rect">
@@ -10088,6 +10417,118 @@
         </p:nvSpPr>
         <p:spPr>
           <a:xfrm>
+            <a:off x="6519672" y="2258568"/>
+            <a:ext cx="1828800" cy="292608"/>
+          </a:xfrm>
+          <a:prstGeom prst="rect">
+            <a:avLst>
+              <a:gd name="adj" fmla="val 25000"/>
+            </a:avLst>
+          </a:prstGeom>
+          <a:solidFill>
+            <a:srgbClr val="FCE7F3"/>
+          </a:solidFill>
+          <a:ln w="19050">
+            <a:solidFill>
+              <a:srgbClr val="DB2777"/>
+            </a:solidFill>
+            <a:prstDash val="solid"/>
+          </a:ln>
+          <a:effectLst>
+            <a:outerShdw sx="100000" sy="100000" kx="0" ky="0" algn="bl" rotWithShape="0" blurRad="101600" dist="38100" dir="8100000">
+              <a:srgbClr val="000000">
+                <a:alpha val="12000"/>
+              </a:srgbClr>
+            </a:outerShdw>
+          </a:effectLst>
+        </p:spPr>
+      </p:sp>
+      <p:sp>
+        <p:nvSpPr>
+          <p:cNvPr id="23" name="Text 21"/>
+          <p:cNvSpPr/>
+          <p:nvPr/>
+        </p:nvSpPr>
+        <p:spPr>
+          <a:xfrm>
+            <a:off x="6519672" y="2258568"/>
+            <a:ext cx="1828800" cy="292608"/>
+          </a:xfrm>
+          <a:prstGeom prst="rect">
+            <a:avLst/>
+          </a:prstGeom>
+          <a:noFill/>
+          <a:ln/>
+        </p:spPr>
+        <p:txBody>
+          <a:bodyPr wrap="square" lIns="0" tIns="0" rIns="0" bIns="0" rtlCol="0" anchor="ctr"/>
+          <a:lstStyle/>
+          <a:p>
+            <a:pPr algn="ctr" indent="0" marL="0">
+              <a:buNone/>
+            </a:pPr>
+            <a:r>
+              <a:rPr lang="en-US" sz="1300" b="1" dirty="0">
+                <a:solidFill>
+                  <a:srgbClr val="9D174D"/>
+                </a:solidFill>
+                <a:latin typeface="Trebuchet MS" pitchFamily="34" charset="0"/>
+                <a:ea typeface="Trebuchet MS" pitchFamily="34" charset="-122"/>
+                <a:cs typeface="Trebuchet MS" pitchFamily="34" charset="-120"/>
+              </a:rPr>
+              <a:t>ly</a:t>
+            </a:r>
+            <a:endParaRPr lang="en-US" sz="1300" dirty="0"/>
+          </a:p>
+        </p:txBody>
+      </p:sp>
+      <p:sp>
+        <p:nvSpPr>
+          <p:cNvPr id="24" name="Text 22"/>
+          <p:cNvSpPr/>
+          <p:nvPr/>
+        </p:nvSpPr>
+        <p:spPr>
+          <a:xfrm>
+            <a:off x="6519672" y="2569464"/>
+            <a:ext cx="1828800" cy="201168"/>
+          </a:xfrm>
+          <a:prstGeom prst="rect">
+            <a:avLst/>
+          </a:prstGeom>
+          <a:noFill/>
+          <a:ln/>
+        </p:spPr>
+        <p:txBody>
+          <a:bodyPr wrap="square" lIns="0" tIns="0" rIns="0" bIns="0" rtlCol="0" anchor="t"/>
+          <a:lstStyle/>
+          <a:p>
+            <a:pPr algn="ctr" indent="0" marL="0">
+              <a:buNone/>
+            </a:pPr>
+            <a:r>
+              <a:rPr lang="en-US" sz="850" dirty="0">
+                <a:solidFill>
+                  <a:srgbClr val="475569"/>
+                </a:solidFill>
+                <a:latin typeface="Calibri" pitchFamily="34" charset="0"/>
+                <a:ea typeface="Calibri" pitchFamily="34" charset="-122"/>
+                <a:cs typeface="Calibri" pitchFamily="34" charset="-120"/>
+              </a:rPr>
+              <a:t>in a way that is</a:t>
+            </a:r>
+            <a:endParaRPr lang="en-US" sz="850" dirty="0"/>
+          </a:p>
+        </p:txBody>
+      </p:sp>
+      <p:sp>
+        <p:nvSpPr>
+          <p:cNvPr id="25" name="Shape 23"/>
+          <p:cNvSpPr/>
+          <p:nvPr/>
+        </p:nvSpPr>
+        <p:spPr>
+          <a:xfrm>
             <a:off x="365760" y="3273552"/>
             <a:ext cx="1371600" cy="658368"/>
           </a:xfrm>
@@ -10109,7 +10550,7 @@
       </p:sp>
       <p:sp>
         <p:nvSpPr>
-          <p:cNvPr id="23" name="Text 21"/>
+          <p:cNvPr id="26" name="Text 24"/>
           <p:cNvSpPr/>
           <p:nvPr/>
         </p:nvSpPr>
@@ -10148,7 +10589,7 @@
       </p:sp>
       <p:sp>
         <p:nvSpPr>
-          <p:cNvPr id="24" name="Shape 22"/>
+          <p:cNvPr id="27" name="Shape 25"/>
           <p:cNvSpPr/>
           <p:nvPr/>
         </p:nvSpPr>
@@ -10175,13 +10616,13 @@
       </p:sp>
       <p:sp>
         <p:nvSpPr>
-          <p:cNvPr id="25" name="Shape 23"/>
-          <p:cNvSpPr/>
-          <p:nvPr/>
-        </p:nvSpPr>
-        <p:spPr>
-          <a:xfrm>
-            <a:off x="2999232" y="3364992"/>
+          <p:cNvPr id="28" name="Shape 26"/>
+          <p:cNvSpPr/>
+          <p:nvPr/>
+        </p:nvSpPr>
+        <p:spPr>
+          <a:xfrm>
+            <a:off x="2313432" y="3364992"/>
             <a:ext cx="1645920" cy="475488"/>
           </a:xfrm>
           <a:prstGeom prst="rect">
@@ -10202,13 +10643,13 @@
       </p:sp>
       <p:sp>
         <p:nvSpPr>
-          <p:cNvPr id="26" name="Text 24"/>
-          <p:cNvSpPr/>
-          <p:nvPr/>
-        </p:nvSpPr>
-        <p:spPr>
-          <a:xfrm>
-            <a:off x="2999232" y="3364992"/>
+          <p:cNvPr id="29" name="Text 27"/>
+          <p:cNvSpPr/>
+          <p:nvPr/>
+        </p:nvSpPr>
+        <p:spPr>
+          <a:xfrm>
+            <a:off x="2313432" y="3364992"/>
             <a:ext cx="1645920" cy="475488"/>
           </a:xfrm>
           <a:prstGeom prst="rect">
@@ -10241,14 +10682,14 @@
       </p:sp>
       <p:sp>
         <p:nvSpPr>
-          <p:cNvPr id="27" name="Text 25"/>
-          <p:cNvSpPr/>
-          <p:nvPr/>
-        </p:nvSpPr>
-        <p:spPr>
-          <a:xfrm>
-            <a:off x="4645152" y="3364992"/>
-            <a:ext cx="1097280" cy="475488"/>
+          <p:cNvPr id="30" name="Text 28"/>
+          <p:cNvSpPr/>
+          <p:nvPr/>
+        </p:nvSpPr>
+        <p:spPr>
+          <a:xfrm>
+            <a:off x="3959352" y="3364992"/>
+            <a:ext cx="411480" cy="475488"/>
           </a:xfrm>
           <a:prstGeom prst="rect">
             <a:avLst/>
@@ -10280,13 +10721,13 @@
       </p:sp>
       <p:sp>
         <p:nvSpPr>
-          <p:cNvPr id="28" name="Shape 26"/>
-          <p:cNvSpPr/>
-          <p:nvPr/>
-        </p:nvSpPr>
-        <p:spPr>
-          <a:xfrm>
-            <a:off x="5742432" y="3364992"/>
+          <p:cNvPr id="31" name="Shape 29"/>
+          <p:cNvSpPr/>
+          <p:nvPr/>
+        </p:nvSpPr>
+        <p:spPr>
+          <a:xfrm>
+            <a:off x="4370832" y="3364992"/>
             <a:ext cx="1645920" cy="475488"/>
           </a:xfrm>
           <a:prstGeom prst="rect">
@@ -10307,13 +10748,13 @@
       </p:sp>
       <p:sp>
         <p:nvSpPr>
-          <p:cNvPr id="29" name="Text 27"/>
-          <p:cNvSpPr/>
-          <p:nvPr/>
-        </p:nvSpPr>
-        <p:spPr>
-          <a:xfrm>
-            <a:off x="5742432" y="3364992"/>
+          <p:cNvPr id="32" name="Text 30"/>
+          <p:cNvSpPr/>
+          <p:nvPr/>
+        </p:nvSpPr>
+        <p:spPr>
+          <a:xfrm>
+            <a:off x="4370832" y="3364992"/>
             <a:ext cx="1645920" cy="475488"/>
           </a:xfrm>
           <a:prstGeom prst="rect">
@@ -10346,7 +10787,112 @@
       </p:sp>
       <p:sp>
         <p:nvSpPr>
-          <p:cNvPr id="30" name="Shape 28"/>
+          <p:cNvPr id="33" name="Text 31"/>
+          <p:cNvSpPr/>
+          <p:nvPr/>
+        </p:nvSpPr>
+        <p:spPr>
+          <a:xfrm>
+            <a:off x="6016752" y="3364992"/>
+            <a:ext cx="411480" cy="475488"/>
+          </a:xfrm>
+          <a:prstGeom prst="rect">
+            <a:avLst/>
+          </a:prstGeom>
+          <a:noFill/>
+          <a:ln/>
+        </p:spPr>
+        <p:txBody>
+          <a:bodyPr wrap="square" lIns="0" tIns="0" rIns="0" bIns="0" rtlCol="0" anchor="ctr"/>
+          <a:lstStyle/>
+          <a:p>
+            <a:pPr algn="ctr" indent="0" marL="0">
+              <a:buNone/>
+            </a:pPr>
+            <a:r>
+              <a:rPr lang="en-US" sz="1600" b="1" dirty="0">
+                <a:solidFill>
+                  <a:srgbClr val="0D9488"/>
+                </a:solidFill>
+                <a:latin typeface="Trebuchet MS" pitchFamily="34" charset="0"/>
+                <a:ea typeface="Trebuchet MS" pitchFamily="34" charset="-122"/>
+                <a:cs typeface="Trebuchet MS" pitchFamily="34" charset="-120"/>
+              </a:rPr>
+              <a:t>·</a:t>
+            </a:r>
+            <a:endParaRPr lang="en-US" sz="1600" dirty="0"/>
+          </a:p>
+        </p:txBody>
+      </p:sp>
+      <p:sp>
+        <p:nvSpPr>
+          <p:cNvPr id="34" name="Shape 32"/>
+          <p:cNvSpPr/>
+          <p:nvPr/>
+        </p:nvSpPr>
+        <p:spPr>
+          <a:xfrm>
+            <a:off x="6428232" y="3364992"/>
+            <a:ext cx="1645920" cy="475488"/>
+          </a:xfrm>
+          <a:prstGeom prst="rect">
+            <a:avLst>
+              <a:gd name="adj" fmla="val 9615"/>
+            </a:avLst>
+          </a:prstGeom>
+          <a:solidFill>
+            <a:srgbClr val="FFFFFF"/>
+          </a:solidFill>
+          <a:ln w="12700">
+            <a:solidFill>
+              <a:srgbClr val="0D9488"/>
+            </a:solidFill>
+            <a:prstDash val="solid"/>
+          </a:ln>
+        </p:spPr>
+      </p:sp>
+      <p:sp>
+        <p:nvSpPr>
+          <p:cNvPr id="35" name="Text 33"/>
+          <p:cNvSpPr/>
+          <p:nvPr/>
+        </p:nvSpPr>
+        <p:spPr>
+          <a:xfrm>
+            <a:off x="6428232" y="3364992"/>
+            <a:ext cx="1645920" cy="475488"/>
+          </a:xfrm>
+          <a:prstGeom prst="rect">
+            <a:avLst/>
+          </a:prstGeom>
+          <a:noFill/>
+          <a:ln/>
+        </p:spPr>
+        <p:txBody>
+          <a:bodyPr wrap="square" lIns="0" tIns="0" rIns="0" bIns="0" rtlCol="0" anchor="ctr"/>
+          <a:lstStyle/>
+          <a:p>
+            <a:pPr algn="ctr" indent="0" marL="0">
+              <a:buNone/>
+            </a:pPr>
+            <a:r>
+              <a:rPr lang="en-US" sz="1400" b="1" dirty="0">
+                <a:solidFill>
+                  <a:srgbClr val="0D9488"/>
+                </a:solidFill>
+                <a:latin typeface="Trebuchet MS" pitchFamily="34" charset="0"/>
+                <a:ea typeface="Trebuchet MS" pitchFamily="34" charset="-122"/>
+                <a:cs typeface="Trebuchet MS" pitchFamily="34" charset="-120"/>
+              </a:rPr>
+              <a:t>ly</a:t>
+            </a:r>
+            <a:endParaRPr lang="en-US" sz="1400" dirty="0"/>
+          </a:p>
+        </p:txBody>
+      </p:sp>
+      <p:sp>
+        <p:nvSpPr>
+          <p:cNvPr id="36" name="Shape 34"/>
           <p:cNvSpPr/>
           <p:nvPr/>
         </p:nvSpPr>
@@ -10373,7 +10919,7 @@
       </p:sp>
       <p:sp>
         <p:nvSpPr>
-          <p:cNvPr id="31" name="Text 29"/>
+          <p:cNvPr id="37" name="Text 35"/>
           <p:cNvSpPr/>
           <p:nvPr/>
         </p:nvSpPr>
@@ -10412,7 +10958,7 @@
       </p:sp>
       <p:sp>
         <p:nvSpPr>
-          <p:cNvPr id="32" name="Shape 30"/>
+          <p:cNvPr id="38" name="Shape 36"/>
           <p:cNvSpPr/>
           <p:nvPr/>
         </p:nvSpPr>
@@ -10439,13 +10985,13 @@
       </p:sp>
       <p:sp>
         <p:nvSpPr>
-          <p:cNvPr id="33" name="Shape 31"/>
-          <p:cNvSpPr/>
-          <p:nvPr/>
-        </p:nvSpPr>
-        <p:spPr>
-          <a:xfrm>
-            <a:off x="2670048" y="4169664"/>
+          <p:cNvPr id="39" name="Shape 37"/>
+          <p:cNvSpPr/>
+          <p:nvPr/>
+        </p:nvSpPr>
+        <p:spPr>
+          <a:xfrm>
+            <a:off x="2254649" y="4169664"/>
             <a:ext cx="685800" cy="475488"/>
           </a:xfrm>
           <a:prstGeom prst="rect">
@@ -10466,13 +11012,13 @@
       </p:sp>
       <p:sp>
         <p:nvSpPr>
-          <p:cNvPr id="34" name="Text 32"/>
-          <p:cNvSpPr/>
-          <p:nvPr/>
-        </p:nvSpPr>
-        <p:spPr>
-          <a:xfrm>
-            <a:off x="2670048" y="4169664"/>
+          <p:cNvPr id="40" name="Text 38"/>
+          <p:cNvSpPr/>
+          <p:nvPr/>
+        </p:nvSpPr>
+        <p:spPr>
+          <a:xfrm>
+            <a:off x="2254649" y="4169664"/>
             <a:ext cx="685800" cy="475488"/>
           </a:xfrm>
           <a:prstGeom prst="rect">
@@ -10505,13 +11051,13 @@
       </p:sp>
       <p:sp>
         <p:nvSpPr>
-          <p:cNvPr id="35" name="Shape 33"/>
-          <p:cNvSpPr/>
-          <p:nvPr/>
-        </p:nvSpPr>
-        <p:spPr>
-          <a:xfrm>
-            <a:off x="4123944" y="4169664"/>
+          <p:cNvPr id="41" name="Shape 39"/>
+          <p:cNvSpPr/>
+          <p:nvPr/>
+        </p:nvSpPr>
+        <p:spPr>
+          <a:xfrm>
+            <a:off x="3293146" y="4169664"/>
             <a:ext cx="685800" cy="475488"/>
           </a:xfrm>
           <a:prstGeom prst="rect">
@@ -10532,13 +11078,13 @@
       </p:sp>
       <p:sp>
         <p:nvSpPr>
-          <p:cNvPr id="36" name="Text 34"/>
-          <p:cNvSpPr/>
-          <p:nvPr/>
-        </p:nvSpPr>
-        <p:spPr>
-          <a:xfrm>
-            <a:off x="4123944" y="4169664"/>
+          <p:cNvPr id="42" name="Text 40"/>
+          <p:cNvSpPr/>
+          <p:nvPr/>
+        </p:nvSpPr>
+        <p:spPr>
+          <a:xfrm>
+            <a:off x="3293146" y="4169664"/>
             <a:ext cx="685800" cy="475488"/>
           </a:xfrm>
           <a:prstGeom prst="rect">
@@ -10571,13 +11117,13 @@
       </p:sp>
       <p:sp>
         <p:nvSpPr>
-          <p:cNvPr id="37" name="Shape 35"/>
-          <p:cNvSpPr/>
-          <p:nvPr/>
-        </p:nvSpPr>
-        <p:spPr>
-          <a:xfrm>
-            <a:off x="5577840" y="4169664"/>
+          <p:cNvPr id="43" name="Shape 41"/>
+          <p:cNvSpPr/>
+          <p:nvPr/>
+        </p:nvSpPr>
+        <p:spPr>
+          <a:xfrm>
+            <a:off x="4331643" y="4169664"/>
             <a:ext cx="685800" cy="475488"/>
           </a:xfrm>
           <a:prstGeom prst="rect">
@@ -10598,13 +11144,13 @@
       </p:sp>
       <p:sp>
         <p:nvSpPr>
-          <p:cNvPr id="38" name="Text 36"/>
-          <p:cNvSpPr/>
-          <p:nvPr/>
-        </p:nvSpPr>
-        <p:spPr>
-          <a:xfrm>
-            <a:off x="5577840" y="4169664"/>
+          <p:cNvPr id="44" name="Text 42"/>
+          <p:cNvSpPr/>
+          <p:nvPr/>
+        </p:nvSpPr>
+        <p:spPr>
+          <a:xfrm>
+            <a:off x="4331643" y="4169664"/>
             <a:ext cx="685800" cy="475488"/>
           </a:xfrm>
           <a:prstGeom prst="rect">
@@ -10637,13 +11183,13 @@
       </p:sp>
       <p:sp>
         <p:nvSpPr>
-          <p:cNvPr id="39" name="Shape 37"/>
-          <p:cNvSpPr/>
-          <p:nvPr/>
-        </p:nvSpPr>
-        <p:spPr>
-          <a:xfrm>
-            <a:off x="7031736" y="4169664"/>
+          <p:cNvPr id="45" name="Shape 43"/>
+          <p:cNvSpPr/>
+          <p:nvPr/>
+        </p:nvSpPr>
+        <p:spPr>
+          <a:xfrm>
+            <a:off x="5370141" y="4169664"/>
             <a:ext cx="685800" cy="475488"/>
           </a:xfrm>
           <a:prstGeom prst="rect">
@@ -10664,13 +11210,13 @@
       </p:sp>
       <p:sp>
         <p:nvSpPr>
-          <p:cNvPr id="40" name="Text 38"/>
-          <p:cNvSpPr/>
-          <p:nvPr/>
-        </p:nvSpPr>
-        <p:spPr>
-          <a:xfrm>
-            <a:off x="7031736" y="4169664"/>
+          <p:cNvPr id="46" name="Text 44"/>
+          <p:cNvSpPr/>
+          <p:nvPr/>
+        </p:nvSpPr>
+        <p:spPr>
+          <a:xfrm>
+            <a:off x="5370141" y="4169664"/>
             <a:ext cx="685800" cy="475488"/>
           </a:xfrm>
           <a:prstGeom prst="rect">
@@ -10696,6 +11242,138 @@
                 <a:cs typeface="Trebuchet MS" pitchFamily="34" charset="-120"/>
               </a:rPr>
               <a:t>air</a:t>
+            </a:r>
+            <a:endParaRPr lang="en-US" sz="900" dirty="0"/>
+          </a:p>
+        </p:txBody>
+      </p:sp>
+      <p:sp>
+        <p:nvSpPr>
+          <p:cNvPr id="47" name="Shape 45"/>
+          <p:cNvSpPr/>
+          <p:nvPr/>
+        </p:nvSpPr>
+        <p:spPr>
+          <a:xfrm>
+            <a:off x="6408638" y="4169664"/>
+            <a:ext cx="685800" cy="475488"/>
+          </a:xfrm>
+          <a:prstGeom prst="rect">
+            <a:avLst>
+              <a:gd name="adj" fmla="val 7692"/>
+            </a:avLst>
+          </a:prstGeom>
+          <a:solidFill>
+            <a:srgbClr val="FFFFFF"/>
+          </a:solidFill>
+          <a:ln w="12700">
+            <a:solidFill>
+              <a:srgbClr val="DB2777"/>
+            </a:solidFill>
+            <a:prstDash val="solid"/>
+          </a:ln>
+        </p:spPr>
+      </p:sp>
+      <p:sp>
+        <p:nvSpPr>
+          <p:cNvPr id="48" name="Text 46"/>
+          <p:cNvSpPr/>
+          <p:nvPr/>
+        </p:nvSpPr>
+        <p:spPr>
+          <a:xfrm>
+            <a:off x="6408638" y="4169664"/>
+            <a:ext cx="685800" cy="475488"/>
+          </a:xfrm>
+          <a:prstGeom prst="rect">
+            <a:avLst/>
+          </a:prstGeom>
+          <a:noFill/>
+          <a:ln/>
+        </p:spPr>
+        <p:txBody>
+          <a:bodyPr wrap="square" lIns="0" tIns="0" rIns="0" bIns="0" rtlCol="0" anchor="ctr"/>
+          <a:lstStyle/>
+          <a:p>
+            <a:pPr algn="ctr" indent="0" marL="0">
+              <a:buNone/>
+            </a:pPr>
+            <a:r>
+              <a:rPr lang="en-US" sz="900" b="1" dirty="0">
+                <a:solidFill>
+                  <a:srgbClr val="9D174D"/>
+                </a:solidFill>
+                <a:latin typeface="Trebuchet MS" pitchFamily="34" charset="0"/>
+                <a:ea typeface="Trebuchet MS" pitchFamily="34" charset="-122"/>
+                <a:cs typeface="Trebuchet MS" pitchFamily="34" charset="-120"/>
+              </a:rPr>
+              <a:t>l</a:t>
+            </a:r>
+            <a:endParaRPr lang="en-US" sz="900" dirty="0"/>
+          </a:p>
+        </p:txBody>
+      </p:sp>
+      <p:sp>
+        <p:nvSpPr>
+          <p:cNvPr id="49" name="Shape 47"/>
+          <p:cNvSpPr/>
+          <p:nvPr/>
+        </p:nvSpPr>
+        <p:spPr>
+          <a:xfrm>
+            <a:off x="7447135" y="4169664"/>
+            <a:ext cx="685800" cy="475488"/>
+          </a:xfrm>
+          <a:prstGeom prst="rect">
+            <a:avLst>
+              <a:gd name="adj" fmla="val 7692"/>
+            </a:avLst>
+          </a:prstGeom>
+          <a:solidFill>
+            <a:srgbClr val="FFFFFF"/>
+          </a:solidFill>
+          <a:ln w="12700">
+            <a:solidFill>
+              <a:srgbClr val="DB2777"/>
+            </a:solidFill>
+            <a:prstDash val="solid"/>
+          </a:ln>
+        </p:spPr>
+      </p:sp>
+      <p:sp>
+        <p:nvSpPr>
+          <p:cNvPr id="50" name="Text 48"/>
+          <p:cNvSpPr/>
+          <p:nvPr/>
+        </p:nvSpPr>
+        <p:spPr>
+          <a:xfrm>
+            <a:off x="7447135" y="4169664"/>
+            <a:ext cx="685800" cy="475488"/>
+          </a:xfrm>
+          <a:prstGeom prst="rect">
+            <a:avLst/>
+          </a:prstGeom>
+          <a:noFill/>
+          <a:ln/>
+        </p:spPr>
+        <p:txBody>
+          <a:bodyPr wrap="square" lIns="0" tIns="0" rIns="0" bIns="0" rtlCol="0" anchor="ctr"/>
+          <a:lstStyle/>
+          <a:p>
+            <a:pPr algn="ctr" indent="0" marL="0">
+              <a:buNone/>
+            </a:pPr>
+            <a:r>
+              <a:rPr lang="en-US" sz="900" b="1" dirty="0">
+                <a:solidFill>
+                  <a:srgbClr val="9D174D"/>
+                </a:solidFill>
+                <a:latin typeface="Trebuchet MS" pitchFamily="34" charset="0"/>
+                <a:ea typeface="Trebuchet MS" pitchFamily="34" charset="-122"/>
+                <a:cs typeface="Trebuchet MS" pitchFamily="34" charset="-120"/>
+              </a:rPr>
+              <a:t>y</a:t>
             </a:r>
             <a:endParaRPr lang="en-US" sz="900" dirty="0"/>
           </a:p>
@@ -11126,7 +11804,7 @@
                 <a:ea typeface="Trebuchet MS" pitchFamily="34" charset="-122"/>
                 <a:cs typeface="Trebuchet MS" pitchFamily="34" charset="-120"/>
               </a:rPr>
-              <a:t>fairground</a:t>
+              <a:t>fairness</a:t>
             </a:r>
             <a:endParaRPr lang="en-US" sz="2800" dirty="0"/>
           </a:p>
@@ -11953,7 +12631,7 @@
                 <a:ea typeface="Trebuchet MS" pitchFamily="34" charset="-122"/>
                 <a:cs typeface="Trebuchet MS" pitchFamily="34" charset="-120"/>
               </a:rPr>
-              <a:t>fairground</a:t>
+              <a:t>fairness</a:t>
             </a:r>
             <a:endParaRPr lang="en-US" sz="2800" dirty="0"/>
           </a:p>
@@ -12204,7 +12882,7 @@
                 <a:ea typeface="Trebuchet MS" pitchFamily="34" charset="-122"/>
                 <a:cs typeface="Trebuchet MS" pitchFamily="34" charset="-120"/>
               </a:rPr>
-              <a:t>ground</a:t>
+              <a:t>ness</a:t>
             </a:r>
             <a:endParaRPr lang="en-US" sz="1300" dirty="0"/>
           </a:p>
@@ -12243,7 +12921,7 @@
                 <a:ea typeface="Calibri" pitchFamily="34" charset="-122"/>
                 <a:cs typeface="Calibri" pitchFamily="34" charset="-120"/>
               </a:rPr>
-              <a:t>land or area</a:t>
+              <a:t>the quality of being</a:t>
             </a:r>
             <a:endParaRPr lang="en-US" sz="850" dirty="0"/>
           </a:p>
@@ -12938,7 +13616,7 @@
                 <a:ea typeface="Trebuchet MS" pitchFamily="34" charset="-122"/>
                 <a:cs typeface="Trebuchet MS" pitchFamily="34" charset="-120"/>
               </a:rPr>
-              <a:t>fairground</a:t>
+              <a:t>fairness</a:t>
             </a:r>
             <a:endParaRPr lang="en-US" sz="2800" dirty="0"/>
           </a:p>
@@ -13189,7 +13867,7 @@
                 <a:ea typeface="Trebuchet MS" pitchFamily="34" charset="-122"/>
                 <a:cs typeface="Trebuchet MS" pitchFamily="34" charset="-120"/>
               </a:rPr>
-              <a:t>ground</a:t>
+              <a:t>ness</a:t>
             </a:r>
             <a:endParaRPr lang="en-US" sz="1300" dirty="0"/>
           </a:p>
@@ -13228,7 +13906,7 @@
                 <a:ea typeface="Calibri" pitchFamily="34" charset="-122"/>
                 <a:cs typeface="Calibri" pitchFamily="34" charset="-120"/>
               </a:rPr>
-              <a:t>land or area</a:t>
+              <a:t>the quality of being</a:t>
             </a:r>
             <a:endParaRPr lang="en-US" sz="850" dirty="0"/>
           </a:p>
@@ -13492,7 +14170,7 @@
                 <a:ea typeface="Trebuchet MS" pitchFamily="34" charset="-122"/>
                 <a:cs typeface="Trebuchet MS" pitchFamily="34" charset="-120"/>
               </a:rPr>
-              <a:t>ground</a:t>
+              <a:t>ness</a:t>
             </a:r>
             <a:endParaRPr lang="en-US" sz="1400" dirty="0"/>
           </a:p>
@@ -14320,7 +14998,7 @@
                 <a:ea typeface="Trebuchet MS" pitchFamily="34" charset="-122"/>
                 <a:cs typeface="Trebuchet MS" pitchFamily="34" charset="-120"/>
               </a:rPr>
-              <a:t>fairground</a:t>
+              <a:t>fairness</a:t>
             </a:r>
             <a:endParaRPr lang="en-US" sz="2800" dirty="0"/>
           </a:p>
@@ -14571,7 +15249,7 @@
                 <a:ea typeface="Trebuchet MS" pitchFamily="34" charset="-122"/>
                 <a:cs typeface="Trebuchet MS" pitchFamily="34" charset="-120"/>
               </a:rPr>
-              <a:t>ground</a:t>
+              <a:t>ness</a:t>
             </a:r>
             <a:endParaRPr lang="en-US" sz="1300" dirty="0"/>
           </a:p>
@@ -14610,7 +15288,7 @@
                 <a:ea typeface="Calibri" pitchFamily="34" charset="-122"/>
                 <a:cs typeface="Calibri" pitchFamily="34" charset="-120"/>
               </a:rPr>
-              <a:t>land or area</a:t>
+              <a:t>the quality of being</a:t>
             </a:r>
             <a:endParaRPr lang="en-US" sz="850" dirty="0"/>
           </a:p>
@@ -14874,7 +15552,7 @@
                 <a:ea typeface="Trebuchet MS" pitchFamily="34" charset="-122"/>
                 <a:cs typeface="Trebuchet MS" pitchFamily="34" charset="-120"/>
               </a:rPr>
-              <a:t>ground</a:t>
+              <a:t>ness</a:t>
             </a:r>
             <a:endParaRPr lang="en-US" sz="1400" dirty="0"/>
           </a:p>
@@ -15165,7 +15843,7 @@
                 <a:ea typeface="Trebuchet MS" pitchFamily="34" charset="-122"/>
                 <a:cs typeface="Trebuchet MS" pitchFamily="34" charset="-120"/>
               </a:rPr>
-              <a:t>gr</a:t>
+              <a:t>n</a:t>
             </a:r>
             <a:endParaRPr lang="en-US" sz="900" dirty="0"/>
           </a:p>
@@ -15231,7 +15909,7 @@
                 <a:ea typeface="Trebuchet MS" pitchFamily="34" charset="-122"/>
                 <a:cs typeface="Trebuchet MS" pitchFamily="34" charset="-120"/>
               </a:rPr>
-              <a:t>ou</a:t>
+              <a:t>e</a:t>
             </a:r>
             <a:endParaRPr lang="en-US" sz="900" dirty="0"/>
           </a:p>
@@ -15297,7 +15975,7 @@
                 <a:ea typeface="Trebuchet MS" pitchFamily="34" charset="-122"/>
                 <a:cs typeface="Trebuchet MS" pitchFamily="34" charset="-120"/>
               </a:rPr>
-              <a:t>nd</a:t>
+              <a:t>ss</a:t>
             </a:r>
             <a:endParaRPr lang="en-US" sz="900" dirty="0"/>
           </a:p>
@@ -16623,7 +17301,7 @@
                 <a:ea typeface="Calibri" pitchFamily="34" charset="-122"/>
                 <a:cs typeface="Calibri" pitchFamily="34" charset="-120"/>
               </a:rPr>
-              <a:t>The </a:t>
+              <a:t>At the </a:t>
             </a:r>
             <a:pPr algn="l" indent="0" marL="0">
               <a:buNone/>
@@ -16640,7 +17318,7 @@
                 <a:ea typeface="Calibri" pitchFamily="34" charset="-122"/>
                 <a:cs typeface="Calibri" pitchFamily="34" charset="-120"/>
               </a:rPr>
-              <a:t>fairness</a:t>
+              <a:t>fairground</a:t>
             </a:r>
             <a:pPr algn="l" indent="0" marL="0">
               <a:buNone/>
@@ -16654,7 +17332,7 @@
                 <a:ea typeface="Calibri" pitchFamily="34" charset="-122"/>
                 <a:cs typeface="Calibri" pitchFamily="34" charset="-120"/>
               </a:rPr>
-              <a:t> of the competition was questioned when the judges </a:t>
+              <a:t>, everyone agreed that the </a:t>
             </a:r>
             <a:pPr algn="l" indent="0" marL="0">
               <a:buNone/>
@@ -16671,7 +17349,7 @@
                 <a:ea typeface="Calibri" pitchFamily="34" charset="-122"/>
                 <a:cs typeface="Calibri" pitchFamily="34" charset="-120"/>
               </a:rPr>
-              <a:t>unfairly</a:t>
+              <a:t>fairer</a:t>
             </a:r>
             <a:pPr algn="l" indent="0" marL="0">
               <a:buNone/>
@@ -16685,7 +17363,7 @@
                 <a:ea typeface="Calibri" pitchFamily="34" charset="-122"/>
                 <a:cs typeface="Calibri" pitchFamily="34" charset="-120"/>
               </a:rPr>
-              <a:t> scored the </a:t>
+              <a:t> system of choosing teams made the competition more enjoyable; the </a:t>
             </a:r>
             <a:pPr algn="l" indent="0" marL="0">
               <a:buNone/>
@@ -16702,7 +17380,7 @@
                 <a:ea typeface="Calibri" pitchFamily="34" charset="-122"/>
                 <a:cs typeface="Calibri" pitchFamily="34" charset="-120"/>
               </a:rPr>
-              <a:t>fairly</a:t>
+              <a:t>fairest</a:t>
             </a:r>
             <a:pPr algn="l" indent="0" marL="0">
               <a:buNone/>
@@ -16716,7 +17394,7 @@
                 <a:ea typeface="Calibri" pitchFamily="34" charset="-122"/>
                 <a:cs typeface="Calibri" pitchFamily="34" charset="-120"/>
               </a:rPr>
-              <a:t> talented younger students.</a:t>
+              <a:t> outcome pleased the whole group.</a:t>
             </a:r>
             <a:endParaRPr lang="en-US" sz="1800" dirty="0"/>
           </a:p>
@@ -16871,7 +17549,7 @@
                 <a:ea typeface="Trebuchet MS" pitchFamily="34" charset="-122"/>
                 <a:cs typeface="Trebuchet MS" pitchFamily="34" charset="-120"/>
               </a:rPr>
-              <a:t>fairness</a:t>
+              <a:t>fairground</a:t>
             </a:r>
             <a:endParaRPr lang="en-US" sz="1400" dirty="0"/>
           </a:p>
@@ -16999,7 +17677,7 @@
                 <a:ea typeface="Trebuchet MS" pitchFamily="34" charset="-122"/>
                 <a:cs typeface="Trebuchet MS" pitchFamily="34" charset="-120"/>
               </a:rPr>
-              <a:t>unfairly</a:t>
+              <a:t>fairer</a:t>
             </a:r>
             <a:endParaRPr lang="en-US" sz="1400" dirty="0"/>
           </a:p>
@@ -17127,7 +17805,7 @@
                 <a:ea typeface="Trebuchet MS" pitchFamily="34" charset="-122"/>
                 <a:cs typeface="Trebuchet MS" pitchFamily="34" charset="-120"/>
               </a:rPr>
-              <a:t>fairly</a:t>
+              <a:t>fairest</a:t>
             </a:r>
             <a:endParaRPr lang="en-US" sz="1400" dirty="0"/>
           </a:p>
@@ -17597,7 +18275,7 @@
                 <a:ea typeface="Trebuchet MS" pitchFamily="34" charset="-122"/>
                 <a:cs typeface="Trebuchet MS" pitchFamily="34" charset="-120"/>
               </a:rPr>
-              <a:t>fairness</a:t>
+              <a:t>fairground</a:t>
             </a:r>
             <a:endParaRPr lang="en-US" sz="2800" dirty="0"/>
           </a:p>
@@ -18424,7 +19102,7 @@
                 <a:ea typeface="Trebuchet MS" pitchFamily="34" charset="-122"/>
                 <a:cs typeface="Trebuchet MS" pitchFamily="34" charset="-120"/>
               </a:rPr>
-              <a:t>fairness</a:t>
+              <a:t>fairground</a:t>
             </a:r>
             <a:endParaRPr lang="en-US" sz="2800" dirty="0"/>
           </a:p>
@@ -18602,7 +19280,7 @@
                 <a:ea typeface="Calibri" pitchFamily="34" charset="-122"/>
                 <a:cs typeface="Calibri" pitchFamily="34" charset="-120"/>
               </a:rPr>
-              <a:t>just or equal</a:t>
+              <a:t>just or equal; also a travelling event</a:t>
             </a:r>
             <a:endParaRPr lang="en-US" sz="850" dirty="0"/>
           </a:p>
@@ -18675,7 +19353,7 @@
                 <a:ea typeface="Trebuchet MS" pitchFamily="34" charset="-122"/>
                 <a:cs typeface="Trebuchet MS" pitchFamily="34" charset="-120"/>
               </a:rPr>
-              <a:t>ness</a:t>
+              <a:t>ground</a:t>
             </a:r>
             <a:endParaRPr lang="en-US" sz="1300" dirty="0"/>
           </a:p>
@@ -18714,7 +19392,7 @@
                 <a:ea typeface="Calibri" pitchFamily="34" charset="-122"/>
                 <a:cs typeface="Calibri" pitchFamily="34" charset="-120"/>
               </a:rPr>
-              <a:t>quality or state of</a:t>
+              <a:t>land or area</a:t>
             </a:r>
             <a:endParaRPr lang="en-US" sz="850" dirty="0"/>
           </a:p>
@@ -19409,7 +20087,7 @@
                 <a:ea typeface="Trebuchet MS" pitchFamily="34" charset="-122"/>
                 <a:cs typeface="Trebuchet MS" pitchFamily="34" charset="-120"/>
               </a:rPr>
-              <a:t>fairness</a:t>
+              <a:t>fairground</a:t>
             </a:r>
             <a:endParaRPr lang="en-US" sz="2800" dirty="0"/>
           </a:p>
@@ -19587,7 +20265,7 @@
                 <a:ea typeface="Calibri" pitchFamily="34" charset="-122"/>
                 <a:cs typeface="Calibri" pitchFamily="34" charset="-120"/>
               </a:rPr>
-              <a:t>just or equal</a:t>
+              <a:t>just or equal; also a travelling event</a:t>
             </a:r>
             <a:endParaRPr lang="en-US" sz="850" dirty="0"/>
           </a:p>
@@ -19660,7 +20338,7 @@
                 <a:ea typeface="Trebuchet MS" pitchFamily="34" charset="-122"/>
                 <a:cs typeface="Trebuchet MS" pitchFamily="34" charset="-120"/>
               </a:rPr>
-              <a:t>ness</a:t>
+              <a:t>ground</a:t>
             </a:r>
             <a:endParaRPr lang="en-US" sz="1300" dirty="0"/>
           </a:p>
@@ -19699,7 +20377,7 @@
                 <a:ea typeface="Calibri" pitchFamily="34" charset="-122"/>
                 <a:cs typeface="Calibri" pitchFamily="34" charset="-120"/>
               </a:rPr>
-              <a:t>quality or state of</a:t>
+              <a:t>land or area</a:t>
             </a:r>
             <a:endParaRPr lang="en-US" sz="850" dirty="0"/>
           </a:p>
@@ -19963,7 +20641,7 @@
                 <a:ea typeface="Trebuchet MS" pitchFamily="34" charset="-122"/>
                 <a:cs typeface="Trebuchet MS" pitchFamily="34" charset="-120"/>
               </a:rPr>
-              <a:t>ness</a:t>
+              <a:t>ground</a:t>
             </a:r>
             <a:endParaRPr lang="en-US" sz="1400" dirty="0"/>
           </a:p>
@@ -20526,7 +21204,7 @@
                 <a:ea typeface="Trebuchet MS" pitchFamily="34" charset="-122"/>
                 <a:cs typeface="Trebuchet MS" pitchFamily="34" charset="-120"/>
               </a:rPr>
-              <a:t>fairness</a:t>
+              <a:t>fairground</a:t>
             </a:r>
             <a:endParaRPr lang="en-US" sz="2800" dirty="0"/>
           </a:p>
@@ -20704,7 +21382,7 @@
                 <a:ea typeface="Calibri" pitchFamily="34" charset="-122"/>
                 <a:cs typeface="Calibri" pitchFamily="34" charset="-120"/>
               </a:rPr>
-              <a:t>just or equal</a:t>
+              <a:t>just or equal; also a travelling event</a:t>
             </a:r>
             <a:endParaRPr lang="en-US" sz="850" dirty="0"/>
           </a:p>
@@ -20777,7 +21455,7 @@
                 <a:ea typeface="Trebuchet MS" pitchFamily="34" charset="-122"/>
                 <a:cs typeface="Trebuchet MS" pitchFamily="34" charset="-120"/>
               </a:rPr>
-              <a:t>ness</a:t>
+              <a:t>ground</a:t>
             </a:r>
             <a:endParaRPr lang="en-US" sz="1300" dirty="0"/>
           </a:p>
@@ -20816,7 +21494,7 @@
                 <a:ea typeface="Calibri" pitchFamily="34" charset="-122"/>
                 <a:cs typeface="Calibri" pitchFamily="34" charset="-120"/>
               </a:rPr>
-              <a:t>quality or state of</a:t>
+              <a:t>land or area</a:t>
             </a:r>
             <a:endParaRPr lang="en-US" sz="850" dirty="0"/>
           </a:p>
@@ -21080,7 +21758,7 @@
                 <a:ea typeface="Trebuchet MS" pitchFamily="34" charset="-122"/>
                 <a:cs typeface="Trebuchet MS" pitchFamily="34" charset="-120"/>
               </a:rPr>
-              <a:t>ness</a:t>
+              <a:t>ground</a:t>
             </a:r>
             <a:endParaRPr lang="en-US" sz="1400" dirty="0"/>
           </a:p>
@@ -21187,7 +21865,7 @@
         </p:nvSpPr>
         <p:spPr>
           <a:xfrm>
-            <a:off x="2427732" y="4169664"/>
+            <a:off x="2124837" y="4169664"/>
             <a:ext cx="685800" cy="475488"/>
           </a:xfrm>
           <a:prstGeom prst="rect">
@@ -21214,7 +21892,7 @@
         </p:nvSpPr>
         <p:spPr>
           <a:xfrm>
-            <a:off x="2427732" y="4169664"/>
+            <a:off x="2124837" y="4169664"/>
             <a:ext cx="685800" cy="475488"/>
           </a:xfrm>
           <a:prstGeom prst="rect">
@@ -21253,7 +21931,7 @@
         </p:nvSpPr>
         <p:spPr>
           <a:xfrm>
-            <a:off x="3639312" y="4169664"/>
+            <a:off x="3033522" y="4169664"/>
             <a:ext cx="685800" cy="475488"/>
           </a:xfrm>
           <a:prstGeom prst="rect">
@@ -21280,7 +21958,7 @@
         </p:nvSpPr>
         <p:spPr>
           <a:xfrm>
-            <a:off x="3639312" y="4169664"/>
+            <a:off x="3033522" y="4169664"/>
             <a:ext cx="685800" cy="475488"/>
           </a:xfrm>
           <a:prstGeom prst="rect">
@@ -21319,7 +21997,7 @@
         </p:nvSpPr>
         <p:spPr>
           <a:xfrm>
-            <a:off x="4850892" y="4169664"/>
+            <a:off x="3942207" y="4169664"/>
             <a:ext cx="685800" cy="475488"/>
           </a:xfrm>
           <a:prstGeom prst="rect">
@@ -21346,7 +22024,7 @@
         </p:nvSpPr>
         <p:spPr>
           <a:xfrm>
-            <a:off x="4850892" y="4169664"/>
+            <a:off x="3942207" y="4169664"/>
             <a:ext cx="685800" cy="475488"/>
           </a:xfrm>
           <a:prstGeom prst="rect">
@@ -21371,7 +22049,7 @@
                 <a:ea typeface="Trebuchet MS" pitchFamily="34" charset="-122"/>
                 <a:cs typeface="Trebuchet MS" pitchFamily="34" charset="-120"/>
               </a:rPr>
-              <a:t>n</a:t>
+              <a:t>g</a:t>
             </a:r>
             <a:endParaRPr lang="en-US" sz="900" dirty="0"/>
           </a:p>
@@ -21385,7 +22063,7 @@
         </p:nvSpPr>
         <p:spPr>
           <a:xfrm>
-            <a:off x="6062472" y="4169664"/>
+            <a:off x="4850892" y="4169664"/>
             <a:ext cx="685800" cy="475488"/>
           </a:xfrm>
           <a:prstGeom prst="rect">
@@ -21412,7 +22090,7 @@
         </p:nvSpPr>
         <p:spPr>
           <a:xfrm>
-            <a:off x="6062472" y="4169664"/>
+            <a:off x="4850892" y="4169664"/>
             <a:ext cx="685800" cy="475488"/>
           </a:xfrm>
           <a:prstGeom prst="rect">
@@ -21437,7 +22115,7 @@
                 <a:ea typeface="Trebuchet MS" pitchFamily="34" charset="-122"/>
                 <a:cs typeface="Trebuchet MS" pitchFamily="34" charset="-120"/>
               </a:rPr>
-              <a:t>e</a:t>
+              <a:t>r</a:t>
             </a:r>
             <a:endParaRPr lang="en-US" sz="900" dirty="0"/>
           </a:p>
@@ -21451,7 +22129,7 @@
         </p:nvSpPr>
         <p:spPr>
           <a:xfrm>
-            <a:off x="7274052" y="4169664"/>
+            <a:off x="5759577" y="4169664"/>
             <a:ext cx="685800" cy="475488"/>
           </a:xfrm>
           <a:prstGeom prst="rect">
@@ -21478,7 +22156,7 @@
         </p:nvSpPr>
         <p:spPr>
           <a:xfrm>
-            <a:off x="7274052" y="4169664"/>
+            <a:off x="5759577" y="4169664"/>
             <a:ext cx="685800" cy="475488"/>
           </a:xfrm>
           <a:prstGeom prst="rect">
@@ -21503,7 +22181,139 @@
                 <a:ea typeface="Trebuchet MS" pitchFamily="34" charset="-122"/>
                 <a:cs typeface="Trebuchet MS" pitchFamily="34" charset="-120"/>
               </a:rPr>
-              <a:t>ss</a:t>
+              <a:t>ou</a:t>
+            </a:r>
+            <a:endParaRPr lang="en-US" sz="900" dirty="0"/>
+          </a:p>
+        </p:txBody>
+      </p:sp>
+      <p:sp>
+        <p:nvSpPr>
+          <p:cNvPr id="43" name="Shape 41"/>
+          <p:cNvSpPr/>
+          <p:nvPr/>
+        </p:nvSpPr>
+        <p:spPr>
+          <a:xfrm>
+            <a:off x="6668262" y="4169664"/>
+            <a:ext cx="685800" cy="475488"/>
+          </a:xfrm>
+          <a:prstGeom prst="rect">
+            <a:avLst>
+              <a:gd name="adj" fmla="val 7692"/>
+            </a:avLst>
+          </a:prstGeom>
+          <a:solidFill>
+            <a:srgbClr val="FFFFFF"/>
+          </a:solidFill>
+          <a:ln w="12700">
+            <a:solidFill>
+              <a:srgbClr val="DB2777"/>
+            </a:solidFill>
+            <a:prstDash val="solid"/>
+          </a:ln>
+        </p:spPr>
+      </p:sp>
+      <p:sp>
+        <p:nvSpPr>
+          <p:cNvPr id="44" name="Text 42"/>
+          <p:cNvSpPr/>
+          <p:nvPr/>
+        </p:nvSpPr>
+        <p:spPr>
+          <a:xfrm>
+            <a:off x="6668262" y="4169664"/>
+            <a:ext cx="685800" cy="475488"/>
+          </a:xfrm>
+          <a:prstGeom prst="rect">
+            <a:avLst/>
+          </a:prstGeom>
+          <a:noFill/>
+          <a:ln/>
+        </p:spPr>
+        <p:txBody>
+          <a:bodyPr wrap="square" lIns="0" tIns="0" rIns="0" bIns="0" rtlCol="0" anchor="ctr"/>
+          <a:lstStyle/>
+          <a:p>
+            <a:pPr algn="ctr" indent="0" marL="0">
+              <a:buNone/>
+            </a:pPr>
+            <a:r>
+              <a:rPr lang="en-US" sz="900" b="1" dirty="0">
+                <a:solidFill>
+                  <a:srgbClr val="9D174D"/>
+                </a:solidFill>
+                <a:latin typeface="Trebuchet MS" pitchFamily="34" charset="0"/>
+                <a:ea typeface="Trebuchet MS" pitchFamily="34" charset="-122"/>
+                <a:cs typeface="Trebuchet MS" pitchFamily="34" charset="-120"/>
+              </a:rPr>
+              <a:t>n</a:t>
+            </a:r>
+            <a:endParaRPr lang="en-US" sz="900" dirty="0"/>
+          </a:p>
+        </p:txBody>
+      </p:sp>
+      <p:sp>
+        <p:nvSpPr>
+          <p:cNvPr id="45" name="Shape 43"/>
+          <p:cNvSpPr/>
+          <p:nvPr/>
+        </p:nvSpPr>
+        <p:spPr>
+          <a:xfrm>
+            <a:off x="7576947" y="4169664"/>
+            <a:ext cx="685800" cy="475488"/>
+          </a:xfrm>
+          <a:prstGeom prst="rect">
+            <a:avLst>
+              <a:gd name="adj" fmla="val 7692"/>
+            </a:avLst>
+          </a:prstGeom>
+          <a:solidFill>
+            <a:srgbClr val="FFFFFF"/>
+          </a:solidFill>
+          <a:ln w="12700">
+            <a:solidFill>
+              <a:srgbClr val="DB2777"/>
+            </a:solidFill>
+            <a:prstDash val="solid"/>
+          </a:ln>
+        </p:spPr>
+      </p:sp>
+      <p:sp>
+        <p:nvSpPr>
+          <p:cNvPr id="46" name="Text 44"/>
+          <p:cNvSpPr/>
+          <p:nvPr/>
+        </p:nvSpPr>
+        <p:spPr>
+          <a:xfrm>
+            <a:off x="7576947" y="4169664"/>
+            <a:ext cx="685800" cy="475488"/>
+          </a:xfrm>
+          <a:prstGeom prst="rect">
+            <a:avLst/>
+          </a:prstGeom>
+          <a:noFill/>
+          <a:ln/>
+        </p:spPr>
+        <p:txBody>
+          <a:bodyPr wrap="square" lIns="0" tIns="0" rIns="0" bIns="0" rtlCol="0" anchor="ctr"/>
+          <a:lstStyle/>
+          <a:p>
+            <a:pPr algn="ctr" indent="0" marL="0">
+              <a:buNone/>
+            </a:pPr>
+            <a:r>
+              <a:rPr lang="en-US" sz="900" b="1" dirty="0">
+                <a:solidFill>
+                  <a:srgbClr val="9D174D"/>
+                </a:solidFill>
+                <a:latin typeface="Trebuchet MS" pitchFamily="34" charset="0"/>
+                <a:ea typeface="Trebuchet MS" pitchFamily="34" charset="-122"/>
+                <a:cs typeface="Trebuchet MS" pitchFamily="34" charset="-120"/>
+              </a:rPr>
+              <a:t>d</a:t>
             </a:r>
             <a:endParaRPr lang="en-US" sz="900" dirty="0"/>
           </a:p>
@@ -21934,7 +22744,7 @@
                 <a:ea typeface="Trebuchet MS" pitchFamily="34" charset="-122"/>
                 <a:cs typeface="Trebuchet MS" pitchFamily="34" charset="-120"/>
               </a:rPr>
-              <a:t>unfairly</a:t>
+              <a:t>fairer</a:t>
             </a:r>
             <a:endParaRPr lang="en-US" sz="2800" dirty="0"/>
           </a:p>
@@ -22761,7 +23571,7 @@
                 <a:ea typeface="Trebuchet MS" pitchFamily="34" charset="-122"/>
                 <a:cs typeface="Trebuchet MS" pitchFamily="34" charset="-120"/>
               </a:rPr>
-              <a:t>unfairly</a:t>
+              <a:t>fairer</a:t>
             </a:r>
             <a:endParaRPr lang="en-US" sz="2800" dirty="0"/>
           </a:p>
@@ -22841,7 +23651,7 @@
         </p:nvSpPr>
         <p:spPr>
           <a:xfrm>
-            <a:off x="2221992" y="2258568"/>
+            <a:off x="2938272" y="2258568"/>
             <a:ext cx="1828800" cy="292608"/>
           </a:xfrm>
           <a:prstGeom prst="rect">
@@ -22850,11 +23660,11 @@
             </a:avLst>
           </a:prstGeom>
           <a:solidFill>
-            <a:srgbClr val="DDD6FE"/>
+            <a:srgbClr val="CCFBF1"/>
           </a:solidFill>
           <a:ln w="19050">
             <a:solidFill>
-              <a:srgbClr val="7C3AED"/>
+              <a:srgbClr val="0D9488"/>
             </a:solidFill>
             <a:prstDash val="solid"/>
           </a:ln>
@@ -22875,7 +23685,7 @@
         </p:nvSpPr>
         <p:spPr>
           <a:xfrm>
-            <a:off x="2221992" y="2258568"/>
+            <a:off x="2938272" y="2258568"/>
             <a:ext cx="1828800" cy="292608"/>
           </a:xfrm>
           <a:prstGeom prst="rect">
@@ -22894,13 +23704,13 @@
             <a:r>
               <a:rPr lang="en-US" sz="1300" b="1" dirty="0">
                 <a:solidFill>
-                  <a:srgbClr val="4C1D95"/>
+                  <a:srgbClr val="0F766E"/>
                 </a:solidFill>
                 <a:latin typeface="Trebuchet MS" pitchFamily="34" charset="0"/>
                 <a:ea typeface="Trebuchet MS" pitchFamily="34" charset="-122"/>
                 <a:cs typeface="Trebuchet MS" pitchFamily="34" charset="-120"/>
               </a:rPr>
-              <a:t>un</a:t>
+              <a:t>fair</a:t>
             </a:r>
             <a:endParaRPr lang="en-US" sz="1300" dirty="0"/>
           </a:p>
@@ -22914,7 +23724,7 @@
         </p:nvSpPr>
         <p:spPr>
           <a:xfrm>
-            <a:off x="2221992" y="2569464"/>
+            <a:off x="2938272" y="2569464"/>
             <a:ext cx="1828800" cy="201168"/>
           </a:xfrm>
           <a:prstGeom prst="rect">
@@ -22939,7 +23749,7 @@
                 <a:ea typeface="Calibri" pitchFamily="34" charset="-122"/>
                 <a:cs typeface="Calibri" pitchFamily="34" charset="-120"/>
               </a:rPr>
-              <a:t>not</a:t>
+              <a:t>just or equal</a:t>
             </a:r>
             <a:endParaRPr lang="en-US" sz="850" dirty="0"/>
           </a:p>
@@ -22953,7 +23763,7 @@
         </p:nvSpPr>
         <p:spPr>
           <a:xfrm>
-            <a:off x="4370832" y="2258568"/>
+            <a:off x="5803392" y="2258568"/>
             <a:ext cx="1828800" cy="292608"/>
           </a:xfrm>
           <a:prstGeom prst="rect">
@@ -22962,11 +23772,11 @@
             </a:avLst>
           </a:prstGeom>
           <a:solidFill>
-            <a:srgbClr val="CCFBF1"/>
+            <a:srgbClr val="FCE7F3"/>
           </a:solidFill>
           <a:ln w="19050">
             <a:solidFill>
-              <a:srgbClr val="0D9488"/>
+              <a:srgbClr val="DB2777"/>
             </a:solidFill>
             <a:prstDash val="solid"/>
           </a:ln>
@@ -22987,7 +23797,7 @@
         </p:nvSpPr>
         <p:spPr>
           <a:xfrm>
-            <a:off x="4370832" y="2258568"/>
+            <a:off x="5803392" y="2258568"/>
             <a:ext cx="1828800" cy="292608"/>
           </a:xfrm>
           <a:prstGeom prst="rect">
@@ -23006,13 +23816,13 @@
             <a:r>
               <a:rPr lang="en-US" sz="1300" b="1" dirty="0">
                 <a:solidFill>
-                  <a:srgbClr val="0F766E"/>
+                  <a:srgbClr val="9D174D"/>
                 </a:solidFill>
                 <a:latin typeface="Trebuchet MS" pitchFamily="34" charset="0"/>
                 <a:ea typeface="Trebuchet MS" pitchFamily="34" charset="-122"/>
                 <a:cs typeface="Trebuchet MS" pitchFamily="34" charset="-120"/>
               </a:rPr>
-              <a:t>fair</a:t>
+              <a:t>er</a:t>
             </a:r>
             <a:endParaRPr lang="en-US" sz="1300" dirty="0"/>
           </a:p>
@@ -23026,7 +23836,7 @@
         </p:nvSpPr>
         <p:spPr>
           <a:xfrm>
-            <a:off x="4370832" y="2569464"/>
+            <a:off x="5803392" y="2569464"/>
             <a:ext cx="1828800" cy="201168"/>
           </a:xfrm>
           <a:prstGeom prst="rect">
@@ -23051,7 +23861,7 @@
                 <a:ea typeface="Calibri" pitchFamily="34" charset="-122"/>
                 <a:cs typeface="Calibri" pitchFamily="34" charset="-120"/>
               </a:rPr>
-              <a:t>just or equal</a:t>
+              <a:t>more</a:t>
             </a:r>
             <a:endParaRPr lang="en-US" sz="850" dirty="0"/>
           </a:p>
@@ -23065,30 +23875,23 @@
         </p:nvSpPr>
         <p:spPr>
           <a:xfrm>
-            <a:off x="6519672" y="2258568"/>
-            <a:ext cx="1828800" cy="292608"/>
+            <a:off x="365760" y="3273552"/>
+            <a:ext cx="1371600" cy="658368"/>
           </a:xfrm>
           <a:prstGeom prst="rect">
             <a:avLst>
-              <a:gd name="adj" fmla="val 25000"/>
+              <a:gd name="adj" fmla="val 8333"/>
             </a:avLst>
           </a:prstGeom>
           <a:solidFill>
-            <a:srgbClr val="FCE7F3"/>
-          </a:solidFill>
-          <a:ln w="19050">
-            <a:solidFill>
-              <a:srgbClr val="DB2777"/>
-            </a:solidFill>
-            <a:prstDash val="solid"/>
-          </a:ln>
-          <a:effectLst>
-            <a:outerShdw sx="100000" sy="100000" kx="0" ky="0" algn="bl" rotWithShape="0" blurRad="101600" dist="38100" dir="8100000">
-              <a:srgbClr val="000000">
-                <a:alpha val="12000"/>
-              </a:srgbClr>
-            </a:outerShdw>
-          </a:effectLst>
+            <a:srgbClr val="E2E8F0"/>
+          </a:solidFill>
+          <a:ln w="12700">
+            <a:solidFill>
+              <a:srgbClr val="E2E8F0"/>
+            </a:solidFill>
+            <a:prstDash val="solid"/>
+          </a:ln>
         </p:spPr>
       </p:sp>
       <p:sp>
@@ -23099,8 +23902,8 @@
         </p:nvSpPr>
         <p:spPr>
           <a:xfrm>
-            <a:off x="6519672" y="2258568"/>
-            <a:ext cx="1828800" cy="292608"/>
+            <a:off x="365760" y="3273552"/>
+            <a:ext cx="1371600" cy="658368"/>
           </a:xfrm>
           <a:prstGeom prst="rect">
             <a:avLst/>
@@ -23116,73 +23919,100 @@
               <a:buNone/>
             </a:pPr>
             <a:r>
-              <a:rPr lang="en-US" sz="1300" b="1" dirty="0">
-                <a:solidFill>
-                  <a:srgbClr val="9D174D"/>
+              <a:rPr lang="en-US" sz="1100" b="1" dirty="0">
+                <a:solidFill>
+                  <a:srgbClr val="475569"/>
                 </a:solidFill>
                 <a:latin typeface="Trebuchet MS" pitchFamily="34" charset="0"/>
                 <a:ea typeface="Trebuchet MS" pitchFamily="34" charset="-122"/>
                 <a:cs typeface="Trebuchet MS" pitchFamily="34" charset="-120"/>
               </a:rPr>
-              <a:t>ly</a:t>
-            </a:r>
-            <a:endParaRPr lang="en-US" sz="1300" dirty="0"/>
-          </a:p>
-        </p:txBody>
-      </p:sp>
-      <p:sp>
-        <p:nvSpPr>
-          <p:cNvPr id="24" name="Text 22"/>
-          <p:cNvSpPr/>
-          <p:nvPr/>
-        </p:nvSpPr>
-        <p:spPr>
-          <a:xfrm>
-            <a:off x="6519672" y="2569464"/>
-            <a:ext cx="1828800" cy="201168"/>
-          </a:xfrm>
-          <a:prstGeom prst="rect">
-            <a:avLst/>
-          </a:prstGeom>
-          <a:noFill/>
-          <a:ln/>
-        </p:spPr>
-        <p:txBody>
-          <a:bodyPr wrap="square" lIns="0" tIns="0" rIns="0" bIns="0" rtlCol="0" anchor="t"/>
-          <a:lstStyle/>
-          <a:p>
-            <a:pPr algn="ctr" indent="0" marL="0">
-              <a:buNone/>
-            </a:pPr>
-            <a:r>
-              <a:rPr lang="en-US" sz="850" dirty="0">
-                <a:solidFill>
-                  <a:srgbClr val="475569"/>
+              <a:t>Syllables</a:t>
+            </a:r>
+            <a:endParaRPr lang="en-US" sz="1100" dirty="0"/>
+          </a:p>
+        </p:txBody>
+      </p:sp>
+      <p:sp>
+        <p:nvSpPr>
+          <p:cNvPr id="24" name="Shape 22"/>
+          <p:cNvSpPr/>
+          <p:nvPr/>
+        </p:nvSpPr>
+        <p:spPr>
+          <a:xfrm>
+            <a:off x="1874520" y="3273552"/>
+            <a:ext cx="6903720" cy="658368"/>
+          </a:xfrm>
+          <a:prstGeom prst="rect">
+            <a:avLst>
+              <a:gd name="adj" fmla="val 8333"/>
+            </a:avLst>
+          </a:prstGeom>
+          <a:solidFill>
+            <a:srgbClr val="F8FAFC"/>
+          </a:solidFill>
+          <a:ln w="12700">
+            <a:solidFill>
+              <a:srgbClr val="E2E8F0"/>
+            </a:solidFill>
+            <a:prstDash val="dash"/>
+          </a:ln>
+        </p:spPr>
+      </p:sp>
+      <p:sp>
+        <p:nvSpPr>
+          <p:cNvPr id="25" name="Text 23"/>
+          <p:cNvSpPr/>
+          <p:nvPr/>
+        </p:nvSpPr>
+        <p:spPr>
+          <a:xfrm>
+            <a:off x="1874520" y="3273552"/>
+            <a:ext cx="6903720" cy="658368"/>
+          </a:xfrm>
+          <a:prstGeom prst="rect">
+            <a:avLst/>
+          </a:prstGeom>
+          <a:noFill/>
+          <a:ln/>
+        </p:spPr>
+        <p:txBody>
+          <a:bodyPr wrap="square" rtlCol="0" anchor="ctr"/>
+          <a:lstStyle/>
+          <a:p>
+            <a:pPr algn="ctr" indent="0" marL="0">
+              <a:buNone/>
+            </a:pPr>
+            <a:r>
+              <a:rPr lang="en-US" sz="1100" i="1" dirty="0">
+                <a:solidFill>
+                  <a:srgbClr val="CBD5E1"/>
                 </a:solidFill>
                 <a:latin typeface="Calibri" pitchFamily="34" charset="0"/>
                 <a:ea typeface="Calibri" pitchFamily="34" charset="-122"/>
                 <a:cs typeface="Calibri" pitchFamily="34" charset="-120"/>
               </a:rPr>
-              <a:t>in a certain way</a:t>
-            </a:r>
-            <a:endParaRPr lang="en-US" sz="850" dirty="0"/>
-          </a:p>
-        </p:txBody>
-      </p:sp>
-      <p:sp>
-        <p:nvSpPr>
-          <p:cNvPr id="25" name="Shape 23"/>
-          <p:cNvSpPr/>
-          <p:nvPr/>
-        </p:nvSpPr>
-        <p:spPr>
-          <a:xfrm>
-            <a:off x="365760" y="3273552"/>
-            <a:ext cx="1371600" cy="658368"/>
+              <a:t>Write here...</a:t>
+            </a:r>
+            <a:endParaRPr lang="en-US" sz="1100" dirty="0"/>
+          </a:p>
+        </p:txBody>
+      </p:sp>
+      <p:sp>
+        <p:nvSpPr>
+          <p:cNvPr id="26" name="Shape 24"/>
+          <p:cNvSpPr/>
+          <p:nvPr/>
+        </p:nvSpPr>
+        <p:spPr>
+          <a:xfrm>
+            <a:off x="365760" y="4096512"/>
+            <a:ext cx="1371600" cy="804672"/>
           </a:xfrm>
           <a:prstGeom prst="rect">
             <a:avLst>
-              <a:gd name="adj" fmla="val 8333"/>
+              <a:gd name="adj" fmla="val 6818"/>
             </a:avLst>
           </a:prstGeom>
           <a:solidFill>
@@ -23198,14 +24028,14 @@
       </p:sp>
       <p:sp>
         <p:nvSpPr>
-          <p:cNvPr id="26" name="Text 24"/>
-          <p:cNvSpPr/>
-          <p:nvPr/>
-        </p:nvSpPr>
-        <p:spPr>
-          <a:xfrm>
-            <a:off x="365760" y="3273552"/>
-            <a:ext cx="1371600" cy="658368"/>
+          <p:cNvPr id="27" name="Text 25"/>
+          <p:cNvSpPr/>
+          <p:nvPr/>
+        </p:nvSpPr>
+        <p:spPr>
+          <a:xfrm>
+            <a:off x="365760" y="4096512"/>
+            <a:ext cx="1371600" cy="804672"/>
           </a:xfrm>
           <a:prstGeom prst="rect">
             <a:avLst/>
@@ -23229,7 +24059,7 @@
                 <a:ea typeface="Trebuchet MS" pitchFamily="34" charset="-122"/>
                 <a:cs typeface="Trebuchet MS" pitchFamily="34" charset="-120"/>
               </a:rPr>
-              <a:t>Syllables</a:t>
+              <a:t>Phonemes</a:t>
             </a:r>
             <a:endParaRPr lang="en-US" sz="1100" dirty="0"/>
           </a:p>
@@ -23237,80 +24067,14 @@
       </p:sp>
       <p:sp>
         <p:nvSpPr>
-          <p:cNvPr id="27" name="Shape 25"/>
-          <p:cNvSpPr/>
-          <p:nvPr/>
-        </p:nvSpPr>
-        <p:spPr>
-          <a:xfrm>
-            <a:off x="1874520" y="3273552"/>
-            <a:ext cx="6903720" cy="658368"/>
-          </a:xfrm>
-          <a:prstGeom prst="rect">
-            <a:avLst>
-              <a:gd name="adj" fmla="val 8333"/>
-            </a:avLst>
-          </a:prstGeom>
-          <a:solidFill>
-            <a:srgbClr val="F8FAFC"/>
-          </a:solidFill>
-          <a:ln w="12700">
-            <a:solidFill>
-              <a:srgbClr val="E2E8F0"/>
-            </a:solidFill>
-            <a:prstDash val="dash"/>
-          </a:ln>
-        </p:spPr>
-      </p:sp>
-      <p:sp>
-        <p:nvSpPr>
-          <p:cNvPr id="28" name="Text 26"/>
-          <p:cNvSpPr/>
-          <p:nvPr/>
-        </p:nvSpPr>
-        <p:spPr>
-          <a:xfrm>
-            <a:off x="1874520" y="3273552"/>
-            <a:ext cx="6903720" cy="658368"/>
-          </a:xfrm>
-          <a:prstGeom prst="rect">
-            <a:avLst/>
-          </a:prstGeom>
-          <a:noFill/>
-          <a:ln/>
-        </p:spPr>
-        <p:txBody>
-          <a:bodyPr wrap="square" rtlCol="0" anchor="ctr"/>
-          <a:lstStyle/>
-          <a:p>
-            <a:pPr algn="ctr" indent="0" marL="0">
-              <a:buNone/>
-            </a:pPr>
-            <a:r>
-              <a:rPr lang="en-US" sz="1100" i="1" dirty="0">
-                <a:solidFill>
-                  <a:srgbClr val="CBD5E1"/>
-                </a:solidFill>
-                <a:latin typeface="Calibri" pitchFamily="34" charset="0"/>
-                <a:ea typeface="Calibri" pitchFamily="34" charset="-122"/>
-                <a:cs typeface="Calibri" pitchFamily="34" charset="-120"/>
-              </a:rPr>
-              <a:t>Write here...</a:t>
-            </a:r>
-            <a:endParaRPr lang="en-US" sz="1100" dirty="0"/>
-          </a:p>
-        </p:txBody>
-      </p:sp>
-      <p:sp>
-        <p:nvSpPr>
-          <p:cNvPr id="29" name="Shape 27"/>
-          <p:cNvSpPr/>
-          <p:nvPr/>
-        </p:nvSpPr>
-        <p:spPr>
-          <a:xfrm>
-            <a:off x="365760" y="4096512"/>
-            <a:ext cx="1371600" cy="804672"/>
+          <p:cNvPr id="28" name="Shape 26"/>
+          <p:cNvSpPr/>
+          <p:nvPr/>
+        </p:nvSpPr>
+        <p:spPr>
+          <a:xfrm>
+            <a:off x="1874520" y="4096512"/>
+            <a:ext cx="6903720" cy="804672"/>
           </a:xfrm>
           <a:prstGeom prst="rect">
             <a:avLst>
@@ -23318,85 +24082,19 @@
             </a:avLst>
           </a:prstGeom>
           <a:solidFill>
-            <a:srgbClr val="E2E8F0"/>
+            <a:srgbClr val="F8FAFC"/>
           </a:solidFill>
           <a:ln w="12700">
             <a:solidFill>
               <a:srgbClr val="E2E8F0"/>
             </a:solidFill>
-            <a:prstDash val="solid"/>
-          </a:ln>
-        </p:spPr>
-      </p:sp>
-      <p:sp>
-        <p:nvSpPr>
-          <p:cNvPr id="30" name="Text 28"/>
-          <p:cNvSpPr/>
-          <p:nvPr/>
-        </p:nvSpPr>
-        <p:spPr>
-          <a:xfrm>
-            <a:off x="365760" y="4096512"/>
-            <a:ext cx="1371600" cy="804672"/>
-          </a:xfrm>
-          <a:prstGeom prst="rect">
-            <a:avLst/>
-          </a:prstGeom>
-          <a:noFill/>
-          <a:ln/>
-        </p:spPr>
-        <p:txBody>
-          <a:bodyPr wrap="square" lIns="0" tIns="0" rIns="0" bIns="0" rtlCol="0" anchor="ctr"/>
-          <a:lstStyle/>
-          <a:p>
-            <a:pPr algn="ctr" indent="0" marL="0">
-              <a:buNone/>
-            </a:pPr>
-            <a:r>
-              <a:rPr lang="en-US" sz="1100" b="1" dirty="0">
-                <a:solidFill>
-                  <a:srgbClr val="475569"/>
-                </a:solidFill>
-                <a:latin typeface="Trebuchet MS" pitchFamily="34" charset="0"/>
-                <a:ea typeface="Trebuchet MS" pitchFamily="34" charset="-122"/>
-                <a:cs typeface="Trebuchet MS" pitchFamily="34" charset="-120"/>
-              </a:rPr>
-              <a:t>Phonemes</a:t>
-            </a:r>
-            <a:endParaRPr lang="en-US" sz="1100" dirty="0"/>
-          </a:p>
-        </p:txBody>
-      </p:sp>
-      <p:sp>
-        <p:nvSpPr>
-          <p:cNvPr id="31" name="Shape 29"/>
-          <p:cNvSpPr/>
-          <p:nvPr/>
-        </p:nvSpPr>
-        <p:spPr>
-          <a:xfrm>
-            <a:off x="1874520" y="4096512"/>
-            <a:ext cx="6903720" cy="804672"/>
-          </a:xfrm>
-          <a:prstGeom prst="rect">
-            <a:avLst>
-              <a:gd name="adj" fmla="val 6818"/>
-            </a:avLst>
-          </a:prstGeom>
-          <a:solidFill>
-            <a:srgbClr val="F8FAFC"/>
-          </a:solidFill>
-          <a:ln w="12700">
-            <a:solidFill>
-              <a:srgbClr val="E2E8F0"/>
-            </a:solidFill>
             <a:prstDash val="dash"/>
           </a:ln>
         </p:spPr>
       </p:sp>
       <p:sp>
         <p:nvSpPr>
-          <p:cNvPr id="32" name="Text 30"/>
+          <p:cNvPr id="29" name="Text 27"/>
           <p:cNvSpPr/>
           <p:nvPr/>
         </p:nvSpPr>
@@ -24577,7 +25275,7 @@
                 <a:ea typeface="Trebuchet MS" pitchFamily="34" charset="-122"/>
                 <a:cs typeface="Trebuchet MS" pitchFamily="34" charset="-120"/>
               </a:rPr>
-              <a:t>unfairly</a:t>
+              <a:t>fairer</a:t>
             </a:r>
             <a:endParaRPr lang="en-US" sz="2800" dirty="0"/>
           </a:p>
@@ -24657,7 +25355,7 @@
         </p:nvSpPr>
         <p:spPr>
           <a:xfrm>
-            <a:off x="2221992" y="2258568"/>
+            <a:off x="2938272" y="2258568"/>
             <a:ext cx="1828800" cy="292608"/>
           </a:xfrm>
           <a:prstGeom prst="rect">
@@ -24666,11 +25364,11 @@
             </a:avLst>
           </a:prstGeom>
           <a:solidFill>
-            <a:srgbClr val="DDD6FE"/>
+            <a:srgbClr val="CCFBF1"/>
           </a:solidFill>
           <a:ln w="19050">
             <a:solidFill>
-              <a:srgbClr val="7C3AED"/>
+              <a:srgbClr val="0D9488"/>
             </a:solidFill>
             <a:prstDash val="solid"/>
           </a:ln>
@@ -24691,7 +25389,7 @@
         </p:nvSpPr>
         <p:spPr>
           <a:xfrm>
-            <a:off x="2221992" y="2258568"/>
+            <a:off x="2938272" y="2258568"/>
             <a:ext cx="1828800" cy="292608"/>
           </a:xfrm>
           <a:prstGeom prst="rect">
@@ -24710,13 +25408,13 @@
             <a:r>
               <a:rPr lang="en-US" sz="1300" b="1" dirty="0">
                 <a:solidFill>
-                  <a:srgbClr val="4C1D95"/>
+                  <a:srgbClr val="0F766E"/>
                 </a:solidFill>
                 <a:latin typeface="Trebuchet MS" pitchFamily="34" charset="0"/>
                 <a:ea typeface="Trebuchet MS" pitchFamily="34" charset="-122"/>
                 <a:cs typeface="Trebuchet MS" pitchFamily="34" charset="-120"/>
               </a:rPr>
-              <a:t>un</a:t>
+              <a:t>fair</a:t>
             </a:r>
             <a:endParaRPr lang="en-US" sz="1300" dirty="0"/>
           </a:p>
@@ -24730,7 +25428,7 @@
         </p:nvSpPr>
         <p:spPr>
           <a:xfrm>
-            <a:off x="2221992" y="2569464"/>
+            <a:off x="2938272" y="2569464"/>
             <a:ext cx="1828800" cy="201168"/>
           </a:xfrm>
           <a:prstGeom prst="rect">
@@ -24755,7 +25453,7 @@
                 <a:ea typeface="Calibri" pitchFamily="34" charset="-122"/>
                 <a:cs typeface="Calibri" pitchFamily="34" charset="-120"/>
               </a:rPr>
-              <a:t>not</a:t>
+              <a:t>just or equal</a:t>
             </a:r>
             <a:endParaRPr lang="en-US" sz="850" dirty="0"/>
           </a:p>
@@ -24769,7 +25467,7 @@
         </p:nvSpPr>
         <p:spPr>
           <a:xfrm>
-            <a:off x="4370832" y="2258568"/>
+            <a:off x="5803392" y="2258568"/>
             <a:ext cx="1828800" cy="292608"/>
           </a:xfrm>
           <a:prstGeom prst="rect">
@@ -24778,11 +25476,11 @@
             </a:avLst>
           </a:prstGeom>
           <a:solidFill>
-            <a:srgbClr val="CCFBF1"/>
+            <a:srgbClr val="FCE7F3"/>
           </a:solidFill>
           <a:ln w="19050">
             <a:solidFill>
-              <a:srgbClr val="0D9488"/>
+              <a:srgbClr val="DB2777"/>
             </a:solidFill>
             <a:prstDash val="solid"/>
           </a:ln>
@@ -24803,7 +25501,7 @@
         </p:nvSpPr>
         <p:spPr>
           <a:xfrm>
-            <a:off x="4370832" y="2258568"/>
+            <a:off x="5803392" y="2258568"/>
             <a:ext cx="1828800" cy="292608"/>
           </a:xfrm>
           <a:prstGeom prst="rect">
@@ -24822,13 +25520,13 @@
             <a:r>
               <a:rPr lang="en-US" sz="1300" b="1" dirty="0">
                 <a:solidFill>
-                  <a:srgbClr val="0F766E"/>
+                  <a:srgbClr val="9D174D"/>
                 </a:solidFill>
                 <a:latin typeface="Trebuchet MS" pitchFamily="34" charset="0"/>
                 <a:ea typeface="Trebuchet MS" pitchFamily="34" charset="-122"/>
                 <a:cs typeface="Trebuchet MS" pitchFamily="34" charset="-120"/>
               </a:rPr>
-              <a:t>fair</a:t>
+              <a:t>er</a:t>
             </a:r>
             <a:endParaRPr lang="en-US" sz="1300" dirty="0"/>
           </a:p>
@@ -24842,7 +25540,7 @@
         </p:nvSpPr>
         <p:spPr>
           <a:xfrm>
-            <a:off x="4370832" y="2569464"/>
+            <a:off x="5803392" y="2569464"/>
             <a:ext cx="1828800" cy="201168"/>
           </a:xfrm>
           <a:prstGeom prst="rect">
@@ -24867,7 +25565,7 @@
                 <a:ea typeface="Calibri" pitchFamily="34" charset="-122"/>
                 <a:cs typeface="Calibri" pitchFamily="34" charset="-120"/>
               </a:rPr>
-              <a:t>just or equal</a:t>
+              <a:t>more</a:t>
             </a:r>
             <a:endParaRPr lang="en-US" sz="850" dirty="0"/>
           </a:p>
@@ -24881,30 +25579,23 @@
         </p:nvSpPr>
         <p:spPr>
           <a:xfrm>
-            <a:off x="6519672" y="2258568"/>
-            <a:ext cx="1828800" cy="292608"/>
+            <a:off x="365760" y="3273552"/>
+            <a:ext cx="1371600" cy="658368"/>
           </a:xfrm>
           <a:prstGeom prst="rect">
             <a:avLst>
-              <a:gd name="adj" fmla="val 25000"/>
+              <a:gd name="adj" fmla="val 8333"/>
             </a:avLst>
           </a:prstGeom>
           <a:solidFill>
-            <a:srgbClr val="FCE7F3"/>
-          </a:solidFill>
-          <a:ln w="19050">
-            <a:solidFill>
-              <a:srgbClr val="DB2777"/>
-            </a:solidFill>
-            <a:prstDash val="solid"/>
-          </a:ln>
-          <a:effectLst>
-            <a:outerShdw sx="100000" sy="100000" kx="0" ky="0" algn="bl" rotWithShape="0" blurRad="101600" dist="38100" dir="8100000">
-              <a:srgbClr val="000000">
-                <a:alpha val="12000"/>
-              </a:srgbClr>
-            </a:outerShdw>
-          </a:effectLst>
+            <a:srgbClr val="E2E8F0"/>
+          </a:solidFill>
+          <a:ln w="12700">
+            <a:solidFill>
+              <a:srgbClr val="E2E8F0"/>
+            </a:solidFill>
+            <a:prstDash val="solid"/>
+          </a:ln>
         </p:spPr>
       </p:sp>
       <p:sp>
@@ -24915,8 +25606,8 @@
         </p:nvSpPr>
         <p:spPr>
           <a:xfrm>
-            <a:off x="6519672" y="2258568"/>
-            <a:ext cx="1828800" cy="292608"/>
+            <a:off x="365760" y="3273552"/>
+            <a:ext cx="1371600" cy="658368"/>
           </a:xfrm>
           <a:prstGeom prst="rect">
             <a:avLst/>
@@ -24932,69 +25623,30 @@
               <a:buNone/>
             </a:pPr>
             <a:r>
-              <a:rPr lang="en-US" sz="1300" b="1" dirty="0">
-                <a:solidFill>
-                  <a:srgbClr val="9D174D"/>
+              <a:rPr lang="en-US" sz="1100" b="1" dirty="0">
+                <a:solidFill>
+                  <a:srgbClr val="475569"/>
                 </a:solidFill>
                 <a:latin typeface="Trebuchet MS" pitchFamily="34" charset="0"/>
                 <a:ea typeface="Trebuchet MS" pitchFamily="34" charset="-122"/>
                 <a:cs typeface="Trebuchet MS" pitchFamily="34" charset="-120"/>
               </a:rPr>
-              <a:t>ly</a:t>
-            </a:r>
-            <a:endParaRPr lang="en-US" sz="1300" dirty="0"/>
-          </a:p>
-        </p:txBody>
-      </p:sp>
-      <p:sp>
-        <p:nvSpPr>
-          <p:cNvPr id="24" name="Text 22"/>
-          <p:cNvSpPr/>
-          <p:nvPr/>
-        </p:nvSpPr>
-        <p:spPr>
-          <a:xfrm>
-            <a:off x="6519672" y="2569464"/>
-            <a:ext cx="1828800" cy="201168"/>
-          </a:xfrm>
-          <a:prstGeom prst="rect">
-            <a:avLst/>
-          </a:prstGeom>
-          <a:noFill/>
-          <a:ln/>
-        </p:spPr>
-        <p:txBody>
-          <a:bodyPr wrap="square" lIns="0" tIns="0" rIns="0" bIns="0" rtlCol="0" anchor="t"/>
-          <a:lstStyle/>
-          <a:p>
-            <a:pPr algn="ctr" indent="0" marL="0">
-              <a:buNone/>
-            </a:pPr>
-            <a:r>
-              <a:rPr lang="en-US" sz="850" dirty="0">
-                <a:solidFill>
-                  <a:srgbClr val="475569"/>
-                </a:solidFill>
-                <a:latin typeface="Calibri" pitchFamily="34" charset="0"/>
-                <a:ea typeface="Calibri" pitchFamily="34" charset="-122"/>
-                <a:cs typeface="Calibri" pitchFamily="34" charset="-120"/>
-              </a:rPr>
-              <a:t>in a certain way</a:t>
-            </a:r>
-            <a:endParaRPr lang="en-US" sz="850" dirty="0"/>
-          </a:p>
-        </p:txBody>
-      </p:sp>
-      <p:sp>
-        <p:nvSpPr>
-          <p:cNvPr id="25" name="Shape 23"/>
-          <p:cNvSpPr/>
-          <p:nvPr/>
-        </p:nvSpPr>
-        <p:spPr>
-          <a:xfrm>
-            <a:off x="365760" y="3273552"/>
-            <a:ext cx="1371600" cy="658368"/>
+              <a:t>Syllables</a:t>
+            </a:r>
+            <a:endParaRPr lang="en-US" sz="1100" dirty="0"/>
+          </a:p>
+        </p:txBody>
+      </p:sp>
+      <p:sp>
+        <p:nvSpPr>
+          <p:cNvPr id="24" name="Shape 22"/>
+          <p:cNvSpPr/>
+          <p:nvPr/>
+        </p:nvSpPr>
+        <p:spPr>
+          <a:xfrm>
+            <a:off x="1874520" y="3273552"/>
+            <a:ext cx="6903720" cy="658368"/>
           </a:xfrm>
           <a:prstGeom prst="rect">
             <a:avLst>
@@ -25002,11 +25654,38 @@
             </a:avLst>
           </a:prstGeom>
           <a:solidFill>
-            <a:srgbClr val="E2E8F0"/>
-          </a:solidFill>
-          <a:ln w="12700">
-            <a:solidFill>
-              <a:srgbClr val="E2E8F0"/>
+            <a:srgbClr val="CCFBF1"/>
+          </a:solidFill>
+          <a:ln w="12700">
+            <a:solidFill>
+              <a:srgbClr val="0D9488"/>
+            </a:solidFill>
+            <a:prstDash val="solid"/>
+          </a:ln>
+        </p:spPr>
+      </p:sp>
+      <p:sp>
+        <p:nvSpPr>
+          <p:cNvPr id="25" name="Shape 23"/>
+          <p:cNvSpPr/>
+          <p:nvPr/>
+        </p:nvSpPr>
+        <p:spPr>
+          <a:xfrm>
+            <a:off x="2999232" y="3364992"/>
+            <a:ext cx="1645920" cy="475488"/>
+          </a:xfrm>
+          <a:prstGeom prst="rect">
+            <a:avLst>
+              <a:gd name="adj" fmla="val 9615"/>
+            </a:avLst>
+          </a:prstGeom>
+          <a:solidFill>
+            <a:srgbClr val="FFFFFF"/>
+          </a:solidFill>
+          <a:ln w="12700">
+            <a:solidFill>
+              <a:srgbClr val="0D9488"/>
             </a:solidFill>
             <a:prstDash val="solid"/>
           </a:ln>
@@ -25020,8 +25699,8 @@
         </p:nvSpPr>
         <p:spPr>
           <a:xfrm>
-            <a:off x="365760" y="3273552"/>
-            <a:ext cx="1371600" cy="658368"/>
+            <a:off x="2999232" y="3364992"/>
+            <a:ext cx="1645920" cy="475488"/>
           </a:xfrm>
           <a:prstGeom prst="rect">
             <a:avLst/>
@@ -25037,46 +25716,58 @@
               <a:buNone/>
             </a:pPr>
             <a:r>
-              <a:rPr lang="en-US" sz="1100" b="1" dirty="0">
-                <a:solidFill>
-                  <a:srgbClr val="475569"/>
+              <a:rPr lang="en-US" sz="1400" b="1" dirty="0">
+                <a:solidFill>
+                  <a:srgbClr val="0D9488"/>
                 </a:solidFill>
                 <a:latin typeface="Trebuchet MS" pitchFamily="34" charset="0"/>
                 <a:ea typeface="Trebuchet MS" pitchFamily="34" charset="-122"/>
                 <a:cs typeface="Trebuchet MS" pitchFamily="34" charset="-120"/>
               </a:rPr>
-              <a:t>Syllables</a:t>
-            </a:r>
-            <a:endParaRPr lang="en-US" sz="1100" dirty="0"/>
-          </a:p>
-        </p:txBody>
-      </p:sp>
-      <p:sp>
-        <p:nvSpPr>
-          <p:cNvPr id="27" name="Shape 25"/>
-          <p:cNvSpPr/>
-          <p:nvPr/>
-        </p:nvSpPr>
-        <p:spPr>
-          <a:xfrm>
-            <a:off x="1874520" y="3273552"/>
-            <a:ext cx="6903720" cy="658368"/>
-          </a:xfrm>
-          <a:prstGeom prst="rect">
-            <a:avLst>
-              <a:gd name="adj" fmla="val 8333"/>
-            </a:avLst>
-          </a:prstGeom>
-          <a:solidFill>
-            <a:srgbClr val="CCFBF1"/>
-          </a:solidFill>
-          <a:ln w="12700">
-            <a:solidFill>
-              <a:srgbClr val="0D9488"/>
-            </a:solidFill>
-            <a:prstDash val="solid"/>
-          </a:ln>
-        </p:spPr>
+              <a:t>fair</a:t>
+            </a:r>
+            <a:endParaRPr lang="en-US" sz="1400" dirty="0"/>
+          </a:p>
+        </p:txBody>
+      </p:sp>
+      <p:sp>
+        <p:nvSpPr>
+          <p:cNvPr id="27" name="Text 25"/>
+          <p:cNvSpPr/>
+          <p:nvPr/>
+        </p:nvSpPr>
+        <p:spPr>
+          <a:xfrm>
+            <a:off x="4645152" y="3364992"/>
+            <a:ext cx="1097280" cy="475488"/>
+          </a:xfrm>
+          <a:prstGeom prst="rect">
+            <a:avLst/>
+          </a:prstGeom>
+          <a:noFill/>
+          <a:ln/>
+        </p:spPr>
+        <p:txBody>
+          <a:bodyPr wrap="square" lIns="0" tIns="0" rIns="0" bIns="0" rtlCol="0" anchor="ctr"/>
+          <a:lstStyle/>
+          <a:p>
+            <a:pPr algn="ctr" indent="0" marL="0">
+              <a:buNone/>
+            </a:pPr>
+            <a:r>
+              <a:rPr lang="en-US" sz="1600" b="1" dirty="0">
+                <a:solidFill>
+                  <a:srgbClr val="0D9488"/>
+                </a:solidFill>
+                <a:latin typeface="Trebuchet MS" pitchFamily="34" charset="0"/>
+                <a:ea typeface="Trebuchet MS" pitchFamily="34" charset="-122"/>
+                <a:cs typeface="Trebuchet MS" pitchFamily="34" charset="-120"/>
+              </a:rPr>
+              <a:t>·</a:t>
+            </a:r>
+            <a:endParaRPr lang="en-US" sz="1600" dirty="0"/>
+          </a:p>
+        </p:txBody>
       </p:sp>
       <p:sp>
         <p:nvSpPr>
@@ -25086,7 +25777,7 @@
         </p:nvSpPr>
         <p:spPr>
           <a:xfrm>
-            <a:off x="2313432" y="3364992"/>
+            <a:off x="5742432" y="3364992"/>
             <a:ext cx="1645920" cy="475488"/>
           </a:xfrm>
           <a:prstGeom prst="rect">
@@ -25113,7 +25804,7 @@
         </p:nvSpPr>
         <p:spPr>
           <a:xfrm>
-            <a:off x="2313432" y="3364992"/>
+            <a:off x="5742432" y="3364992"/>
             <a:ext cx="1645920" cy="475488"/>
           </a:xfrm>
           <a:prstGeom prst="rect">
@@ -25138,7 +25829,7 @@
                 <a:ea typeface="Trebuchet MS" pitchFamily="34" charset="-122"/>
                 <a:cs typeface="Trebuchet MS" pitchFamily="34" charset="-120"/>
               </a:rPr>
-              <a:t>un</a:t>
+              <a:t>er</a:t>
             </a:r>
             <a:endParaRPr lang="en-US" sz="1400" dirty="0"/>
           </a:p>
@@ -25146,14 +25837,41 @@
       </p:sp>
       <p:sp>
         <p:nvSpPr>
-          <p:cNvPr id="30" name="Text 28"/>
-          <p:cNvSpPr/>
-          <p:nvPr/>
-        </p:nvSpPr>
-        <p:spPr>
-          <a:xfrm>
-            <a:off x="3959352" y="3364992"/>
-            <a:ext cx="411480" cy="475488"/>
+          <p:cNvPr id="30" name="Shape 28"/>
+          <p:cNvSpPr/>
+          <p:nvPr/>
+        </p:nvSpPr>
+        <p:spPr>
+          <a:xfrm>
+            <a:off x="365760" y="4096512"/>
+            <a:ext cx="1371600" cy="804672"/>
+          </a:xfrm>
+          <a:prstGeom prst="rect">
+            <a:avLst>
+              <a:gd name="adj" fmla="val 6818"/>
+            </a:avLst>
+          </a:prstGeom>
+          <a:solidFill>
+            <a:srgbClr val="E2E8F0"/>
+          </a:solidFill>
+          <a:ln w="12700">
+            <a:solidFill>
+              <a:srgbClr val="E2E8F0"/>
+            </a:solidFill>
+            <a:prstDash val="solid"/>
+          </a:ln>
+        </p:spPr>
+      </p:sp>
+      <p:sp>
+        <p:nvSpPr>
+          <p:cNvPr id="31" name="Text 29"/>
+          <p:cNvSpPr/>
+          <p:nvPr/>
+        </p:nvSpPr>
+        <p:spPr>
+          <a:xfrm>
+            <a:off x="365760" y="4096512"/>
+            <a:ext cx="1371600" cy="804672"/>
           </a:xfrm>
           <a:prstGeom prst="rect">
             <a:avLst/>
@@ -25169,201 +25887,30 @@
               <a:buNone/>
             </a:pPr>
             <a:r>
-              <a:rPr lang="en-US" sz="1600" b="1" dirty="0">
-                <a:solidFill>
-                  <a:srgbClr val="0D9488"/>
+              <a:rPr lang="en-US" sz="1100" b="1" dirty="0">
+                <a:solidFill>
+                  <a:srgbClr val="475569"/>
                 </a:solidFill>
                 <a:latin typeface="Trebuchet MS" pitchFamily="34" charset="0"/>
                 <a:ea typeface="Trebuchet MS" pitchFamily="34" charset="-122"/>
                 <a:cs typeface="Trebuchet MS" pitchFamily="34" charset="-120"/>
               </a:rPr>
-              <a:t>·</a:t>
-            </a:r>
-            <a:endParaRPr lang="en-US" sz="1600" dirty="0"/>
-          </a:p>
-        </p:txBody>
-      </p:sp>
-      <p:sp>
-        <p:nvSpPr>
-          <p:cNvPr id="31" name="Shape 29"/>
-          <p:cNvSpPr/>
-          <p:nvPr/>
-        </p:nvSpPr>
-        <p:spPr>
-          <a:xfrm>
-            <a:off x="4370832" y="3364992"/>
-            <a:ext cx="1645920" cy="475488"/>
-          </a:xfrm>
-          <a:prstGeom prst="rect">
-            <a:avLst>
-              <a:gd name="adj" fmla="val 9615"/>
-            </a:avLst>
-          </a:prstGeom>
-          <a:solidFill>
-            <a:srgbClr val="FFFFFF"/>
-          </a:solidFill>
-          <a:ln w="12700">
-            <a:solidFill>
-              <a:srgbClr val="0D9488"/>
-            </a:solidFill>
-            <a:prstDash val="solid"/>
-          </a:ln>
-        </p:spPr>
-      </p:sp>
-      <p:sp>
-        <p:nvSpPr>
-          <p:cNvPr id="32" name="Text 30"/>
-          <p:cNvSpPr/>
-          <p:nvPr/>
-        </p:nvSpPr>
-        <p:spPr>
-          <a:xfrm>
-            <a:off x="4370832" y="3364992"/>
-            <a:ext cx="1645920" cy="475488"/>
-          </a:xfrm>
-          <a:prstGeom prst="rect">
-            <a:avLst/>
-          </a:prstGeom>
-          <a:noFill/>
-          <a:ln/>
-        </p:spPr>
-        <p:txBody>
-          <a:bodyPr wrap="square" lIns="0" tIns="0" rIns="0" bIns="0" rtlCol="0" anchor="ctr"/>
-          <a:lstStyle/>
-          <a:p>
-            <a:pPr algn="ctr" indent="0" marL="0">
-              <a:buNone/>
-            </a:pPr>
-            <a:r>
-              <a:rPr lang="en-US" sz="1400" b="1" dirty="0">
-                <a:solidFill>
-                  <a:srgbClr val="0D9488"/>
-                </a:solidFill>
-                <a:latin typeface="Trebuchet MS" pitchFamily="34" charset="0"/>
-                <a:ea typeface="Trebuchet MS" pitchFamily="34" charset="-122"/>
-                <a:cs typeface="Trebuchet MS" pitchFamily="34" charset="-120"/>
-              </a:rPr>
-              <a:t>fair</a:t>
-            </a:r>
-            <a:endParaRPr lang="en-US" sz="1400" dirty="0"/>
-          </a:p>
-        </p:txBody>
-      </p:sp>
-      <p:sp>
-        <p:nvSpPr>
-          <p:cNvPr id="33" name="Text 31"/>
-          <p:cNvSpPr/>
-          <p:nvPr/>
-        </p:nvSpPr>
-        <p:spPr>
-          <a:xfrm>
-            <a:off x="6016752" y="3364992"/>
-            <a:ext cx="411480" cy="475488"/>
-          </a:xfrm>
-          <a:prstGeom prst="rect">
-            <a:avLst/>
-          </a:prstGeom>
-          <a:noFill/>
-          <a:ln/>
-        </p:spPr>
-        <p:txBody>
-          <a:bodyPr wrap="square" lIns="0" tIns="0" rIns="0" bIns="0" rtlCol="0" anchor="ctr"/>
-          <a:lstStyle/>
-          <a:p>
-            <a:pPr algn="ctr" indent="0" marL="0">
-              <a:buNone/>
-            </a:pPr>
-            <a:r>
-              <a:rPr lang="en-US" sz="1600" b="1" dirty="0">
-                <a:solidFill>
-                  <a:srgbClr val="0D9488"/>
-                </a:solidFill>
-                <a:latin typeface="Trebuchet MS" pitchFamily="34" charset="0"/>
-                <a:ea typeface="Trebuchet MS" pitchFamily="34" charset="-122"/>
-                <a:cs typeface="Trebuchet MS" pitchFamily="34" charset="-120"/>
-              </a:rPr>
-              <a:t>·</a:t>
-            </a:r>
-            <a:endParaRPr lang="en-US" sz="1600" dirty="0"/>
-          </a:p>
-        </p:txBody>
-      </p:sp>
-      <p:sp>
-        <p:nvSpPr>
-          <p:cNvPr id="34" name="Shape 32"/>
-          <p:cNvSpPr/>
-          <p:nvPr/>
-        </p:nvSpPr>
-        <p:spPr>
-          <a:xfrm>
-            <a:off x="6428232" y="3364992"/>
-            <a:ext cx="1645920" cy="475488"/>
-          </a:xfrm>
-          <a:prstGeom prst="rect">
-            <a:avLst>
-              <a:gd name="adj" fmla="val 9615"/>
-            </a:avLst>
-          </a:prstGeom>
-          <a:solidFill>
-            <a:srgbClr val="FFFFFF"/>
-          </a:solidFill>
-          <a:ln w="12700">
-            <a:solidFill>
-              <a:srgbClr val="0D9488"/>
-            </a:solidFill>
-            <a:prstDash val="solid"/>
-          </a:ln>
-        </p:spPr>
-      </p:sp>
-      <p:sp>
-        <p:nvSpPr>
-          <p:cNvPr id="35" name="Text 33"/>
-          <p:cNvSpPr/>
-          <p:nvPr/>
-        </p:nvSpPr>
-        <p:spPr>
-          <a:xfrm>
-            <a:off x="6428232" y="3364992"/>
-            <a:ext cx="1645920" cy="475488"/>
-          </a:xfrm>
-          <a:prstGeom prst="rect">
-            <a:avLst/>
-          </a:prstGeom>
-          <a:noFill/>
-          <a:ln/>
-        </p:spPr>
-        <p:txBody>
-          <a:bodyPr wrap="square" lIns="0" tIns="0" rIns="0" bIns="0" rtlCol="0" anchor="ctr"/>
-          <a:lstStyle/>
-          <a:p>
-            <a:pPr algn="ctr" indent="0" marL="0">
-              <a:buNone/>
-            </a:pPr>
-            <a:r>
-              <a:rPr lang="en-US" sz="1400" b="1" dirty="0">
-                <a:solidFill>
-                  <a:srgbClr val="0D9488"/>
-                </a:solidFill>
-                <a:latin typeface="Trebuchet MS" pitchFamily="34" charset="0"/>
-                <a:ea typeface="Trebuchet MS" pitchFamily="34" charset="-122"/>
-                <a:cs typeface="Trebuchet MS" pitchFamily="34" charset="-120"/>
-              </a:rPr>
-              <a:t>ly</a:t>
-            </a:r>
-            <a:endParaRPr lang="en-US" sz="1400" dirty="0"/>
-          </a:p>
-        </p:txBody>
-      </p:sp>
-      <p:sp>
-        <p:nvSpPr>
-          <p:cNvPr id="36" name="Shape 34"/>
-          <p:cNvSpPr/>
-          <p:nvPr/>
-        </p:nvSpPr>
-        <p:spPr>
-          <a:xfrm>
-            <a:off x="365760" y="4096512"/>
-            <a:ext cx="1371600" cy="804672"/>
+              <a:t>Phonemes</a:t>
+            </a:r>
+            <a:endParaRPr lang="en-US" sz="1100" dirty="0"/>
+          </a:p>
+        </p:txBody>
+      </p:sp>
+      <p:sp>
+        <p:nvSpPr>
+          <p:cNvPr id="32" name="Shape 30"/>
+          <p:cNvSpPr/>
+          <p:nvPr/>
+        </p:nvSpPr>
+        <p:spPr>
+          <a:xfrm>
+            <a:off x="1874520" y="4096512"/>
+            <a:ext cx="6903720" cy="804672"/>
           </a:xfrm>
           <a:prstGeom prst="rect">
             <a:avLst>
@@ -25371,85 +25918,19 @@
             </a:avLst>
           </a:prstGeom>
           <a:solidFill>
-            <a:srgbClr val="E2E8F0"/>
+            <a:srgbClr val="F8FAFC"/>
           </a:solidFill>
           <a:ln w="12700">
             <a:solidFill>
               <a:srgbClr val="E2E8F0"/>
             </a:solidFill>
-            <a:prstDash val="solid"/>
-          </a:ln>
-        </p:spPr>
-      </p:sp>
-      <p:sp>
-        <p:nvSpPr>
-          <p:cNvPr id="37" name="Text 35"/>
-          <p:cNvSpPr/>
-          <p:nvPr/>
-        </p:nvSpPr>
-        <p:spPr>
-          <a:xfrm>
-            <a:off x="365760" y="4096512"/>
-            <a:ext cx="1371600" cy="804672"/>
-          </a:xfrm>
-          <a:prstGeom prst="rect">
-            <a:avLst/>
-          </a:prstGeom>
-          <a:noFill/>
-          <a:ln/>
-        </p:spPr>
-        <p:txBody>
-          <a:bodyPr wrap="square" lIns="0" tIns="0" rIns="0" bIns="0" rtlCol="0" anchor="ctr"/>
-          <a:lstStyle/>
-          <a:p>
-            <a:pPr algn="ctr" indent="0" marL="0">
-              <a:buNone/>
-            </a:pPr>
-            <a:r>
-              <a:rPr lang="en-US" sz="1100" b="1" dirty="0">
-                <a:solidFill>
-                  <a:srgbClr val="475569"/>
-                </a:solidFill>
-                <a:latin typeface="Trebuchet MS" pitchFamily="34" charset="0"/>
-                <a:ea typeface="Trebuchet MS" pitchFamily="34" charset="-122"/>
-                <a:cs typeface="Trebuchet MS" pitchFamily="34" charset="-120"/>
-              </a:rPr>
-              <a:t>Phonemes</a:t>
-            </a:r>
-            <a:endParaRPr lang="en-US" sz="1100" dirty="0"/>
-          </a:p>
-        </p:txBody>
-      </p:sp>
-      <p:sp>
-        <p:nvSpPr>
-          <p:cNvPr id="38" name="Shape 36"/>
-          <p:cNvSpPr/>
-          <p:nvPr/>
-        </p:nvSpPr>
-        <p:spPr>
-          <a:xfrm>
-            <a:off x="1874520" y="4096512"/>
-            <a:ext cx="6903720" cy="804672"/>
-          </a:xfrm>
-          <a:prstGeom prst="rect">
-            <a:avLst>
-              <a:gd name="adj" fmla="val 6818"/>
-            </a:avLst>
-          </a:prstGeom>
-          <a:solidFill>
-            <a:srgbClr val="F8FAFC"/>
-          </a:solidFill>
-          <a:ln w="12700">
-            <a:solidFill>
-              <a:srgbClr val="E2E8F0"/>
-            </a:solidFill>
             <a:prstDash val="dash"/>
           </a:ln>
         </p:spPr>
       </p:sp>
       <p:sp>
         <p:nvSpPr>
-          <p:cNvPr id="39" name="Text 37"/>
+          <p:cNvPr id="33" name="Text 31"/>
           <p:cNvSpPr/>
           <p:nvPr/>
         </p:nvSpPr>
@@ -25911,7 +26392,7 @@
                 <a:ea typeface="Trebuchet MS" pitchFamily="34" charset="-122"/>
                 <a:cs typeface="Trebuchet MS" pitchFamily="34" charset="-120"/>
               </a:rPr>
-              <a:t>unfairly</a:t>
+              <a:t>fairer</a:t>
             </a:r>
             <a:endParaRPr lang="en-US" sz="2800" dirty="0"/>
           </a:p>
@@ -25991,7 +26472,7 @@
         </p:nvSpPr>
         <p:spPr>
           <a:xfrm>
-            <a:off x="2221992" y="2258568"/>
+            <a:off x="2938272" y="2258568"/>
             <a:ext cx="1828800" cy="292608"/>
           </a:xfrm>
           <a:prstGeom prst="rect">
@@ -26000,11 +26481,11 @@
             </a:avLst>
           </a:prstGeom>
           <a:solidFill>
-            <a:srgbClr val="DDD6FE"/>
+            <a:srgbClr val="CCFBF1"/>
           </a:solidFill>
           <a:ln w="19050">
             <a:solidFill>
-              <a:srgbClr val="7C3AED"/>
+              <a:srgbClr val="0D9488"/>
             </a:solidFill>
             <a:prstDash val="solid"/>
           </a:ln>
@@ -26025,7 +26506,7 @@
         </p:nvSpPr>
         <p:spPr>
           <a:xfrm>
-            <a:off x="2221992" y="2258568"/>
+            <a:off x="2938272" y="2258568"/>
             <a:ext cx="1828800" cy="292608"/>
           </a:xfrm>
           <a:prstGeom prst="rect">
@@ -26044,13 +26525,13 @@
             <a:r>
               <a:rPr lang="en-US" sz="1300" b="1" dirty="0">
                 <a:solidFill>
-                  <a:srgbClr val="4C1D95"/>
+                  <a:srgbClr val="0F766E"/>
                 </a:solidFill>
                 <a:latin typeface="Trebuchet MS" pitchFamily="34" charset="0"/>
                 <a:ea typeface="Trebuchet MS" pitchFamily="34" charset="-122"/>
                 <a:cs typeface="Trebuchet MS" pitchFamily="34" charset="-120"/>
               </a:rPr>
-              <a:t>un</a:t>
+              <a:t>fair</a:t>
             </a:r>
             <a:endParaRPr lang="en-US" sz="1300" dirty="0"/>
           </a:p>
@@ -26064,7 +26545,7 @@
         </p:nvSpPr>
         <p:spPr>
           <a:xfrm>
-            <a:off x="2221992" y="2569464"/>
+            <a:off x="2938272" y="2569464"/>
             <a:ext cx="1828800" cy="201168"/>
           </a:xfrm>
           <a:prstGeom prst="rect">
@@ -26089,7 +26570,7 @@
                 <a:ea typeface="Calibri" pitchFamily="34" charset="-122"/>
                 <a:cs typeface="Calibri" pitchFamily="34" charset="-120"/>
               </a:rPr>
-              <a:t>not</a:t>
+              <a:t>just or equal</a:t>
             </a:r>
             <a:endParaRPr lang="en-US" sz="850" dirty="0"/>
           </a:p>
@@ -26103,7 +26584,7 @@
         </p:nvSpPr>
         <p:spPr>
           <a:xfrm>
-            <a:off x="4370832" y="2258568"/>
+            <a:off x="5803392" y="2258568"/>
             <a:ext cx="1828800" cy="292608"/>
           </a:xfrm>
           <a:prstGeom prst="rect">
@@ -26112,11 +26593,11 @@
             </a:avLst>
           </a:prstGeom>
           <a:solidFill>
-            <a:srgbClr val="CCFBF1"/>
+            <a:srgbClr val="FCE7F3"/>
           </a:solidFill>
           <a:ln w="19050">
             <a:solidFill>
-              <a:srgbClr val="0D9488"/>
+              <a:srgbClr val="DB2777"/>
             </a:solidFill>
             <a:prstDash val="solid"/>
           </a:ln>
@@ -26137,7 +26618,7 @@
         </p:nvSpPr>
         <p:spPr>
           <a:xfrm>
-            <a:off x="4370832" y="2258568"/>
+            <a:off x="5803392" y="2258568"/>
             <a:ext cx="1828800" cy="292608"/>
           </a:xfrm>
           <a:prstGeom prst="rect">
@@ -26156,13 +26637,13 @@
             <a:r>
               <a:rPr lang="en-US" sz="1300" b="1" dirty="0">
                 <a:solidFill>
-                  <a:srgbClr val="0F766E"/>
+                  <a:srgbClr val="9D174D"/>
                 </a:solidFill>
                 <a:latin typeface="Trebuchet MS" pitchFamily="34" charset="0"/>
                 <a:ea typeface="Trebuchet MS" pitchFamily="34" charset="-122"/>
                 <a:cs typeface="Trebuchet MS" pitchFamily="34" charset="-120"/>
               </a:rPr>
-              <a:t>fair</a:t>
+              <a:t>er</a:t>
             </a:r>
             <a:endParaRPr lang="en-US" sz="1300" dirty="0"/>
           </a:p>
@@ -26176,7 +26657,7 @@
         </p:nvSpPr>
         <p:spPr>
           <a:xfrm>
-            <a:off x="4370832" y="2569464"/>
+            <a:off x="5803392" y="2569464"/>
             <a:ext cx="1828800" cy="201168"/>
           </a:xfrm>
           <a:prstGeom prst="rect">
@@ -26201,7 +26682,7 @@
                 <a:ea typeface="Calibri" pitchFamily="34" charset="-122"/>
                 <a:cs typeface="Calibri" pitchFamily="34" charset="-120"/>
               </a:rPr>
-              <a:t>just or equal</a:t>
+              <a:t>more</a:t>
             </a:r>
             <a:endParaRPr lang="en-US" sz="850" dirty="0"/>
           </a:p>
@@ -26215,30 +26696,23 @@
         </p:nvSpPr>
         <p:spPr>
           <a:xfrm>
-            <a:off x="6519672" y="2258568"/>
-            <a:ext cx="1828800" cy="292608"/>
+            <a:off x="365760" y="3273552"/>
+            <a:ext cx="1371600" cy="658368"/>
           </a:xfrm>
           <a:prstGeom prst="rect">
             <a:avLst>
-              <a:gd name="adj" fmla="val 25000"/>
+              <a:gd name="adj" fmla="val 8333"/>
             </a:avLst>
           </a:prstGeom>
           <a:solidFill>
-            <a:srgbClr val="FCE7F3"/>
-          </a:solidFill>
-          <a:ln w="19050">
-            <a:solidFill>
-              <a:srgbClr val="DB2777"/>
-            </a:solidFill>
-            <a:prstDash val="solid"/>
-          </a:ln>
-          <a:effectLst>
-            <a:outerShdw sx="100000" sy="100000" kx="0" ky="0" algn="bl" rotWithShape="0" blurRad="101600" dist="38100" dir="8100000">
-              <a:srgbClr val="000000">
-                <a:alpha val="12000"/>
-              </a:srgbClr>
-            </a:outerShdw>
-          </a:effectLst>
+            <a:srgbClr val="E2E8F0"/>
+          </a:solidFill>
+          <a:ln w="12700">
+            <a:solidFill>
+              <a:srgbClr val="E2E8F0"/>
+            </a:solidFill>
+            <a:prstDash val="solid"/>
+          </a:ln>
         </p:spPr>
       </p:sp>
       <p:sp>
@@ -26249,8 +26723,8 @@
         </p:nvSpPr>
         <p:spPr>
           <a:xfrm>
-            <a:off x="6519672" y="2258568"/>
-            <a:ext cx="1828800" cy="292608"/>
+            <a:off x="365760" y="3273552"/>
+            <a:ext cx="1371600" cy="658368"/>
           </a:xfrm>
           <a:prstGeom prst="rect">
             <a:avLst/>
@@ -26266,69 +26740,30 @@
               <a:buNone/>
             </a:pPr>
             <a:r>
-              <a:rPr lang="en-US" sz="1300" b="1" dirty="0">
-                <a:solidFill>
-                  <a:srgbClr val="9D174D"/>
+              <a:rPr lang="en-US" sz="1100" b="1" dirty="0">
+                <a:solidFill>
+                  <a:srgbClr val="475569"/>
                 </a:solidFill>
                 <a:latin typeface="Trebuchet MS" pitchFamily="34" charset="0"/>
                 <a:ea typeface="Trebuchet MS" pitchFamily="34" charset="-122"/>
                 <a:cs typeface="Trebuchet MS" pitchFamily="34" charset="-120"/>
               </a:rPr>
-              <a:t>ly</a:t>
-            </a:r>
-            <a:endParaRPr lang="en-US" sz="1300" dirty="0"/>
-          </a:p>
-        </p:txBody>
-      </p:sp>
-      <p:sp>
-        <p:nvSpPr>
-          <p:cNvPr id="24" name="Text 22"/>
-          <p:cNvSpPr/>
-          <p:nvPr/>
-        </p:nvSpPr>
-        <p:spPr>
-          <a:xfrm>
-            <a:off x="6519672" y="2569464"/>
-            <a:ext cx="1828800" cy="201168"/>
-          </a:xfrm>
-          <a:prstGeom prst="rect">
-            <a:avLst/>
-          </a:prstGeom>
-          <a:noFill/>
-          <a:ln/>
-        </p:spPr>
-        <p:txBody>
-          <a:bodyPr wrap="square" lIns="0" tIns="0" rIns="0" bIns="0" rtlCol="0" anchor="t"/>
-          <a:lstStyle/>
-          <a:p>
-            <a:pPr algn="ctr" indent="0" marL="0">
-              <a:buNone/>
-            </a:pPr>
-            <a:r>
-              <a:rPr lang="en-US" sz="850" dirty="0">
-                <a:solidFill>
-                  <a:srgbClr val="475569"/>
-                </a:solidFill>
-                <a:latin typeface="Calibri" pitchFamily="34" charset="0"/>
-                <a:ea typeface="Calibri" pitchFamily="34" charset="-122"/>
-                <a:cs typeface="Calibri" pitchFamily="34" charset="-120"/>
-              </a:rPr>
-              <a:t>in a certain way</a:t>
-            </a:r>
-            <a:endParaRPr lang="en-US" sz="850" dirty="0"/>
-          </a:p>
-        </p:txBody>
-      </p:sp>
-      <p:sp>
-        <p:nvSpPr>
-          <p:cNvPr id="25" name="Shape 23"/>
-          <p:cNvSpPr/>
-          <p:nvPr/>
-        </p:nvSpPr>
-        <p:spPr>
-          <a:xfrm>
-            <a:off x="365760" y="3273552"/>
-            <a:ext cx="1371600" cy="658368"/>
+              <a:t>Syllables</a:t>
+            </a:r>
+            <a:endParaRPr lang="en-US" sz="1100" dirty="0"/>
+          </a:p>
+        </p:txBody>
+      </p:sp>
+      <p:sp>
+        <p:nvSpPr>
+          <p:cNvPr id="24" name="Shape 22"/>
+          <p:cNvSpPr/>
+          <p:nvPr/>
+        </p:nvSpPr>
+        <p:spPr>
+          <a:xfrm>
+            <a:off x="1874520" y="3273552"/>
+            <a:ext cx="6903720" cy="658368"/>
           </a:xfrm>
           <a:prstGeom prst="rect">
             <a:avLst>
@@ -26336,11 +26771,38 @@
             </a:avLst>
           </a:prstGeom>
           <a:solidFill>
-            <a:srgbClr val="E2E8F0"/>
-          </a:solidFill>
-          <a:ln w="12700">
-            <a:solidFill>
-              <a:srgbClr val="E2E8F0"/>
+            <a:srgbClr val="CCFBF1"/>
+          </a:solidFill>
+          <a:ln w="12700">
+            <a:solidFill>
+              <a:srgbClr val="0D9488"/>
+            </a:solidFill>
+            <a:prstDash val="solid"/>
+          </a:ln>
+        </p:spPr>
+      </p:sp>
+      <p:sp>
+        <p:nvSpPr>
+          <p:cNvPr id="25" name="Shape 23"/>
+          <p:cNvSpPr/>
+          <p:nvPr/>
+        </p:nvSpPr>
+        <p:spPr>
+          <a:xfrm>
+            <a:off x="2999232" y="3364992"/>
+            <a:ext cx="1645920" cy="475488"/>
+          </a:xfrm>
+          <a:prstGeom prst="rect">
+            <a:avLst>
+              <a:gd name="adj" fmla="val 9615"/>
+            </a:avLst>
+          </a:prstGeom>
+          <a:solidFill>
+            <a:srgbClr val="FFFFFF"/>
+          </a:solidFill>
+          <a:ln w="12700">
+            <a:solidFill>
+              <a:srgbClr val="0D9488"/>
             </a:solidFill>
             <a:prstDash val="solid"/>
           </a:ln>
@@ -26354,8 +26816,8 @@
         </p:nvSpPr>
         <p:spPr>
           <a:xfrm>
-            <a:off x="365760" y="3273552"/>
-            <a:ext cx="1371600" cy="658368"/>
+            <a:off x="2999232" y="3364992"/>
+            <a:ext cx="1645920" cy="475488"/>
           </a:xfrm>
           <a:prstGeom prst="rect">
             <a:avLst/>
@@ -26371,15 +26833,186 @@
               <a:buNone/>
             </a:pPr>
             <a:r>
-              <a:rPr lang="en-US" sz="1100" b="1" dirty="0">
-                <a:solidFill>
-                  <a:srgbClr val="475569"/>
+              <a:rPr lang="en-US" sz="1400" b="1" dirty="0">
+                <a:solidFill>
+                  <a:srgbClr val="0D9488"/>
                 </a:solidFill>
                 <a:latin typeface="Trebuchet MS" pitchFamily="34" charset="0"/>
                 <a:ea typeface="Trebuchet MS" pitchFamily="34" charset="-122"/>
                 <a:cs typeface="Trebuchet MS" pitchFamily="34" charset="-120"/>
               </a:rPr>
-              <a:t>Syllables</a:t>
+              <a:t>fair</a:t>
+            </a:r>
+            <a:endParaRPr lang="en-US" sz="1400" dirty="0"/>
+          </a:p>
+        </p:txBody>
+      </p:sp>
+      <p:sp>
+        <p:nvSpPr>
+          <p:cNvPr id="27" name="Text 25"/>
+          <p:cNvSpPr/>
+          <p:nvPr/>
+        </p:nvSpPr>
+        <p:spPr>
+          <a:xfrm>
+            <a:off x="4645152" y="3364992"/>
+            <a:ext cx="1097280" cy="475488"/>
+          </a:xfrm>
+          <a:prstGeom prst="rect">
+            <a:avLst/>
+          </a:prstGeom>
+          <a:noFill/>
+          <a:ln/>
+        </p:spPr>
+        <p:txBody>
+          <a:bodyPr wrap="square" lIns="0" tIns="0" rIns="0" bIns="0" rtlCol="0" anchor="ctr"/>
+          <a:lstStyle/>
+          <a:p>
+            <a:pPr algn="ctr" indent="0" marL="0">
+              <a:buNone/>
+            </a:pPr>
+            <a:r>
+              <a:rPr lang="en-US" sz="1600" b="1" dirty="0">
+                <a:solidFill>
+                  <a:srgbClr val="0D9488"/>
+                </a:solidFill>
+                <a:latin typeface="Trebuchet MS" pitchFamily="34" charset="0"/>
+                <a:ea typeface="Trebuchet MS" pitchFamily="34" charset="-122"/>
+                <a:cs typeface="Trebuchet MS" pitchFamily="34" charset="-120"/>
+              </a:rPr>
+              <a:t>·</a:t>
+            </a:r>
+            <a:endParaRPr lang="en-US" sz="1600" dirty="0"/>
+          </a:p>
+        </p:txBody>
+      </p:sp>
+      <p:sp>
+        <p:nvSpPr>
+          <p:cNvPr id="28" name="Shape 26"/>
+          <p:cNvSpPr/>
+          <p:nvPr/>
+        </p:nvSpPr>
+        <p:spPr>
+          <a:xfrm>
+            <a:off x="5742432" y="3364992"/>
+            <a:ext cx="1645920" cy="475488"/>
+          </a:xfrm>
+          <a:prstGeom prst="rect">
+            <a:avLst>
+              <a:gd name="adj" fmla="val 9615"/>
+            </a:avLst>
+          </a:prstGeom>
+          <a:solidFill>
+            <a:srgbClr val="FFFFFF"/>
+          </a:solidFill>
+          <a:ln w="12700">
+            <a:solidFill>
+              <a:srgbClr val="0D9488"/>
+            </a:solidFill>
+            <a:prstDash val="solid"/>
+          </a:ln>
+        </p:spPr>
+      </p:sp>
+      <p:sp>
+        <p:nvSpPr>
+          <p:cNvPr id="29" name="Text 27"/>
+          <p:cNvSpPr/>
+          <p:nvPr/>
+        </p:nvSpPr>
+        <p:spPr>
+          <a:xfrm>
+            <a:off x="5742432" y="3364992"/>
+            <a:ext cx="1645920" cy="475488"/>
+          </a:xfrm>
+          <a:prstGeom prst="rect">
+            <a:avLst/>
+          </a:prstGeom>
+          <a:noFill/>
+          <a:ln/>
+        </p:spPr>
+        <p:txBody>
+          <a:bodyPr wrap="square" lIns="0" tIns="0" rIns="0" bIns="0" rtlCol="0" anchor="ctr"/>
+          <a:lstStyle/>
+          <a:p>
+            <a:pPr algn="ctr" indent="0" marL="0">
+              <a:buNone/>
+            </a:pPr>
+            <a:r>
+              <a:rPr lang="en-US" sz="1400" b="1" dirty="0">
+                <a:solidFill>
+                  <a:srgbClr val="0D9488"/>
+                </a:solidFill>
+                <a:latin typeface="Trebuchet MS" pitchFamily="34" charset="0"/>
+                <a:ea typeface="Trebuchet MS" pitchFamily="34" charset="-122"/>
+                <a:cs typeface="Trebuchet MS" pitchFamily="34" charset="-120"/>
+              </a:rPr>
+              <a:t>er</a:t>
+            </a:r>
+            <a:endParaRPr lang="en-US" sz="1400" dirty="0"/>
+          </a:p>
+        </p:txBody>
+      </p:sp>
+      <p:sp>
+        <p:nvSpPr>
+          <p:cNvPr id="30" name="Shape 28"/>
+          <p:cNvSpPr/>
+          <p:nvPr/>
+        </p:nvSpPr>
+        <p:spPr>
+          <a:xfrm>
+            <a:off x="365760" y="4096512"/>
+            <a:ext cx="1371600" cy="804672"/>
+          </a:xfrm>
+          <a:prstGeom prst="rect">
+            <a:avLst>
+              <a:gd name="adj" fmla="val 6818"/>
+            </a:avLst>
+          </a:prstGeom>
+          <a:solidFill>
+            <a:srgbClr val="E2E8F0"/>
+          </a:solidFill>
+          <a:ln w="12700">
+            <a:solidFill>
+              <a:srgbClr val="E2E8F0"/>
+            </a:solidFill>
+            <a:prstDash val="solid"/>
+          </a:ln>
+        </p:spPr>
+      </p:sp>
+      <p:sp>
+        <p:nvSpPr>
+          <p:cNvPr id="31" name="Text 29"/>
+          <p:cNvSpPr/>
+          <p:nvPr/>
+        </p:nvSpPr>
+        <p:spPr>
+          <a:xfrm>
+            <a:off x="365760" y="4096512"/>
+            <a:ext cx="1371600" cy="804672"/>
+          </a:xfrm>
+          <a:prstGeom prst="rect">
+            <a:avLst/>
+          </a:prstGeom>
+          <a:noFill/>
+          <a:ln/>
+        </p:spPr>
+        <p:txBody>
+          <a:bodyPr wrap="square" lIns="0" tIns="0" rIns="0" bIns="0" rtlCol="0" anchor="ctr"/>
+          <a:lstStyle/>
+          <a:p>
+            <a:pPr algn="ctr" indent="0" marL="0">
+              <a:buNone/>
+            </a:pPr>
+            <a:r>
+              <a:rPr lang="en-US" sz="1100" b="1" dirty="0">
+                <a:solidFill>
+                  <a:srgbClr val="475569"/>
+                </a:solidFill>
+                <a:latin typeface="Trebuchet MS" pitchFamily="34" charset="0"/>
+                <a:ea typeface="Trebuchet MS" pitchFamily="34" charset="-122"/>
+                <a:cs typeface="Trebuchet MS" pitchFamily="34" charset="-120"/>
+              </a:rPr>
+              <a:t>Phonemes</a:t>
             </a:r>
             <a:endParaRPr lang="en-US" sz="1100" dirty="0"/>
           </a:p>
@@ -26387,13 +27020,13 @@
       </p:sp>
       <p:sp>
         <p:nvSpPr>
-          <p:cNvPr id="27" name="Shape 25"/>
-          <p:cNvSpPr/>
-          <p:nvPr/>
-        </p:nvSpPr>
-        <p:spPr>
-          <a:xfrm>
-            <a:off x="1874520" y="3273552"/>
+          <p:cNvPr id="32" name="Shape 30"/>
+          <p:cNvSpPr/>
+          <p:nvPr/>
+        </p:nvSpPr>
+        <p:spPr>
+          <a:xfrm>
+            <a:off x="1874520" y="4096512"/>
             <a:ext cx="6903720" cy="658368"/>
           </a:xfrm>
           <a:prstGeom prst="rect">
@@ -26402,30 +27035,30 @@
             </a:avLst>
           </a:prstGeom>
           <a:solidFill>
-            <a:srgbClr val="CCFBF1"/>
-          </a:solidFill>
-          <a:ln w="12700">
-            <a:solidFill>
-              <a:srgbClr val="0D9488"/>
-            </a:solidFill>
-            <a:prstDash val="solid"/>
-          </a:ln>
-        </p:spPr>
-      </p:sp>
-      <p:sp>
-        <p:nvSpPr>
-          <p:cNvPr id="28" name="Shape 26"/>
-          <p:cNvSpPr/>
-          <p:nvPr/>
-        </p:nvSpPr>
-        <p:spPr>
-          <a:xfrm>
-            <a:off x="2313432" y="3364992"/>
-            <a:ext cx="1645920" cy="475488"/>
+            <a:srgbClr val="FCE7F3"/>
+          </a:solidFill>
+          <a:ln w="12700">
+            <a:solidFill>
+              <a:srgbClr val="DB2777"/>
+            </a:solidFill>
+            <a:prstDash val="solid"/>
+          </a:ln>
+        </p:spPr>
+      </p:sp>
+      <p:sp>
+        <p:nvSpPr>
+          <p:cNvPr id="33" name="Shape 31"/>
+          <p:cNvSpPr/>
+          <p:nvPr/>
+        </p:nvSpPr>
+        <p:spPr>
+          <a:xfrm>
+            <a:off x="3033522" y="4169664"/>
+            <a:ext cx="685800" cy="475488"/>
           </a:xfrm>
           <a:prstGeom prst="rect">
             <a:avLst>
-              <a:gd name="adj" fmla="val 9615"/>
+              <a:gd name="adj" fmla="val 7692"/>
             </a:avLst>
           </a:prstGeom>
           <a:solidFill>
@@ -26433,22 +27066,22 @@
           </a:solidFill>
           <a:ln w="12700">
             <a:solidFill>
-              <a:srgbClr val="0D9488"/>
-            </a:solidFill>
-            <a:prstDash val="solid"/>
-          </a:ln>
-        </p:spPr>
-      </p:sp>
-      <p:sp>
-        <p:nvSpPr>
-          <p:cNvPr id="29" name="Text 27"/>
-          <p:cNvSpPr/>
-          <p:nvPr/>
-        </p:nvSpPr>
-        <p:spPr>
-          <a:xfrm>
-            <a:off x="2313432" y="3364992"/>
-            <a:ext cx="1645920" cy="475488"/>
+              <a:srgbClr val="DB2777"/>
+            </a:solidFill>
+            <a:prstDash val="solid"/>
+          </a:ln>
+        </p:spPr>
+      </p:sp>
+      <p:sp>
+        <p:nvSpPr>
+          <p:cNvPr id="34" name="Text 32"/>
+          <p:cNvSpPr/>
+          <p:nvPr/>
+        </p:nvSpPr>
+        <p:spPr>
+          <a:xfrm>
+            <a:off x="3033522" y="4169664"/>
+            <a:ext cx="685800" cy="475488"/>
           </a:xfrm>
           <a:prstGeom prst="rect">
             <a:avLst/>
@@ -26464,30 +27097,57 @@
               <a:buNone/>
             </a:pPr>
             <a:r>
-              <a:rPr lang="en-US" sz="1400" b="1" dirty="0">
-                <a:solidFill>
-                  <a:srgbClr val="0D9488"/>
+              <a:rPr lang="en-US" sz="1000" b="1" dirty="0">
+                <a:solidFill>
+                  <a:srgbClr val="9D174D"/>
                 </a:solidFill>
                 <a:latin typeface="Trebuchet MS" pitchFamily="34" charset="0"/>
                 <a:ea typeface="Trebuchet MS" pitchFamily="34" charset="-122"/>
                 <a:cs typeface="Trebuchet MS" pitchFamily="34" charset="-120"/>
               </a:rPr>
-              <a:t>un</a:t>
-            </a:r>
-            <a:endParaRPr lang="en-US" sz="1400" dirty="0"/>
-          </a:p>
-        </p:txBody>
-      </p:sp>
-      <p:sp>
-        <p:nvSpPr>
-          <p:cNvPr id="30" name="Text 28"/>
-          <p:cNvSpPr/>
-          <p:nvPr/>
-        </p:nvSpPr>
-        <p:spPr>
-          <a:xfrm>
-            <a:off x="3959352" y="3364992"/>
-            <a:ext cx="411480" cy="475488"/>
+              <a:t>f</a:t>
+            </a:r>
+            <a:endParaRPr lang="en-US" sz="1000" dirty="0"/>
+          </a:p>
+        </p:txBody>
+      </p:sp>
+      <p:sp>
+        <p:nvSpPr>
+          <p:cNvPr id="35" name="Shape 33"/>
+          <p:cNvSpPr/>
+          <p:nvPr/>
+        </p:nvSpPr>
+        <p:spPr>
+          <a:xfrm>
+            <a:off x="4850892" y="4169664"/>
+            <a:ext cx="685800" cy="475488"/>
+          </a:xfrm>
+          <a:prstGeom prst="rect">
+            <a:avLst>
+              <a:gd name="adj" fmla="val 7692"/>
+            </a:avLst>
+          </a:prstGeom>
+          <a:solidFill>
+            <a:srgbClr val="FFFFFF"/>
+          </a:solidFill>
+          <a:ln w="12700">
+            <a:solidFill>
+              <a:srgbClr val="DB2777"/>
+            </a:solidFill>
+            <a:prstDash val="solid"/>
+          </a:ln>
+        </p:spPr>
+      </p:sp>
+      <p:sp>
+        <p:nvSpPr>
+          <p:cNvPr id="36" name="Text 34"/>
+          <p:cNvSpPr/>
+          <p:nvPr/>
+        </p:nvSpPr>
+        <p:spPr>
+          <a:xfrm>
+            <a:off x="4850892" y="4169664"/>
+            <a:ext cx="685800" cy="475488"/>
           </a:xfrm>
           <a:prstGeom prst="rect">
             <a:avLst/>
@@ -26503,34 +27163,34 @@
               <a:buNone/>
             </a:pPr>
             <a:r>
-              <a:rPr lang="en-US" sz="1600" b="1" dirty="0">
-                <a:solidFill>
-                  <a:srgbClr val="0D9488"/>
+              <a:rPr lang="en-US" sz="1000" b="1" dirty="0">
+                <a:solidFill>
+                  <a:srgbClr val="9D174D"/>
                 </a:solidFill>
                 <a:latin typeface="Trebuchet MS" pitchFamily="34" charset="0"/>
                 <a:ea typeface="Trebuchet MS" pitchFamily="34" charset="-122"/>
                 <a:cs typeface="Trebuchet MS" pitchFamily="34" charset="-120"/>
               </a:rPr>
-              <a:t>·</a:t>
-            </a:r>
-            <a:endParaRPr lang="en-US" sz="1600" dirty="0"/>
-          </a:p>
-        </p:txBody>
-      </p:sp>
-      <p:sp>
-        <p:nvSpPr>
-          <p:cNvPr id="31" name="Shape 29"/>
-          <p:cNvSpPr/>
-          <p:nvPr/>
-        </p:nvSpPr>
-        <p:spPr>
-          <a:xfrm>
-            <a:off x="4370832" y="3364992"/>
-            <a:ext cx="1645920" cy="475488"/>
+              <a:t>air</a:t>
+            </a:r>
+            <a:endParaRPr lang="en-US" sz="1000" dirty="0"/>
+          </a:p>
+        </p:txBody>
+      </p:sp>
+      <p:sp>
+        <p:nvSpPr>
+          <p:cNvPr id="37" name="Shape 35"/>
+          <p:cNvSpPr/>
+          <p:nvPr/>
+        </p:nvSpPr>
+        <p:spPr>
+          <a:xfrm>
+            <a:off x="6668262" y="4169664"/>
+            <a:ext cx="685800" cy="475488"/>
           </a:xfrm>
           <a:prstGeom prst="rect">
             <a:avLst>
-              <a:gd name="adj" fmla="val 9615"/>
+              <a:gd name="adj" fmla="val 7692"/>
             </a:avLst>
           </a:prstGeom>
           <a:solidFill>
@@ -26538,22 +27198,22 @@
           </a:solidFill>
           <a:ln w="12700">
             <a:solidFill>
-              <a:srgbClr val="0D9488"/>
-            </a:solidFill>
-            <a:prstDash val="solid"/>
-          </a:ln>
-        </p:spPr>
-      </p:sp>
-      <p:sp>
-        <p:nvSpPr>
-          <p:cNvPr id="32" name="Text 30"/>
-          <p:cNvSpPr/>
-          <p:nvPr/>
-        </p:nvSpPr>
-        <p:spPr>
-          <a:xfrm>
-            <a:off x="4370832" y="3364992"/>
-            <a:ext cx="1645920" cy="475488"/>
+              <a:srgbClr val="DB2777"/>
+            </a:solidFill>
+            <a:prstDash val="solid"/>
+          </a:ln>
+        </p:spPr>
+      </p:sp>
+      <p:sp>
+        <p:nvSpPr>
+          <p:cNvPr id="38" name="Text 36"/>
+          <p:cNvSpPr/>
+          <p:nvPr/>
+        </p:nvSpPr>
+        <p:spPr>
+          <a:xfrm>
+            <a:off x="6668262" y="4169664"/>
+            <a:ext cx="685800" cy="475488"/>
           </a:xfrm>
           <a:prstGeom prst="rect">
             <a:avLst/>
@@ -26569,611 +27229,17 @@
               <a:buNone/>
             </a:pPr>
             <a:r>
-              <a:rPr lang="en-US" sz="1400" b="1" dirty="0">
-                <a:solidFill>
-                  <a:srgbClr val="0D9488"/>
+              <a:rPr lang="en-US" sz="1000" b="1" dirty="0">
+                <a:solidFill>
+                  <a:srgbClr val="9D174D"/>
                 </a:solidFill>
                 <a:latin typeface="Trebuchet MS" pitchFamily="34" charset="0"/>
                 <a:ea typeface="Trebuchet MS" pitchFamily="34" charset="-122"/>
                 <a:cs typeface="Trebuchet MS" pitchFamily="34" charset="-120"/>
               </a:rPr>
-              <a:t>fair</a:t>
-            </a:r>
-            <a:endParaRPr lang="en-US" sz="1400" dirty="0"/>
-          </a:p>
-        </p:txBody>
-      </p:sp>
-      <p:sp>
-        <p:nvSpPr>
-          <p:cNvPr id="33" name="Text 31"/>
-          <p:cNvSpPr/>
-          <p:nvPr/>
-        </p:nvSpPr>
-        <p:spPr>
-          <a:xfrm>
-            <a:off x="6016752" y="3364992"/>
-            <a:ext cx="411480" cy="475488"/>
-          </a:xfrm>
-          <a:prstGeom prst="rect">
-            <a:avLst/>
-          </a:prstGeom>
-          <a:noFill/>
-          <a:ln/>
-        </p:spPr>
-        <p:txBody>
-          <a:bodyPr wrap="square" lIns="0" tIns="0" rIns="0" bIns="0" rtlCol="0" anchor="ctr"/>
-          <a:lstStyle/>
-          <a:p>
-            <a:pPr algn="ctr" indent="0" marL="0">
-              <a:buNone/>
-            </a:pPr>
-            <a:r>
-              <a:rPr lang="en-US" sz="1600" b="1" dirty="0">
-                <a:solidFill>
-                  <a:srgbClr val="0D9488"/>
-                </a:solidFill>
-                <a:latin typeface="Trebuchet MS" pitchFamily="34" charset="0"/>
-                <a:ea typeface="Trebuchet MS" pitchFamily="34" charset="-122"/>
-                <a:cs typeface="Trebuchet MS" pitchFamily="34" charset="-120"/>
-              </a:rPr>
-              <a:t>·</a:t>
-            </a:r>
-            <a:endParaRPr lang="en-US" sz="1600" dirty="0"/>
-          </a:p>
-        </p:txBody>
-      </p:sp>
-      <p:sp>
-        <p:nvSpPr>
-          <p:cNvPr id="34" name="Shape 32"/>
-          <p:cNvSpPr/>
-          <p:nvPr/>
-        </p:nvSpPr>
-        <p:spPr>
-          <a:xfrm>
-            <a:off x="6428232" y="3364992"/>
-            <a:ext cx="1645920" cy="475488"/>
-          </a:xfrm>
-          <a:prstGeom prst="rect">
-            <a:avLst>
-              <a:gd name="adj" fmla="val 9615"/>
-            </a:avLst>
-          </a:prstGeom>
-          <a:solidFill>
-            <a:srgbClr val="FFFFFF"/>
-          </a:solidFill>
-          <a:ln w="12700">
-            <a:solidFill>
-              <a:srgbClr val="0D9488"/>
-            </a:solidFill>
-            <a:prstDash val="solid"/>
-          </a:ln>
-        </p:spPr>
-      </p:sp>
-      <p:sp>
-        <p:nvSpPr>
-          <p:cNvPr id="35" name="Text 33"/>
-          <p:cNvSpPr/>
-          <p:nvPr/>
-        </p:nvSpPr>
-        <p:spPr>
-          <a:xfrm>
-            <a:off x="6428232" y="3364992"/>
-            <a:ext cx="1645920" cy="475488"/>
-          </a:xfrm>
-          <a:prstGeom prst="rect">
-            <a:avLst/>
-          </a:prstGeom>
-          <a:noFill/>
-          <a:ln/>
-        </p:spPr>
-        <p:txBody>
-          <a:bodyPr wrap="square" lIns="0" tIns="0" rIns="0" bIns="0" rtlCol="0" anchor="ctr"/>
-          <a:lstStyle/>
-          <a:p>
-            <a:pPr algn="ctr" indent="0" marL="0">
-              <a:buNone/>
-            </a:pPr>
-            <a:r>
-              <a:rPr lang="en-US" sz="1400" b="1" dirty="0">
-                <a:solidFill>
-                  <a:srgbClr val="0D9488"/>
-                </a:solidFill>
-                <a:latin typeface="Trebuchet MS" pitchFamily="34" charset="0"/>
-                <a:ea typeface="Trebuchet MS" pitchFamily="34" charset="-122"/>
-                <a:cs typeface="Trebuchet MS" pitchFamily="34" charset="-120"/>
-              </a:rPr>
-              <a:t>ly</a:t>
-            </a:r>
-            <a:endParaRPr lang="en-US" sz="1400" dirty="0"/>
-          </a:p>
-        </p:txBody>
-      </p:sp>
-      <p:sp>
-        <p:nvSpPr>
-          <p:cNvPr id="36" name="Shape 34"/>
-          <p:cNvSpPr/>
-          <p:nvPr/>
-        </p:nvSpPr>
-        <p:spPr>
-          <a:xfrm>
-            <a:off x="365760" y="4096512"/>
-            <a:ext cx="1371600" cy="804672"/>
-          </a:xfrm>
-          <a:prstGeom prst="rect">
-            <a:avLst>
-              <a:gd name="adj" fmla="val 6818"/>
-            </a:avLst>
-          </a:prstGeom>
-          <a:solidFill>
-            <a:srgbClr val="E2E8F0"/>
-          </a:solidFill>
-          <a:ln w="12700">
-            <a:solidFill>
-              <a:srgbClr val="E2E8F0"/>
-            </a:solidFill>
-            <a:prstDash val="solid"/>
-          </a:ln>
-        </p:spPr>
-      </p:sp>
-      <p:sp>
-        <p:nvSpPr>
-          <p:cNvPr id="37" name="Text 35"/>
-          <p:cNvSpPr/>
-          <p:nvPr/>
-        </p:nvSpPr>
-        <p:spPr>
-          <a:xfrm>
-            <a:off x="365760" y="4096512"/>
-            <a:ext cx="1371600" cy="804672"/>
-          </a:xfrm>
-          <a:prstGeom prst="rect">
-            <a:avLst/>
-          </a:prstGeom>
-          <a:noFill/>
-          <a:ln/>
-        </p:spPr>
-        <p:txBody>
-          <a:bodyPr wrap="square" lIns="0" tIns="0" rIns="0" bIns="0" rtlCol="0" anchor="ctr"/>
-          <a:lstStyle/>
-          <a:p>
-            <a:pPr algn="ctr" indent="0" marL="0">
-              <a:buNone/>
-            </a:pPr>
-            <a:r>
-              <a:rPr lang="en-US" sz="1100" b="1" dirty="0">
-                <a:solidFill>
-                  <a:srgbClr val="475569"/>
-                </a:solidFill>
-                <a:latin typeface="Trebuchet MS" pitchFamily="34" charset="0"/>
-                <a:ea typeface="Trebuchet MS" pitchFamily="34" charset="-122"/>
-                <a:cs typeface="Trebuchet MS" pitchFamily="34" charset="-120"/>
-              </a:rPr>
-              <a:t>Phonemes</a:t>
-            </a:r>
-            <a:endParaRPr lang="en-US" sz="1100" dirty="0"/>
-          </a:p>
-        </p:txBody>
-      </p:sp>
-      <p:sp>
-        <p:nvSpPr>
-          <p:cNvPr id="38" name="Shape 36"/>
-          <p:cNvSpPr/>
-          <p:nvPr/>
-        </p:nvSpPr>
-        <p:spPr>
-          <a:xfrm>
-            <a:off x="1874520" y="4096512"/>
-            <a:ext cx="6903720" cy="658368"/>
-          </a:xfrm>
-          <a:prstGeom prst="rect">
-            <a:avLst>
-              <a:gd name="adj" fmla="val 8333"/>
-            </a:avLst>
-          </a:prstGeom>
-          <a:solidFill>
-            <a:srgbClr val="FCE7F3"/>
-          </a:solidFill>
-          <a:ln w="12700">
-            <a:solidFill>
-              <a:srgbClr val="DB2777"/>
-            </a:solidFill>
-            <a:prstDash val="solid"/>
-          </a:ln>
-        </p:spPr>
-      </p:sp>
-      <p:sp>
-        <p:nvSpPr>
-          <p:cNvPr id="39" name="Shape 37"/>
-          <p:cNvSpPr/>
-          <p:nvPr/>
-        </p:nvSpPr>
-        <p:spPr>
-          <a:xfrm>
-            <a:off x="2254649" y="4169664"/>
-            <a:ext cx="685800" cy="475488"/>
-          </a:xfrm>
-          <a:prstGeom prst="rect">
-            <a:avLst>
-              <a:gd name="adj" fmla="val 7692"/>
-            </a:avLst>
-          </a:prstGeom>
-          <a:solidFill>
-            <a:srgbClr val="FFFFFF"/>
-          </a:solidFill>
-          <a:ln w="12700">
-            <a:solidFill>
-              <a:srgbClr val="DB2777"/>
-            </a:solidFill>
-            <a:prstDash val="solid"/>
-          </a:ln>
-        </p:spPr>
-      </p:sp>
-      <p:sp>
-        <p:nvSpPr>
-          <p:cNvPr id="40" name="Text 38"/>
-          <p:cNvSpPr/>
-          <p:nvPr/>
-        </p:nvSpPr>
-        <p:spPr>
-          <a:xfrm>
-            <a:off x="2254649" y="4169664"/>
-            <a:ext cx="685800" cy="475488"/>
-          </a:xfrm>
-          <a:prstGeom prst="rect">
-            <a:avLst/>
-          </a:prstGeom>
-          <a:noFill/>
-          <a:ln/>
-        </p:spPr>
-        <p:txBody>
-          <a:bodyPr wrap="square" lIns="0" tIns="0" rIns="0" bIns="0" rtlCol="0" anchor="ctr"/>
-          <a:lstStyle/>
-          <a:p>
-            <a:pPr algn="ctr" indent="0" marL="0">
-              <a:buNone/>
-            </a:pPr>
-            <a:r>
-              <a:rPr lang="en-US" sz="900" b="1" dirty="0">
-                <a:solidFill>
-                  <a:srgbClr val="9D174D"/>
-                </a:solidFill>
-                <a:latin typeface="Trebuchet MS" pitchFamily="34" charset="0"/>
-                <a:ea typeface="Trebuchet MS" pitchFamily="34" charset="-122"/>
-                <a:cs typeface="Trebuchet MS" pitchFamily="34" charset="-120"/>
-              </a:rPr>
-              <a:t>u</a:t>
-            </a:r>
-            <a:endParaRPr lang="en-US" sz="900" dirty="0"/>
-          </a:p>
-        </p:txBody>
-      </p:sp>
-      <p:sp>
-        <p:nvSpPr>
-          <p:cNvPr id="41" name="Shape 39"/>
-          <p:cNvSpPr/>
-          <p:nvPr/>
-        </p:nvSpPr>
-        <p:spPr>
-          <a:xfrm>
-            <a:off x="3293146" y="4169664"/>
-            <a:ext cx="685800" cy="475488"/>
-          </a:xfrm>
-          <a:prstGeom prst="rect">
-            <a:avLst>
-              <a:gd name="adj" fmla="val 7692"/>
-            </a:avLst>
-          </a:prstGeom>
-          <a:solidFill>
-            <a:srgbClr val="FFFFFF"/>
-          </a:solidFill>
-          <a:ln w="12700">
-            <a:solidFill>
-              <a:srgbClr val="DB2777"/>
-            </a:solidFill>
-            <a:prstDash val="solid"/>
-          </a:ln>
-        </p:spPr>
-      </p:sp>
-      <p:sp>
-        <p:nvSpPr>
-          <p:cNvPr id="42" name="Text 40"/>
-          <p:cNvSpPr/>
-          <p:nvPr/>
-        </p:nvSpPr>
-        <p:spPr>
-          <a:xfrm>
-            <a:off x="3293146" y="4169664"/>
-            <a:ext cx="685800" cy="475488"/>
-          </a:xfrm>
-          <a:prstGeom prst="rect">
-            <a:avLst/>
-          </a:prstGeom>
-          <a:noFill/>
-          <a:ln/>
-        </p:spPr>
-        <p:txBody>
-          <a:bodyPr wrap="square" lIns="0" tIns="0" rIns="0" bIns="0" rtlCol="0" anchor="ctr"/>
-          <a:lstStyle/>
-          <a:p>
-            <a:pPr algn="ctr" indent="0" marL="0">
-              <a:buNone/>
-            </a:pPr>
-            <a:r>
-              <a:rPr lang="en-US" sz="900" b="1" dirty="0">
-                <a:solidFill>
-                  <a:srgbClr val="9D174D"/>
-                </a:solidFill>
-                <a:latin typeface="Trebuchet MS" pitchFamily="34" charset="0"/>
-                <a:ea typeface="Trebuchet MS" pitchFamily="34" charset="-122"/>
-                <a:cs typeface="Trebuchet MS" pitchFamily="34" charset="-120"/>
-              </a:rPr>
-              <a:t>n</a:t>
-            </a:r>
-            <a:endParaRPr lang="en-US" sz="900" dirty="0"/>
-          </a:p>
-        </p:txBody>
-      </p:sp>
-      <p:sp>
-        <p:nvSpPr>
-          <p:cNvPr id="43" name="Shape 41"/>
-          <p:cNvSpPr/>
-          <p:nvPr/>
-        </p:nvSpPr>
-        <p:spPr>
-          <a:xfrm>
-            <a:off x="4331643" y="4169664"/>
-            <a:ext cx="685800" cy="475488"/>
-          </a:xfrm>
-          <a:prstGeom prst="rect">
-            <a:avLst>
-              <a:gd name="adj" fmla="val 7692"/>
-            </a:avLst>
-          </a:prstGeom>
-          <a:solidFill>
-            <a:srgbClr val="FFFFFF"/>
-          </a:solidFill>
-          <a:ln w="12700">
-            <a:solidFill>
-              <a:srgbClr val="DB2777"/>
-            </a:solidFill>
-            <a:prstDash val="solid"/>
-          </a:ln>
-        </p:spPr>
-      </p:sp>
-      <p:sp>
-        <p:nvSpPr>
-          <p:cNvPr id="44" name="Text 42"/>
-          <p:cNvSpPr/>
-          <p:nvPr/>
-        </p:nvSpPr>
-        <p:spPr>
-          <a:xfrm>
-            <a:off x="4331643" y="4169664"/>
-            <a:ext cx="685800" cy="475488"/>
-          </a:xfrm>
-          <a:prstGeom prst="rect">
-            <a:avLst/>
-          </a:prstGeom>
-          <a:noFill/>
-          <a:ln/>
-        </p:spPr>
-        <p:txBody>
-          <a:bodyPr wrap="square" lIns="0" tIns="0" rIns="0" bIns="0" rtlCol="0" anchor="ctr"/>
-          <a:lstStyle/>
-          <a:p>
-            <a:pPr algn="ctr" indent="0" marL="0">
-              <a:buNone/>
-            </a:pPr>
-            <a:r>
-              <a:rPr lang="en-US" sz="900" b="1" dirty="0">
-                <a:solidFill>
-                  <a:srgbClr val="9D174D"/>
-                </a:solidFill>
-                <a:latin typeface="Trebuchet MS" pitchFamily="34" charset="0"/>
-                <a:ea typeface="Trebuchet MS" pitchFamily="34" charset="-122"/>
-                <a:cs typeface="Trebuchet MS" pitchFamily="34" charset="-120"/>
-              </a:rPr>
-              <a:t>f</a:t>
-            </a:r>
-            <a:endParaRPr lang="en-US" sz="900" dirty="0"/>
-          </a:p>
-        </p:txBody>
-      </p:sp>
-      <p:sp>
-        <p:nvSpPr>
-          <p:cNvPr id="45" name="Shape 43"/>
-          <p:cNvSpPr/>
-          <p:nvPr/>
-        </p:nvSpPr>
-        <p:spPr>
-          <a:xfrm>
-            <a:off x="5370141" y="4169664"/>
-            <a:ext cx="685800" cy="475488"/>
-          </a:xfrm>
-          <a:prstGeom prst="rect">
-            <a:avLst>
-              <a:gd name="adj" fmla="val 7692"/>
-            </a:avLst>
-          </a:prstGeom>
-          <a:solidFill>
-            <a:srgbClr val="FFFFFF"/>
-          </a:solidFill>
-          <a:ln w="12700">
-            <a:solidFill>
-              <a:srgbClr val="DB2777"/>
-            </a:solidFill>
-            <a:prstDash val="solid"/>
-          </a:ln>
-        </p:spPr>
-      </p:sp>
-      <p:sp>
-        <p:nvSpPr>
-          <p:cNvPr id="46" name="Text 44"/>
-          <p:cNvSpPr/>
-          <p:nvPr/>
-        </p:nvSpPr>
-        <p:spPr>
-          <a:xfrm>
-            <a:off x="5370141" y="4169664"/>
-            <a:ext cx="685800" cy="475488"/>
-          </a:xfrm>
-          <a:prstGeom prst="rect">
-            <a:avLst/>
-          </a:prstGeom>
-          <a:noFill/>
-          <a:ln/>
-        </p:spPr>
-        <p:txBody>
-          <a:bodyPr wrap="square" lIns="0" tIns="0" rIns="0" bIns="0" rtlCol="0" anchor="ctr"/>
-          <a:lstStyle/>
-          <a:p>
-            <a:pPr algn="ctr" indent="0" marL="0">
-              <a:buNone/>
-            </a:pPr>
-            <a:r>
-              <a:rPr lang="en-US" sz="900" b="1" dirty="0">
-                <a:solidFill>
-                  <a:srgbClr val="9D174D"/>
-                </a:solidFill>
-                <a:latin typeface="Trebuchet MS" pitchFamily="34" charset="0"/>
-                <a:ea typeface="Trebuchet MS" pitchFamily="34" charset="-122"/>
-                <a:cs typeface="Trebuchet MS" pitchFamily="34" charset="-120"/>
-              </a:rPr>
-              <a:t>air</a:t>
-            </a:r>
-            <a:endParaRPr lang="en-US" sz="900" dirty="0"/>
-          </a:p>
-        </p:txBody>
-      </p:sp>
-      <p:sp>
-        <p:nvSpPr>
-          <p:cNvPr id="47" name="Shape 45"/>
-          <p:cNvSpPr/>
-          <p:nvPr/>
-        </p:nvSpPr>
-        <p:spPr>
-          <a:xfrm>
-            <a:off x="6408638" y="4169664"/>
-            <a:ext cx="685800" cy="475488"/>
-          </a:xfrm>
-          <a:prstGeom prst="rect">
-            <a:avLst>
-              <a:gd name="adj" fmla="val 7692"/>
-            </a:avLst>
-          </a:prstGeom>
-          <a:solidFill>
-            <a:srgbClr val="FFFFFF"/>
-          </a:solidFill>
-          <a:ln w="12700">
-            <a:solidFill>
-              <a:srgbClr val="DB2777"/>
-            </a:solidFill>
-            <a:prstDash val="solid"/>
-          </a:ln>
-        </p:spPr>
-      </p:sp>
-      <p:sp>
-        <p:nvSpPr>
-          <p:cNvPr id="48" name="Text 46"/>
-          <p:cNvSpPr/>
-          <p:nvPr/>
-        </p:nvSpPr>
-        <p:spPr>
-          <a:xfrm>
-            <a:off x="6408638" y="4169664"/>
-            <a:ext cx="685800" cy="475488"/>
-          </a:xfrm>
-          <a:prstGeom prst="rect">
-            <a:avLst/>
-          </a:prstGeom>
-          <a:noFill/>
-          <a:ln/>
-        </p:spPr>
-        <p:txBody>
-          <a:bodyPr wrap="square" lIns="0" tIns="0" rIns="0" bIns="0" rtlCol="0" anchor="ctr"/>
-          <a:lstStyle/>
-          <a:p>
-            <a:pPr algn="ctr" indent="0" marL="0">
-              <a:buNone/>
-            </a:pPr>
-            <a:r>
-              <a:rPr lang="en-US" sz="900" b="1" dirty="0">
-                <a:solidFill>
-                  <a:srgbClr val="9D174D"/>
-                </a:solidFill>
-                <a:latin typeface="Trebuchet MS" pitchFamily="34" charset="0"/>
-                <a:ea typeface="Trebuchet MS" pitchFamily="34" charset="-122"/>
-                <a:cs typeface="Trebuchet MS" pitchFamily="34" charset="-120"/>
-              </a:rPr>
-              <a:t>l</a:t>
-            </a:r>
-            <a:endParaRPr lang="en-US" sz="900" dirty="0"/>
-          </a:p>
-        </p:txBody>
-      </p:sp>
-      <p:sp>
-        <p:nvSpPr>
-          <p:cNvPr id="49" name="Shape 47"/>
-          <p:cNvSpPr/>
-          <p:nvPr/>
-        </p:nvSpPr>
-        <p:spPr>
-          <a:xfrm>
-            <a:off x="7447135" y="4169664"/>
-            <a:ext cx="685800" cy="475488"/>
-          </a:xfrm>
-          <a:prstGeom prst="rect">
-            <a:avLst>
-              <a:gd name="adj" fmla="val 7692"/>
-            </a:avLst>
-          </a:prstGeom>
-          <a:solidFill>
-            <a:srgbClr val="FFFFFF"/>
-          </a:solidFill>
-          <a:ln w="12700">
-            <a:solidFill>
-              <a:srgbClr val="DB2777"/>
-            </a:solidFill>
-            <a:prstDash val="solid"/>
-          </a:ln>
-        </p:spPr>
-      </p:sp>
-      <p:sp>
-        <p:nvSpPr>
-          <p:cNvPr id="50" name="Text 48"/>
-          <p:cNvSpPr/>
-          <p:nvPr/>
-        </p:nvSpPr>
-        <p:spPr>
-          <a:xfrm>
-            <a:off x="7447135" y="4169664"/>
-            <a:ext cx="685800" cy="475488"/>
-          </a:xfrm>
-          <a:prstGeom prst="rect">
-            <a:avLst/>
-          </a:prstGeom>
-          <a:noFill/>
-          <a:ln/>
-        </p:spPr>
-        <p:txBody>
-          <a:bodyPr wrap="square" lIns="0" tIns="0" rIns="0" bIns="0" rtlCol="0" anchor="ctr"/>
-          <a:lstStyle/>
-          <a:p>
-            <a:pPr algn="ctr" indent="0" marL="0">
-              <a:buNone/>
-            </a:pPr>
-            <a:r>
-              <a:rPr lang="en-US" sz="900" b="1" dirty="0">
-                <a:solidFill>
-                  <a:srgbClr val="9D174D"/>
-                </a:solidFill>
-                <a:latin typeface="Trebuchet MS" pitchFamily="34" charset="0"/>
-                <a:ea typeface="Trebuchet MS" pitchFamily="34" charset="-122"/>
-                <a:cs typeface="Trebuchet MS" pitchFamily="34" charset="-120"/>
-              </a:rPr>
-              <a:t>y</a:t>
-            </a:r>
-            <a:endParaRPr lang="en-US" sz="900" dirty="0"/>
+              <a:t>er</a:t>
+            </a:r>
+            <a:endParaRPr lang="en-US" sz="1000" dirty="0"/>
           </a:p>
         </p:txBody>
       </p:sp>
@@ -27602,7 +27668,7 @@
                 <a:ea typeface="Trebuchet MS" pitchFamily="34" charset="-122"/>
                 <a:cs typeface="Trebuchet MS" pitchFamily="34" charset="-120"/>
               </a:rPr>
-              <a:t>fairly</a:t>
+              <a:t>fairest</a:t>
             </a:r>
             <a:endParaRPr lang="en-US" sz="2800" dirty="0"/>
           </a:p>
@@ -28429,7 +28495,7 @@
                 <a:ea typeface="Trebuchet MS" pitchFamily="34" charset="-122"/>
                 <a:cs typeface="Trebuchet MS" pitchFamily="34" charset="-120"/>
               </a:rPr>
-              <a:t>fairly</a:t>
+              <a:t>fairest</a:t>
             </a:r>
             <a:endParaRPr lang="en-US" sz="2800" dirty="0"/>
           </a:p>
@@ -28680,7 +28746,7 @@
                 <a:ea typeface="Trebuchet MS" pitchFamily="34" charset="-122"/>
                 <a:cs typeface="Trebuchet MS" pitchFamily="34" charset="-120"/>
               </a:rPr>
-              <a:t>ly</a:t>
+              <a:t>est</a:t>
             </a:r>
             <a:endParaRPr lang="en-US" sz="1300" dirty="0"/>
           </a:p>
@@ -28719,7 +28785,7 @@
                 <a:ea typeface="Calibri" pitchFamily="34" charset="-122"/>
                 <a:cs typeface="Calibri" pitchFamily="34" charset="-120"/>
               </a:rPr>
-              <a:t>in a certain way</a:t>
+              <a:t>the most</a:t>
             </a:r>
             <a:endParaRPr lang="en-US" sz="850" dirty="0"/>
           </a:p>
@@ -29414,7 +29480,7 @@
                 <a:ea typeface="Trebuchet MS" pitchFamily="34" charset="-122"/>
                 <a:cs typeface="Trebuchet MS" pitchFamily="34" charset="-120"/>
               </a:rPr>
-              <a:t>fairly</a:t>
+              <a:t>fairest</a:t>
             </a:r>
             <a:endParaRPr lang="en-US" sz="2800" dirty="0"/>
           </a:p>
@@ -29665,7 +29731,7 @@
                 <a:ea typeface="Trebuchet MS" pitchFamily="34" charset="-122"/>
                 <a:cs typeface="Trebuchet MS" pitchFamily="34" charset="-120"/>
               </a:rPr>
-              <a:t>ly</a:t>
+              <a:t>est</a:t>
             </a:r>
             <a:endParaRPr lang="en-US" sz="1300" dirty="0"/>
           </a:p>
@@ -29704,7 +29770,7 @@
                 <a:ea typeface="Calibri" pitchFamily="34" charset="-122"/>
                 <a:cs typeface="Calibri" pitchFamily="34" charset="-120"/>
               </a:rPr>
-              <a:t>in a certain way</a:t>
+              <a:t>the most</a:t>
             </a:r>
             <a:endParaRPr lang="en-US" sz="850" dirty="0"/>
           </a:p>
@@ -29968,7 +30034,7 @@
                 <a:ea typeface="Trebuchet MS" pitchFamily="34" charset="-122"/>
                 <a:cs typeface="Trebuchet MS" pitchFamily="34" charset="-120"/>
               </a:rPr>
-              <a:t>ly</a:t>
+              <a:t>est</a:t>
             </a:r>
             <a:endParaRPr lang="en-US" sz="1400" dirty="0"/>
           </a:p>
@@ -30531,7 +30597,7 @@
                 <a:ea typeface="Trebuchet MS" pitchFamily="34" charset="-122"/>
                 <a:cs typeface="Trebuchet MS" pitchFamily="34" charset="-120"/>
               </a:rPr>
-              <a:t>fairly</a:t>
+              <a:t>fairest</a:t>
             </a:r>
             <a:endParaRPr lang="en-US" sz="2800" dirty="0"/>
           </a:p>
@@ -30782,7 +30848,7 @@
                 <a:ea typeface="Trebuchet MS" pitchFamily="34" charset="-122"/>
                 <a:cs typeface="Trebuchet MS" pitchFamily="34" charset="-120"/>
               </a:rPr>
-              <a:t>ly</a:t>
+              <a:t>est</a:t>
             </a:r>
             <a:endParaRPr lang="en-US" sz="1300" dirty="0"/>
           </a:p>
@@ -30821,7 +30887,7 @@
                 <a:ea typeface="Calibri" pitchFamily="34" charset="-122"/>
                 <a:cs typeface="Calibri" pitchFamily="34" charset="-120"/>
               </a:rPr>
-              <a:t>in a certain way</a:t>
+              <a:t>the most</a:t>
             </a:r>
             <a:endParaRPr lang="en-US" sz="850" dirty="0"/>
           </a:p>
@@ -31085,7 +31151,7 @@
                 <a:ea typeface="Trebuchet MS" pitchFamily="34" charset="-122"/>
                 <a:cs typeface="Trebuchet MS" pitchFamily="34" charset="-120"/>
               </a:rPr>
-              <a:t>ly</a:t>
+              <a:t>est</a:t>
             </a:r>
             <a:endParaRPr lang="en-US" sz="1400" dirty="0"/>
           </a:p>
@@ -31192,7 +31258,7 @@
         </p:nvSpPr>
         <p:spPr>
           <a:xfrm>
-            <a:off x="2670048" y="4169664"/>
+            <a:off x="2427732" y="4169664"/>
             <a:ext cx="685800" cy="475488"/>
           </a:xfrm>
           <a:prstGeom prst="rect">
@@ -31219,7 +31285,7 @@
         </p:nvSpPr>
         <p:spPr>
           <a:xfrm>
-            <a:off x="2670048" y="4169664"/>
+            <a:off x="2427732" y="4169664"/>
             <a:ext cx="685800" cy="475488"/>
           </a:xfrm>
           <a:prstGeom prst="rect">
@@ -31258,7 +31324,7 @@
         </p:nvSpPr>
         <p:spPr>
           <a:xfrm>
-            <a:off x="4123944" y="4169664"/>
+            <a:off x="3639312" y="4169664"/>
             <a:ext cx="685800" cy="475488"/>
           </a:xfrm>
           <a:prstGeom prst="rect">
@@ -31285,7 +31351,7 @@
         </p:nvSpPr>
         <p:spPr>
           <a:xfrm>
-            <a:off x="4123944" y="4169664"/>
+            <a:off x="3639312" y="4169664"/>
             <a:ext cx="685800" cy="475488"/>
           </a:xfrm>
           <a:prstGeom prst="rect">
@@ -31324,7 +31390,7 @@
         </p:nvSpPr>
         <p:spPr>
           <a:xfrm>
-            <a:off x="5577840" y="4169664"/>
+            <a:off x="4850892" y="4169664"/>
             <a:ext cx="685800" cy="475488"/>
           </a:xfrm>
           <a:prstGeom prst="rect">
@@ -31351,7 +31417,7 @@
         </p:nvSpPr>
         <p:spPr>
           <a:xfrm>
-            <a:off x="5577840" y="4169664"/>
+            <a:off x="4850892" y="4169664"/>
             <a:ext cx="685800" cy="475488"/>
           </a:xfrm>
           <a:prstGeom prst="rect">
@@ -31376,7 +31442,7 @@
                 <a:ea typeface="Trebuchet MS" pitchFamily="34" charset="-122"/>
                 <a:cs typeface="Trebuchet MS" pitchFamily="34" charset="-120"/>
               </a:rPr>
-              <a:t>l</a:t>
+              <a:t>e</a:t>
             </a:r>
             <a:endParaRPr lang="en-US" sz="900" dirty="0"/>
           </a:p>
@@ -31390,7 +31456,7 @@
         </p:nvSpPr>
         <p:spPr>
           <a:xfrm>
-            <a:off x="7031736" y="4169664"/>
+            <a:off x="6062472" y="4169664"/>
             <a:ext cx="685800" cy="475488"/>
           </a:xfrm>
           <a:prstGeom prst="rect">
@@ -31417,7 +31483,7 @@
         </p:nvSpPr>
         <p:spPr>
           <a:xfrm>
-            <a:off x="7031736" y="4169664"/>
+            <a:off x="6062472" y="4169664"/>
             <a:ext cx="685800" cy="475488"/>
           </a:xfrm>
           <a:prstGeom prst="rect">
@@ -31442,7 +31508,73 @@
                 <a:ea typeface="Trebuchet MS" pitchFamily="34" charset="-122"/>
                 <a:cs typeface="Trebuchet MS" pitchFamily="34" charset="-120"/>
               </a:rPr>
-              <a:t>y</a:t>
+              <a:t>s</a:t>
+            </a:r>
+            <a:endParaRPr lang="en-US" sz="900" dirty="0"/>
+          </a:p>
+        </p:txBody>
+      </p:sp>
+      <p:sp>
+        <p:nvSpPr>
+          <p:cNvPr id="41" name="Shape 39"/>
+          <p:cNvSpPr/>
+          <p:nvPr/>
+        </p:nvSpPr>
+        <p:spPr>
+          <a:xfrm>
+            <a:off x="7274052" y="4169664"/>
+            <a:ext cx="685800" cy="475488"/>
+          </a:xfrm>
+          <a:prstGeom prst="rect">
+            <a:avLst>
+              <a:gd name="adj" fmla="val 7692"/>
+            </a:avLst>
+          </a:prstGeom>
+          <a:solidFill>
+            <a:srgbClr val="FFFFFF"/>
+          </a:solidFill>
+          <a:ln w="12700">
+            <a:solidFill>
+              <a:srgbClr val="DB2777"/>
+            </a:solidFill>
+            <a:prstDash val="solid"/>
+          </a:ln>
+        </p:spPr>
+      </p:sp>
+      <p:sp>
+        <p:nvSpPr>
+          <p:cNvPr id="42" name="Text 40"/>
+          <p:cNvSpPr/>
+          <p:nvPr/>
+        </p:nvSpPr>
+        <p:spPr>
+          <a:xfrm>
+            <a:off x="7274052" y="4169664"/>
+            <a:ext cx="685800" cy="475488"/>
+          </a:xfrm>
+          <a:prstGeom prst="rect">
+            <a:avLst/>
+          </a:prstGeom>
+          <a:noFill/>
+          <a:ln/>
+        </p:spPr>
+        <p:txBody>
+          <a:bodyPr wrap="square" lIns="0" tIns="0" rIns="0" bIns="0" rtlCol="0" anchor="ctr"/>
+          <a:lstStyle/>
+          <a:p>
+            <a:pPr algn="ctr" indent="0" marL="0">
+              <a:buNone/>
+            </a:pPr>
+            <a:r>
+              <a:rPr lang="en-US" sz="900" b="1" dirty="0">
+                <a:solidFill>
+                  <a:srgbClr val="9D174D"/>
+                </a:solidFill>
+                <a:latin typeface="Trebuchet MS" pitchFamily="34" charset="0"/>
+                <a:ea typeface="Trebuchet MS" pitchFamily="34" charset="-122"/>
+                <a:cs typeface="Trebuchet MS" pitchFamily="34" charset="-120"/>
+              </a:rPr>
+              <a:t>t</a:t>
             </a:r>
             <a:endParaRPr lang="en-US" sz="900" dirty="0"/>
           </a:p>
@@ -33332,7 +33464,7 @@
                 <a:ea typeface="Trebuchet MS" pitchFamily="34" charset="-122"/>
                 <a:cs typeface="Trebuchet MS" pitchFamily="34" charset="-120"/>
               </a:rPr>
-              <a:t>-ness</a:t>
+              <a:t>--ly</a:t>
             </a:r>
             <a:endParaRPr lang="en-US" sz="1300" dirty="0"/>
           </a:p>
@@ -33396,7 +33528,7 @@
                 <a:ea typeface="Trebuchet MS" pitchFamily="34" charset="-122"/>
                 <a:cs typeface="Trebuchet MS" pitchFamily="34" charset="-120"/>
               </a:rPr>
-              <a:t>af-</a:t>
+              <a:t>mid-</a:t>
             </a:r>
             <a:endParaRPr lang="en-US" sz="1300" dirty="0"/>
           </a:p>
@@ -33485,7 +33617,7 @@
                 <a:ea typeface="Trebuchet MS" pitchFamily="34" charset="-122"/>
                 <a:cs typeface="Trebuchet MS" pitchFamily="34" charset="-120"/>
               </a:rPr>
-              <a:t>-ly</a:t>
+              <a:t>--ness</a:t>
             </a:r>
             <a:endParaRPr lang="en-US" sz="1300" dirty="0"/>
           </a:p>
@@ -33638,7 +33770,7 @@
                 <a:ea typeface="Trebuchet MS" pitchFamily="34" charset="-122"/>
                 <a:cs typeface="Trebuchet MS" pitchFamily="34" charset="-120"/>
               </a:rPr>
-              <a:t>-er</a:t>
+              <a:t>--er</a:t>
             </a:r>
             <a:endParaRPr lang="en-US" sz="1300" dirty="0"/>
           </a:p>
@@ -33702,7 +33834,7 @@
                 <a:ea typeface="Trebuchet MS" pitchFamily="34" charset="-122"/>
                 <a:cs typeface="Trebuchet MS" pitchFamily="34" charset="-120"/>
               </a:rPr>
-              <a:t>mid-</a:t>
+              <a:t>fare-</a:t>
             </a:r>
             <a:endParaRPr lang="en-US" sz="1300" dirty="0"/>
           </a:p>
@@ -33791,7 +33923,7 @@
                 <a:ea typeface="Trebuchet MS" pitchFamily="34" charset="-122"/>
                 <a:cs typeface="Trebuchet MS" pitchFamily="34" charset="-120"/>
               </a:rPr>
-              <a:t>-est</a:t>
+              <a:t>--est</a:t>
             </a:r>
             <a:endParaRPr lang="en-US" sz="1300" dirty="0"/>
           </a:p>
@@ -33855,7 +33987,7 @@
                 <a:ea typeface="Trebuchet MS" pitchFamily="34" charset="-122"/>
                 <a:cs typeface="Trebuchet MS" pitchFamily="34" charset="-120"/>
               </a:rPr>
-              <a:t>fun-</a:t>
+              <a:t>fare-</a:t>
             </a:r>
             <a:endParaRPr lang="en-US" sz="1300" dirty="0"/>
           </a:p>
@@ -33944,7 +34076,7 @@
                 <a:ea typeface="Trebuchet MS" pitchFamily="34" charset="-122"/>
                 <a:cs typeface="Trebuchet MS" pitchFamily="34" charset="-120"/>
               </a:rPr>
-              <a:t>-ground</a:t>
+              <a:t>--ground</a:t>
             </a:r>
             <a:endParaRPr lang="en-US" sz="1300" dirty="0"/>
           </a:p>
@@ -34115,7 +34247,7 @@
                 <a:ea typeface="Trebuchet MS" pitchFamily="34" charset="-122"/>
                 <a:cs typeface="Trebuchet MS" pitchFamily="34" charset="-120"/>
               </a:rPr>
-              <a:t>unfair</a:t>
+              <a:t>fairly</a:t>
             </a:r>
             <a:endParaRPr lang="en-US" sz="1200" dirty="0"/>
           </a:p>
@@ -34181,7 +34313,7 @@
                 <a:ea typeface="Trebuchet MS" pitchFamily="34" charset="-122"/>
                 <a:cs typeface="Trebuchet MS" pitchFamily="34" charset="-120"/>
               </a:rPr>
-              <a:t>fairly</a:t>
+              <a:t>fairness</a:t>
             </a:r>
             <a:endParaRPr lang="en-US" sz="1200" dirty="0"/>
           </a:p>
@@ -34247,7 +34379,7 @@
                 <a:ea typeface="Trebuchet MS" pitchFamily="34" charset="-122"/>
                 <a:cs typeface="Trebuchet MS" pitchFamily="34" charset="-120"/>
               </a:rPr>
-              <a:t>fairness</a:t>
+              <a:t>unfair</a:t>
             </a:r>
             <a:endParaRPr lang="en-US" sz="1200" dirty="0"/>
           </a:p>
@@ -34313,7 +34445,7 @@
                 <a:ea typeface="Trebuchet MS" pitchFamily="34" charset="-122"/>
                 <a:cs typeface="Trebuchet MS" pitchFamily="34" charset="-120"/>
               </a:rPr>
-              <a:t>fairest</a:t>
+              <a:t>unfairly</a:t>
             </a:r>
             <a:endParaRPr lang="en-US" sz="1200" dirty="0"/>
           </a:p>
@@ -34379,7 +34511,7 @@
                 <a:ea typeface="Trebuchet MS" pitchFamily="34" charset="-122"/>
                 <a:cs typeface="Trebuchet MS" pitchFamily="34" charset="-120"/>
               </a:rPr>
-              <a:t>fairer</a:t>
+              <a:t>fairground</a:t>
             </a:r>
             <a:endParaRPr lang="en-US" sz="1200" dirty="0"/>
           </a:p>
@@ -34445,7 +34577,7 @@
                 <a:ea typeface="Trebuchet MS" pitchFamily="34" charset="-122"/>
                 <a:cs typeface="Trebuchet MS" pitchFamily="34" charset="-120"/>
               </a:rPr>
-              <a:t>fairground</a:t>
+              <a:t>fairer</a:t>
             </a:r>
             <a:endParaRPr lang="en-US" sz="1200" dirty="0"/>
           </a:p>
@@ -34511,7 +34643,7 @@
                 <a:ea typeface="Trebuchet MS" pitchFamily="34" charset="-122"/>
                 <a:cs typeface="Trebuchet MS" pitchFamily="34" charset="-120"/>
               </a:rPr>
-              <a:t>unfairly</a:t>
+              <a:t>fairest</a:t>
             </a:r>
             <a:endParaRPr lang="en-US" sz="1200" dirty="0"/>
           </a:p>
@@ -35699,7 +35831,7 @@
                 <a:ea typeface="Calibri" pitchFamily="34" charset="-122"/>
                 <a:cs typeface="Calibri" pitchFamily="34" charset="-120"/>
               </a:rPr>
-              <a:t>1.  The word 'unfair' contains the prefix 'un-' meaning 'not'.</a:t>
+              <a:t>1.  The prefix 'un-' in 'unfair' means 'again'.</a:t>
             </a:r>
             <a:endParaRPr lang="en-US" sz="1300" dirty="0"/>
           </a:p>
@@ -35722,11 +35854,11 @@
             </a:avLst>
           </a:prstGeom>
           <a:solidFill>
-            <a:srgbClr val="DCFCE7"/>
-          </a:solidFill>
-          <a:ln w="12700">
-            <a:solidFill>
-              <a:srgbClr val="16A34A"/>
+            <a:srgbClr val="FEE2E2"/>
+          </a:solidFill>
+          <a:ln w="12700">
+            <a:solidFill>
+              <a:srgbClr val="DC2626"/>
             </a:solidFill>
             <a:prstDash val="solid"/>
           </a:ln>
@@ -35759,13 +35891,13 @@
             <a:r>
               <a:rPr lang="en-US" sz="1100" b="1" dirty="0">
                 <a:solidFill>
-                  <a:srgbClr val="16A34A"/>
+                  <a:srgbClr val="DC2626"/>
                 </a:solidFill>
                 <a:latin typeface="Trebuchet MS" pitchFamily="34" charset="0"/>
                 <a:ea typeface="Trebuchet MS" pitchFamily="34" charset="-122"/>
                 <a:cs typeface="Trebuchet MS" pitchFamily="34" charset="-120"/>
               </a:rPr>
-              <a:t>TRUE</a:t>
+              <a:t>FALSE</a:t>
             </a:r>
             <a:endParaRPr lang="en-US" sz="1100" dirty="0"/>
           </a:p>
@@ -35838,7 +35970,7 @@
                 <a:ea typeface="Calibri" pitchFamily="34" charset="-122"/>
                 <a:cs typeface="Calibri" pitchFamily="34" charset="-120"/>
               </a:rPr>
-              <a:t>2.  The root 'fair' comes from a Greek word meaning 'light'.</a:t>
+              <a:t>2.  Adding '-ness' to 'fair' makes the word 'fairness', meaning the quality of being just.</a:t>
             </a:r>
             <a:endParaRPr lang="en-US" sz="1300" dirty="0"/>
           </a:p>
@@ -35861,11 +35993,11 @@
             </a:avLst>
           </a:prstGeom>
           <a:solidFill>
-            <a:srgbClr val="FEE2E2"/>
-          </a:solidFill>
-          <a:ln w="12700">
-            <a:solidFill>
-              <a:srgbClr val="DC2626"/>
+            <a:srgbClr val="DCFCE7"/>
+          </a:solidFill>
+          <a:ln w="12700">
+            <a:solidFill>
+              <a:srgbClr val="16A34A"/>
             </a:solidFill>
             <a:prstDash val="solid"/>
           </a:ln>
@@ -35898,13 +36030,13 @@
             <a:r>
               <a:rPr lang="en-US" sz="1100" b="1" dirty="0">
                 <a:solidFill>
-                  <a:srgbClr val="DC2626"/>
+                  <a:srgbClr val="16A34A"/>
                 </a:solidFill>
                 <a:latin typeface="Trebuchet MS" pitchFamily="34" charset="0"/>
                 <a:ea typeface="Trebuchet MS" pitchFamily="34" charset="-122"/>
                 <a:cs typeface="Trebuchet MS" pitchFamily="34" charset="-120"/>
               </a:rPr>
-              <a:t>FALSE</a:t>
+              <a:t>TRUE</a:t>
             </a:r>
             <a:endParaRPr lang="en-US" sz="1100" dirty="0"/>
           </a:p>
@@ -35977,7 +36109,7 @@
                 <a:ea typeface="Calibri" pitchFamily="34" charset="-122"/>
                 <a:cs typeface="Calibri" pitchFamily="34" charset="-120"/>
               </a:rPr>
-              <a:t>3.  Adding '-ness' to 'fair' makes the noun 'fairness'.</a:t>
+              <a:t>3.  The root 'fair' comes from ancient Greek.</a:t>
             </a:r>
             <a:endParaRPr lang="en-US" sz="1300" dirty="0"/>
           </a:p>
@@ -36000,11 +36132,11 @@
             </a:avLst>
           </a:prstGeom>
           <a:solidFill>
-            <a:srgbClr val="DCFCE7"/>
-          </a:solidFill>
-          <a:ln w="12700">
-            <a:solidFill>
-              <a:srgbClr val="16A34A"/>
+            <a:srgbClr val="FEE2E2"/>
+          </a:solidFill>
+          <a:ln w="12700">
+            <a:solidFill>
+              <a:srgbClr val="DC2626"/>
             </a:solidFill>
             <a:prstDash val="solid"/>
           </a:ln>
@@ -36037,13 +36169,13 @@
             <a:r>
               <a:rPr lang="en-US" sz="1100" b="1" dirty="0">
                 <a:solidFill>
-                  <a:srgbClr val="16A34A"/>
+                  <a:srgbClr val="DC2626"/>
                 </a:solidFill>
                 <a:latin typeface="Trebuchet MS" pitchFamily="34" charset="0"/>
                 <a:ea typeface="Trebuchet MS" pitchFamily="34" charset="-122"/>
                 <a:cs typeface="Trebuchet MS" pitchFamily="34" charset="-120"/>
               </a:rPr>
-              <a:t>TRUE</a:t>
+              <a:t>FALSE</a:t>
             </a:r>
             <a:endParaRPr lang="en-US" sz="1100" dirty="0"/>
           </a:p>
@@ -36116,7 +36248,7 @@
                 <a:ea typeface="Calibri" pitchFamily="34" charset="-122"/>
                 <a:cs typeface="Calibri" pitchFamily="34" charset="-120"/>
               </a:rPr>
-              <a:t>4.  The word 'fairly' means doing something in a just and equal way.</a:t>
+              <a:t>4.  The word 'unfair' contains the root 'fair'.</a:t>
             </a:r>
             <a:endParaRPr lang="en-US" sz="1300" dirty="0"/>
           </a:p>
@@ -36255,7 +36387,7 @@
                 <a:ea typeface="Calibri" pitchFamily="34" charset="-122"/>
                 <a:cs typeface="Calibri" pitchFamily="34" charset="-120"/>
               </a:rPr>
-              <a:t>5.  The word 'fairground' means a place where animals are judged.</a:t>
+              <a:t>5.  The word 'fairground' is made up of two parts: 'fair' and 'ground'.</a:t>
             </a:r>
             <a:endParaRPr lang="en-US" sz="1300" dirty="0"/>
           </a:p>
@@ -36278,11 +36410,11 @@
             </a:avLst>
           </a:prstGeom>
           <a:solidFill>
-            <a:srgbClr val="FEE2E2"/>
-          </a:solidFill>
-          <a:ln w="12700">
-            <a:solidFill>
-              <a:srgbClr val="DC2626"/>
+            <a:srgbClr val="DCFCE7"/>
+          </a:solidFill>
+          <a:ln w="12700">
+            <a:solidFill>
+              <a:srgbClr val="16A34A"/>
             </a:solidFill>
             <a:prstDash val="solid"/>
           </a:ln>
@@ -36315,13 +36447,13 @@
             <a:r>
               <a:rPr lang="en-US" sz="1100" b="1" dirty="0">
                 <a:solidFill>
-                  <a:srgbClr val="DC2626"/>
+                  <a:srgbClr val="16A34A"/>
                 </a:solidFill>
                 <a:latin typeface="Trebuchet MS" pitchFamily="34" charset="0"/>
                 <a:ea typeface="Trebuchet MS" pitchFamily="34" charset="-122"/>
                 <a:cs typeface="Trebuchet MS" pitchFamily="34" charset="-120"/>
               </a:rPr>
-              <a:t>FALSE</a:t>
+              <a:t>TRUE</a:t>
             </a:r>
             <a:endParaRPr lang="en-US" sz="1100" dirty="0"/>
           </a:p>
@@ -36789,7 +36921,7 @@
                 <a:ea typeface="Calibri" pitchFamily="34" charset="-122"/>
                 <a:cs typeface="Calibri" pitchFamily="34" charset="-120"/>
               </a:rPr>
-              <a:t>Origin: Latin: fair (Old English: fæger)</a:t>
+              <a:t>Origin: Latin: fair</a:t>
             </a:r>
             <a:endParaRPr lang="en-US" sz="1100" dirty="0"/>
           </a:p>
@@ -36960,7 +37092,7 @@
                 <a:ea typeface="Trebuchet MS" pitchFamily="34" charset="-122"/>
                 <a:cs typeface="Trebuchet MS" pitchFamily="34" charset="-120"/>
               </a:rPr>
-              <a:t>unfair</a:t>
+              <a:t>fairly</a:t>
             </a:r>
             <a:endParaRPr lang="en-US" sz="1300" dirty="0"/>
           </a:p>
@@ -37026,7 +37158,7 @@
                 <a:ea typeface="Trebuchet MS" pitchFamily="34" charset="-122"/>
                 <a:cs typeface="Trebuchet MS" pitchFamily="34" charset="-120"/>
               </a:rPr>
-              <a:t>fairly</a:t>
+              <a:t>fairness</a:t>
             </a:r>
             <a:endParaRPr lang="en-US" sz="1300" dirty="0"/>
           </a:p>
@@ -37092,7 +37224,7 @@
                 <a:ea typeface="Trebuchet MS" pitchFamily="34" charset="-122"/>
                 <a:cs typeface="Trebuchet MS" pitchFamily="34" charset="-120"/>
               </a:rPr>
-              <a:t>fairness</a:t>
+              <a:t>unfair</a:t>
             </a:r>
             <a:endParaRPr lang="en-US" sz="1300" dirty="0"/>
           </a:p>
@@ -37158,7 +37290,7 @@
                 <a:ea typeface="Trebuchet MS" pitchFamily="34" charset="-122"/>
                 <a:cs typeface="Trebuchet MS" pitchFamily="34" charset="-120"/>
               </a:rPr>
-              <a:t>fairest</a:t>
+              <a:t>unfairly</a:t>
             </a:r>
             <a:endParaRPr lang="en-US" sz="1300" dirty="0"/>
           </a:p>
@@ -37224,7 +37356,7 @@
                 <a:ea typeface="Trebuchet MS" pitchFamily="34" charset="-122"/>
                 <a:cs typeface="Trebuchet MS" pitchFamily="34" charset="-120"/>
               </a:rPr>
-              <a:t>fairer</a:t>
+              <a:t>fairground</a:t>
             </a:r>
             <a:endParaRPr lang="en-US" sz="1300" dirty="0"/>
           </a:p>
@@ -37290,7 +37422,7 @@
                 <a:ea typeface="Trebuchet MS" pitchFamily="34" charset="-122"/>
                 <a:cs typeface="Trebuchet MS" pitchFamily="34" charset="-120"/>
               </a:rPr>
-              <a:t>fairground</a:t>
+              <a:t>fairer</a:t>
             </a:r>
             <a:endParaRPr lang="en-US" sz="1300" dirty="0"/>
           </a:p>
@@ -38011,7 +38143,7 @@
                 <a:ea typeface="Trebuchet MS" pitchFamily="34" charset="-122"/>
                 <a:cs typeface="Trebuchet MS" pitchFamily="34" charset="-120"/>
               </a:rPr>
-              <a:t>-ness</a:t>
+              <a:t>--ly</a:t>
             </a:r>
             <a:endParaRPr lang="en-US" sz="1300" dirty="0"/>
           </a:p>
@@ -38075,7 +38207,7 @@
                 <a:ea typeface="Trebuchet MS" pitchFamily="34" charset="-122"/>
                 <a:cs typeface="Trebuchet MS" pitchFamily="34" charset="-120"/>
               </a:rPr>
-              <a:t>af-</a:t>
+              <a:t>mid-</a:t>
             </a:r>
             <a:endParaRPr lang="en-US" sz="1300" dirty="0"/>
           </a:p>
@@ -38164,7 +38296,7 @@
                 <a:ea typeface="Trebuchet MS" pitchFamily="34" charset="-122"/>
                 <a:cs typeface="Trebuchet MS" pitchFamily="34" charset="-120"/>
               </a:rPr>
-              <a:t>-ly</a:t>
+              <a:t>--ness</a:t>
             </a:r>
             <a:endParaRPr lang="en-US" sz="1300" dirty="0"/>
           </a:p>
@@ -38317,7 +38449,7 @@
                 <a:ea typeface="Trebuchet MS" pitchFamily="34" charset="-122"/>
                 <a:cs typeface="Trebuchet MS" pitchFamily="34" charset="-120"/>
               </a:rPr>
-              <a:t>-er</a:t>
+              <a:t>--er</a:t>
             </a:r>
             <a:endParaRPr lang="en-US" sz="1300" dirty="0"/>
           </a:p>
@@ -38381,7 +38513,7 @@
                 <a:ea typeface="Trebuchet MS" pitchFamily="34" charset="-122"/>
                 <a:cs typeface="Trebuchet MS" pitchFamily="34" charset="-120"/>
               </a:rPr>
-              <a:t>mid-</a:t>
+              <a:t>fare-</a:t>
             </a:r>
             <a:endParaRPr lang="en-US" sz="1300" dirty="0"/>
           </a:p>
@@ -38470,7 +38602,7 @@
                 <a:ea typeface="Trebuchet MS" pitchFamily="34" charset="-122"/>
                 <a:cs typeface="Trebuchet MS" pitchFamily="34" charset="-120"/>
               </a:rPr>
-              <a:t>-est</a:t>
+              <a:t>--est</a:t>
             </a:r>
             <a:endParaRPr lang="en-US" sz="1300" dirty="0"/>
           </a:p>
@@ -38534,7 +38666,7 @@
                 <a:ea typeface="Trebuchet MS" pitchFamily="34" charset="-122"/>
                 <a:cs typeface="Trebuchet MS" pitchFamily="34" charset="-120"/>
               </a:rPr>
-              <a:t>fun-</a:t>
+              <a:t>fare-</a:t>
             </a:r>
             <a:endParaRPr lang="en-US" sz="1300" dirty="0"/>
           </a:p>
@@ -38623,7 +38755,7 @@
                 <a:ea typeface="Trebuchet MS" pitchFamily="34" charset="-122"/>
                 <a:cs typeface="Trebuchet MS" pitchFamily="34" charset="-120"/>
               </a:rPr>
-              <a:t>-ground</a:t>
+              <a:t>--ground</a:t>
             </a:r>
             <a:endParaRPr lang="en-US" sz="1300" dirty="0"/>
           </a:p>
@@ -38901,7 +39033,7 @@
         <p:spPr>
           <a:xfrm>
             <a:off x="4325112" y="4178808"/>
-            <a:ext cx="1097280" cy="420624"/>
+            <a:ext cx="950976" cy="420624"/>
           </a:xfrm>
           <a:prstGeom prst="rect">
             <a:avLst>
@@ -38935,7 +39067,7 @@
         <p:spPr>
           <a:xfrm>
             <a:off x="4325112" y="4178808"/>
-            <a:ext cx="1097280" cy="420624"/>
+            <a:ext cx="950976" cy="420624"/>
           </a:xfrm>
           <a:prstGeom prst="rect">
             <a:avLst/>
@@ -38959,7 +39091,7 @@
                 <a:ea typeface="Trebuchet MS" pitchFamily="34" charset="-122"/>
                 <a:cs typeface="Trebuchet MS" pitchFamily="34" charset="-120"/>
               </a:rPr>
-              <a:t>-ness</a:t>
+              <a:t>--ly</a:t>
             </a:r>
             <a:endParaRPr lang="en-US" sz="1300" dirty="0"/>
           </a:p>
@@ -38973,7 +39105,7 @@
         </p:nvSpPr>
         <p:spPr>
           <a:xfrm>
-            <a:off x="5495544" y="4178808"/>
+            <a:off x="5349240" y="4178808"/>
             <a:ext cx="365760" cy="420624"/>
           </a:xfrm>
           <a:prstGeom prst="rect">
@@ -39012,7 +39144,7 @@
         </p:nvSpPr>
         <p:spPr>
           <a:xfrm>
-            <a:off x="5907024" y="4178808"/>
+            <a:off x="5760720" y="4178808"/>
             <a:ext cx="2194560" cy="420624"/>
           </a:xfrm>
           <a:prstGeom prst="rect">
@@ -39039,7 +39171,7 @@
         </p:nvSpPr>
         <p:spPr>
           <a:xfrm>
-            <a:off x="5907024" y="4178808"/>
+            <a:off x="5760720" y="4178808"/>
             <a:ext cx="2194560" cy="420624"/>
           </a:xfrm>
           <a:prstGeom prst="rect">
@@ -39534,7 +39666,7 @@
                 <a:ea typeface="Calibri" pitchFamily="34" charset="-122"/>
                 <a:cs typeface="Calibri" pitchFamily="34" charset="-120"/>
               </a:rPr>
-              <a:t>Treating everyone equally and with respect.</a:t>
+              <a:t>Treating everyone equally and in the right way.</a:t>
             </a:r>
             <a:endParaRPr lang="en-US" sz="1200" dirty="0"/>
           </a:p>
@@ -39607,7 +39739,7 @@
                 <a:ea typeface="Trebuchet MS" pitchFamily="34" charset="-122"/>
                 <a:cs typeface="Trebuchet MS" pitchFamily="34" charset="-120"/>
               </a:rPr>
-              <a:t>unfair</a:t>
+              <a:t>fairly</a:t>
             </a:r>
             <a:endParaRPr lang="en-US" sz="1200" dirty="0"/>
           </a:p>
@@ -39673,7 +39805,7 @@
                 <a:ea typeface="Calibri" pitchFamily="34" charset="-122"/>
                 <a:cs typeface="Calibri" pitchFamily="34" charset="-120"/>
               </a:rPr>
-              <a:t>The quality of treating people equally and without favouritism.</a:t>
+              <a:t>Not treating people equally or in the right way.</a:t>
             </a:r>
             <a:endParaRPr lang="en-US" sz="1200" dirty="0"/>
           </a:p>
@@ -39746,7 +39878,7 @@
                 <a:ea typeface="Trebuchet MS" pitchFamily="34" charset="-122"/>
                 <a:cs typeface="Trebuchet MS" pitchFamily="34" charset="-120"/>
               </a:rPr>
-              <a:t>fairly</a:t>
+              <a:t>fairness</a:t>
             </a:r>
             <a:endParaRPr lang="en-US" sz="1200" dirty="0"/>
           </a:p>
@@ -39812,7 +39944,7 @@
                 <a:ea typeface="Calibri" pitchFamily="34" charset="-122"/>
                 <a:cs typeface="Calibri" pitchFamily="34" charset="-120"/>
               </a:rPr>
-              <a:t>In a way that is just and equal to everyone.</a:t>
+              <a:t>The quality of treating people equally and without favouritism.</a:t>
             </a:r>
             <a:endParaRPr lang="en-US" sz="1200" dirty="0"/>
           </a:p>
@@ -39885,7 +40017,7 @@
                 <a:ea typeface="Trebuchet MS" pitchFamily="34" charset="-122"/>
                 <a:cs typeface="Trebuchet MS" pitchFamily="34" charset="-120"/>
               </a:rPr>
-              <a:t>fairness</a:t>
+              <a:t>unfair</a:t>
             </a:r>
             <a:endParaRPr lang="en-US" sz="1200" dirty="0"/>
           </a:p>
@@ -39951,7 +40083,7 @@
                 <a:ea typeface="Calibri" pitchFamily="34" charset="-122"/>
                 <a:cs typeface="Calibri" pitchFamily="34" charset="-120"/>
               </a:rPr>
-              <a:t>The most beautiful or most just of all.</a:t>
+              <a:t>In a way that does not treat people equally.</a:t>
             </a:r>
             <a:endParaRPr lang="en-US" sz="1200" dirty="0"/>
           </a:p>
@@ -40024,7 +40156,7 @@
                 <a:ea typeface="Trebuchet MS" pitchFamily="34" charset="-122"/>
                 <a:cs typeface="Trebuchet MS" pitchFamily="34" charset="-120"/>
               </a:rPr>
-              <a:t>fairest</a:t>
+              <a:t>unfairly</a:t>
             </a:r>
             <a:endParaRPr lang="en-US" sz="1200" dirty="0"/>
           </a:p>
@@ -40090,7 +40222,7 @@
                 <a:ea typeface="Calibri" pitchFamily="34" charset="-122"/>
                 <a:cs typeface="Calibri" pitchFamily="34" charset="-120"/>
               </a:rPr>
-              <a:t>An outdoor area where fairs with rides and games are held.</a:t>
+              <a:t>More equal or just than something else.</a:t>
             </a:r>
             <a:endParaRPr lang="en-US" sz="1200" dirty="0"/>
           </a:p>
@@ -40163,7 +40295,7 @@
                 <a:ea typeface="Trebuchet MS" pitchFamily="34" charset="-122"/>
                 <a:cs typeface="Trebuchet MS" pitchFamily="34" charset="-120"/>
               </a:rPr>
-              <a:t>fairer</a:t>
+              <a:t>fairground</a:t>
             </a:r>
             <a:endParaRPr lang="en-US" sz="1200" dirty="0"/>
           </a:p>
@@ -40229,7 +40361,7 @@
                 <a:ea typeface="Calibri" pitchFamily="34" charset="-122"/>
                 <a:cs typeface="Calibri" pitchFamily="34" charset="-120"/>
               </a:rPr>
-              <a:t>More equal or more just than something else.</a:t>
+              <a:t>An outdoor area where a travelling fair with rides and games is held.</a:t>
             </a:r>
             <a:endParaRPr lang="en-US" sz="1200" dirty="0"/>
           </a:p>
@@ -40302,7 +40434,7 @@
                 <a:ea typeface="Trebuchet MS" pitchFamily="34" charset="-122"/>
                 <a:cs typeface="Trebuchet MS" pitchFamily="34" charset="-120"/>
               </a:rPr>
-              <a:t>fairground</a:t>
+              <a:t>fairer</a:t>
             </a:r>
             <a:endParaRPr lang="en-US" sz="1200" dirty="0"/>
           </a:p>
@@ -40368,7 +40500,7 @@
                 <a:ea typeface="Calibri" pitchFamily="34" charset="-122"/>
                 <a:cs typeface="Calibri" pitchFamily="34" charset="-120"/>
               </a:rPr>
-              <a:t>Not treating everyone equally; one-sided or unjust.</a:t>
+              <a:t>In a way that is just and equal to everyone.</a:t>
             </a:r>
             <a:endParaRPr lang="en-US" sz="1200" dirty="0"/>
           </a:p>
@@ -40863,7 +40995,7 @@
                 <a:ea typeface="Calibri" pitchFamily="34" charset="-122"/>
                 <a:cs typeface="Calibri" pitchFamily="34" charset="-120"/>
               </a:rPr>
-              <a:t>The teacher made sure the game rules were fair so that every student had an equal chance of winning.</a:t>
+              <a:t>The teacher made sure the class rules were fair so that every student was treated equally.</a:t>
             </a:r>
             <a:endParaRPr lang="en-US" sz="1500" dirty="0"/>
           </a:p>
@@ -41027,7 +41159,7 @@
                 <a:ea typeface="Calibri" pitchFamily="34" charset="-122"/>
                 <a:cs typeface="Calibri" pitchFamily="34" charset="-120"/>
               </a:rPr>
-              <a:t>Maya thought it was unfair that her brother got a bigger slice of cake than she did.</a:t>
+              <a:t>It felt unfair when only some students were chosen to go on the excursion.</a:t>
             </a:r>
             <a:endParaRPr lang="en-US" sz="1500" dirty="0"/>
           </a:p>
@@ -41191,7 +41323,7 @@
                 <a:ea typeface="Calibri" pitchFamily="34" charset="-122"/>
                 <a:cs typeface="Calibri" pitchFamily="34" charset="-120"/>
               </a:rPr>
-              <a:t>The judge decided fairly, making sure both sides of the argument were carefully heard.</a:t>
+              <a:t>We visited the fairground on the weekend and went on the Ferris wheel three times!</a:t>
             </a:r>
             <a:endParaRPr lang="en-US" sz="1500" dirty="0"/>
           </a:p>
